--- a/Boek 2 - Kosten, opbrengsten, elasticiteit en surplus/edities/chat-2026/bronnen/H3/paragrafen/2.3.3 Pareto-efficiëntie en welvaartsverlies/2.3.3 Pareto-efficiëntie en welvaartsverlies – presentatie.pptx
+++ b/Boek 2 - Kosten, opbrengsten, elasticiteit en surplus/edities/chat-2026/bronnen/H3/paragrafen/2.3.3 Pareto-efficiëntie en welvaartsverlies/2.3.3 Pareto-efficiëntie en welvaartsverlies – presentatie.pptx
@@ -2,42 +2,42 @@
 <file path=ppt/presentation.xml><?xml version="1.0" encoding="utf-8"?>
 <p:presentation xmlns:p="http://schemas.openxmlformats.org/presentationml/2006/main">
   <p:sldMasterIdLst>
-    <p:sldMasterId xmlns:r="http://schemas.openxmlformats.org/officeDocument/2006/relationships" id="2147483648" r:id="Rd3451e1286334de2"/>
+    <p:sldMasterId xmlns:r="http://schemas.openxmlformats.org/officeDocument/2006/relationships" id="2147483648" r:id="R8fd1b76f9ab340ae"/>
   </p:sldMasterIdLst>
   <p:notesMasterIdLst>
-    <p:notesMasterId xmlns:r="http://schemas.openxmlformats.org/officeDocument/2006/relationships" r:id="Rcbaaeb21d89d4b52"/>
+    <p:notesMasterId xmlns:r="http://schemas.openxmlformats.org/officeDocument/2006/relationships" r:id="R0db430aaf8924010"/>
   </p:notesMasterIdLst>
   <p:sldIdLst>
-    <p:sldId xmlns:r="http://schemas.openxmlformats.org/officeDocument/2006/relationships" id="256" r:id="R0d47511c49d84674"/>
-    <p:sldId xmlns:r="http://schemas.openxmlformats.org/officeDocument/2006/relationships" id="257" r:id="Rb80c011baec649d5"/>
-    <p:sldId xmlns:r="http://schemas.openxmlformats.org/officeDocument/2006/relationships" id="258" r:id="Ra201c303ff2d4472"/>
-    <p:sldId xmlns:r="http://schemas.openxmlformats.org/officeDocument/2006/relationships" id="259" r:id="Rc21d9ce6b72d4395"/>
-    <p:sldId xmlns:r="http://schemas.openxmlformats.org/officeDocument/2006/relationships" id="260" r:id="R100fc3d5d24d409e"/>
-    <p:sldId xmlns:r="http://schemas.openxmlformats.org/officeDocument/2006/relationships" id="261" r:id="R62cfa53e43354e96"/>
-    <p:sldId xmlns:r="http://schemas.openxmlformats.org/officeDocument/2006/relationships" id="262" r:id="Rb8bcd1cb5a9644b7"/>
-    <p:sldId xmlns:r="http://schemas.openxmlformats.org/officeDocument/2006/relationships" id="263" r:id="R4ecfadb921234cfd"/>
-    <p:sldId xmlns:r="http://schemas.openxmlformats.org/officeDocument/2006/relationships" id="264" r:id="R6a88fd7f2d1a4269"/>
-    <p:sldId xmlns:r="http://schemas.openxmlformats.org/officeDocument/2006/relationships" id="265" r:id="R2d510289a3da4a62"/>
-    <p:sldId xmlns:r="http://schemas.openxmlformats.org/officeDocument/2006/relationships" id="266" r:id="R132094be08de4bda"/>
-    <p:sldId xmlns:r="http://schemas.openxmlformats.org/officeDocument/2006/relationships" id="267" r:id="Rf85cd8f8c263431b"/>
-    <p:sldId xmlns:r="http://schemas.openxmlformats.org/officeDocument/2006/relationships" id="268" r:id="R4ea820bd6d6d4c9a"/>
-    <p:sldId xmlns:r="http://schemas.openxmlformats.org/officeDocument/2006/relationships" id="269" r:id="Rb0d35845183848d2"/>
-    <p:sldId xmlns:r="http://schemas.openxmlformats.org/officeDocument/2006/relationships" id="270" r:id="Rc40eb9f325344e32"/>
-    <p:sldId xmlns:r="http://schemas.openxmlformats.org/officeDocument/2006/relationships" id="271" r:id="R3d834c9860a4426d"/>
-    <p:sldId xmlns:r="http://schemas.openxmlformats.org/officeDocument/2006/relationships" id="272" r:id="R3935231606824330"/>
-    <p:sldId xmlns:r="http://schemas.openxmlformats.org/officeDocument/2006/relationships" id="273" r:id="R0b93b6523f624e87"/>
-    <p:sldId xmlns:r="http://schemas.openxmlformats.org/officeDocument/2006/relationships" id="274" r:id="Rdf7be488201b4f21"/>
-    <p:sldId xmlns:r="http://schemas.openxmlformats.org/officeDocument/2006/relationships" id="275" r:id="R4beb300fdc434d02"/>
-    <p:sldId xmlns:r="http://schemas.openxmlformats.org/officeDocument/2006/relationships" id="276" r:id="R79c4258c3ecd404c"/>
-    <p:sldId xmlns:r="http://schemas.openxmlformats.org/officeDocument/2006/relationships" id="277" r:id="Reb6107036957471a"/>
-    <p:sldId xmlns:r="http://schemas.openxmlformats.org/officeDocument/2006/relationships" id="278" r:id="R1b17f235e0d1427b"/>
-    <p:sldId xmlns:r="http://schemas.openxmlformats.org/officeDocument/2006/relationships" id="279" r:id="R7df8986a35cf4e3a"/>
-    <p:sldId xmlns:r="http://schemas.openxmlformats.org/officeDocument/2006/relationships" id="280" r:id="Rf916f9734ec94d50"/>
-    <p:sldId xmlns:r="http://schemas.openxmlformats.org/officeDocument/2006/relationships" id="281" r:id="Rb3aba976b8014ffe"/>
-    <p:sldId xmlns:r="http://schemas.openxmlformats.org/officeDocument/2006/relationships" id="282" r:id="R92d6379a89794f17"/>
-    <p:sldId xmlns:r="http://schemas.openxmlformats.org/officeDocument/2006/relationships" id="283" r:id="Ra8a4864f9fd24af4"/>
-    <p:sldId xmlns:r="http://schemas.openxmlformats.org/officeDocument/2006/relationships" id="284" r:id="Raf5ee5cd407c4249"/>
-    <p:sldId xmlns:r="http://schemas.openxmlformats.org/officeDocument/2006/relationships" id="285" r:id="R1ec792c70a05470c"/>
+    <p:sldId xmlns:r="http://schemas.openxmlformats.org/officeDocument/2006/relationships" id="256" r:id="R6cbdabd3dc1b4e48"/>
+    <p:sldId xmlns:r="http://schemas.openxmlformats.org/officeDocument/2006/relationships" id="257" r:id="R0148e46b407748c7"/>
+    <p:sldId xmlns:r="http://schemas.openxmlformats.org/officeDocument/2006/relationships" id="258" r:id="R48c5c3ef1b364f85"/>
+    <p:sldId xmlns:r="http://schemas.openxmlformats.org/officeDocument/2006/relationships" id="259" r:id="R46c148a90794437f"/>
+    <p:sldId xmlns:r="http://schemas.openxmlformats.org/officeDocument/2006/relationships" id="260" r:id="Rf29a8c331b274b20"/>
+    <p:sldId xmlns:r="http://schemas.openxmlformats.org/officeDocument/2006/relationships" id="261" r:id="R8d8700967a3c4e35"/>
+    <p:sldId xmlns:r="http://schemas.openxmlformats.org/officeDocument/2006/relationships" id="262" r:id="Rdf15a5899a184e6d"/>
+    <p:sldId xmlns:r="http://schemas.openxmlformats.org/officeDocument/2006/relationships" id="263" r:id="R635edc33b8da4dbd"/>
+    <p:sldId xmlns:r="http://schemas.openxmlformats.org/officeDocument/2006/relationships" id="264" r:id="R6571c6f3e2a64abb"/>
+    <p:sldId xmlns:r="http://schemas.openxmlformats.org/officeDocument/2006/relationships" id="265" r:id="R3a529be8153349ba"/>
+    <p:sldId xmlns:r="http://schemas.openxmlformats.org/officeDocument/2006/relationships" id="266" r:id="R72d04dd445224608"/>
+    <p:sldId xmlns:r="http://schemas.openxmlformats.org/officeDocument/2006/relationships" id="267" r:id="Raeb18f271b7a411b"/>
+    <p:sldId xmlns:r="http://schemas.openxmlformats.org/officeDocument/2006/relationships" id="268" r:id="R3245a9a6af3b4fb8"/>
+    <p:sldId xmlns:r="http://schemas.openxmlformats.org/officeDocument/2006/relationships" id="269" r:id="Ra882c2e3b6f4449a"/>
+    <p:sldId xmlns:r="http://schemas.openxmlformats.org/officeDocument/2006/relationships" id="270" r:id="R9392591c511c4cf5"/>
+    <p:sldId xmlns:r="http://schemas.openxmlformats.org/officeDocument/2006/relationships" id="271" r:id="Rbcbe34f57d1e47d7"/>
+    <p:sldId xmlns:r="http://schemas.openxmlformats.org/officeDocument/2006/relationships" id="272" r:id="Ra91d644b1ac84a95"/>
+    <p:sldId xmlns:r="http://schemas.openxmlformats.org/officeDocument/2006/relationships" id="273" r:id="R5642a83b52084b26"/>
+    <p:sldId xmlns:r="http://schemas.openxmlformats.org/officeDocument/2006/relationships" id="274" r:id="R00824e869fb94580"/>
+    <p:sldId xmlns:r="http://schemas.openxmlformats.org/officeDocument/2006/relationships" id="275" r:id="R688bd24f47ac40bd"/>
+    <p:sldId xmlns:r="http://schemas.openxmlformats.org/officeDocument/2006/relationships" id="276" r:id="R6b74b350f9344e02"/>
+    <p:sldId xmlns:r="http://schemas.openxmlformats.org/officeDocument/2006/relationships" id="277" r:id="R303c0a9d56af452e"/>
+    <p:sldId xmlns:r="http://schemas.openxmlformats.org/officeDocument/2006/relationships" id="278" r:id="R125cc9be29394fc9"/>
+    <p:sldId xmlns:r="http://schemas.openxmlformats.org/officeDocument/2006/relationships" id="279" r:id="Rf4737338685642fb"/>
+    <p:sldId xmlns:r="http://schemas.openxmlformats.org/officeDocument/2006/relationships" id="280" r:id="Ra6e8a22fad494896"/>
+    <p:sldId xmlns:r="http://schemas.openxmlformats.org/officeDocument/2006/relationships" id="281" r:id="R9c3aeb5a56234a13"/>
+    <p:sldId xmlns:r="http://schemas.openxmlformats.org/officeDocument/2006/relationships" id="282" r:id="R664f61c4bc1a4fcb"/>
+    <p:sldId xmlns:r="http://schemas.openxmlformats.org/officeDocument/2006/relationships" id="283" r:id="R6dfdf3b5f60b446e"/>
+    <p:sldId xmlns:r="http://schemas.openxmlformats.org/officeDocument/2006/relationships" id="284" r:id="R91f008946da74100"/>
+    <p:sldId xmlns:r="http://schemas.openxmlformats.org/officeDocument/2006/relationships" id="285" r:id="R013c84810718418e"/>
   </p:sldIdLst>
   <p:sldSz cx="15240000" cy="8572500"/>
   <p:notesSz cx="6858000" cy="9144000"/>
@@ -472,7 +472,7 @@
           <a:p xmlns:a="http://schemas.openxmlformats.org/drawingml/2006/main">
             <a:r>
               <a:rPr sz="1400"/>
-              <a:t>Uitleg: Laat dit overzicht staan tijdens startopdracht. Start 1–2 en basis 3 op p.96; basis 4 op p.97; zelfstandig 5 op p.98; doel 6 op p.99–100. Huiswerk 3,4,5,6 maken en nakijken. Bonus 7 en herhaling 8–9 zijn extra. Start 1 haalt de driehoeken uit §2.3.1 p.74 en §2.3.2 p.81–84 op. Start 2 vraagt het nieuwe Pareto-criterium: lees de definities en het onderscheid met een groter totaal op p.93. Noteer een eerste redenering en twijfel. Dit is ondersteund verkennen. Keer na de uitleg terug naar 2, vóór het basiswerk. Geen aanname dat dit al beheerst wordt. De volledige route kan extra lestijd vragen; er is geen gemeten 55-minutenbegroting.</a:t>
+              <a:t>Uitleg: Laat dit overzicht staan tijdens startopdracht. Start 1–2 en basis 3 op p.97; basis 4 op p.98; zelfstandig 5 op p.99; doel 6 op p.100–101. Huiswerk 3,4,5,6 maken en nakijken. Bonus 7 en herhaling 8–9 zijn extra. Start 1 haalt de driehoeken uit §2.3.1 p.75 en §2.3.2 p.82–85 op. Start 2 vraagt het nieuwe Pareto-criterium: lees de definities en het onderscheid met een groter totaal op p.94. Noteer een eerste redenering en twijfel. Dit is ondersteund verkennen. Keer na de uitleg terug naar 2, vóór het basiswerk. Geen aanname dat dit al beheerst wordt. De volledige route kan extra lestijd vragen; er is geen gemeten 55-minutenbegroting.</a:t>
             </a:r>
           </a:p>
           <a:p xmlns:a="http://schemas.openxmlformats.org/drawingml/2006/main">
@@ -520,13 +520,13 @@
           <a:p xmlns:a="http://schemas.openxmlformats.org/drawingml/2006/main">
             <a:r>
               <a:rPr sz="1400"/>
-              <a:t>Bron: Boek 2, chatuitgave 2026, revisie 21 september 2026, gedrukte pagina 90–100. https://github.com/meijer1973/4veco-lessen/blob/d53080f38ebbdbba319e6d9b89dcba86067a72be/Boek%202%20-%20Kosten%2C%20opbrengsten%2C%20elasticiteit%20en%20surplus/edities/chat-2026/boek/Boek_2_Compleet.pdf</a:t>
-            </a:r>
-          </a:p>
-          <a:p xmlns:a="http://schemas.openxmlformats.org/drawingml/2006/main">
-            <a:r>
-              <a:rPr sz="1400"/>
-              <a:t>Antwoordmodel: https://github.com/meijer1973/4veco-lessen/blob/d53080f38ebbdbba319e6d9b89dcba86067a72be/Boek%202%20-%20Kosten%2C%20opbrengsten%2C%20elasticiteit%20en%20surplus/edities/chat-2026/bronnen/H3/2.3%20Surplus%20en%20welvaart%20%E2%80%93%20antwoorden.md</a:t>
+              <a:t>Bron: Boek 2, chatuitgave 2026, revisie 1 oktober 2026, gedrukte pagina 91–101. https://github.com/meijer1973/4veco-lessen/blob/a8940a7a79e22857a3e306a91fe923c48c63e716/Boek%202%20-%20Kosten%2C%20opbrengsten%2C%20elasticiteit%20en%20surplus/edities/chat-2026/boek/Boek_2_Compleet.pdf</a:t>
+            </a:r>
+          </a:p>
+          <a:p xmlns:a="http://schemas.openxmlformats.org/drawingml/2006/main">
+            <a:r>
+              <a:rPr sz="1400"/>
+              <a:t>Antwoordmodel: https://github.com/meijer1973/4veco-lessen/blob/a8940a7a79e22857a3e306a91fe923c48c63e716/Boek%202%20-%20Kosten%2C%20opbrengsten%2C%20elasticiteit%20en%20surplus/edities/chat-2026/bronnen/H3/2.3%20Surplus%20en%20welvaart%20%E2%80%93%20antwoorden.md</a:t>
             </a:r>
           </a:p>
           <a:p xmlns:a="http://schemas.openxmlformats.org/drawingml/2006/main">
@@ -657,13 +657,13 @@
           <a:p xmlns:a="http://schemas.openxmlformats.org/drawingml/2006/main">
             <a:r>
               <a:rPr sz="1400"/>
-              <a:t>Bron: Boek 2, chatuitgave 2026, revisie 21 september 2026, gedrukte pagina 93. https://github.com/meijer1973/4veco-lessen/blob/d53080f38ebbdbba319e6d9b89dcba86067a72be/Boek%202%20-%20Kosten%2C%20opbrengsten%2C%20elasticiteit%20en%20surplus/edities/chat-2026/boek/Boek_2_Compleet.pdf</a:t>
-            </a:r>
-          </a:p>
-          <a:p xmlns:a="http://schemas.openxmlformats.org/drawingml/2006/main">
-            <a:r>
-              <a:rPr sz="1400"/>
-              <a:t>Antwoordmodel: https://github.com/meijer1973/4veco-lessen/blob/d53080f38ebbdbba319e6d9b89dcba86067a72be/Boek%202%20-%20Kosten%2C%20opbrengsten%2C%20elasticiteit%20en%20surplus/edities/chat-2026/bronnen/H3/2.3%20Surplus%20en%20welvaart%20%E2%80%93%20antwoorden.md</a:t>
+              <a:t>Bron: Boek 2, chatuitgave 2026, revisie 1 oktober 2026, gedrukte pagina 94. https://github.com/meijer1973/4veco-lessen/blob/a8940a7a79e22857a3e306a91fe923c48c63e716/Boek%202%20-%20Kosten%2C%20opbrengsten%2C%20elasticiteit%20en%20surplus/edities/chat-2026/boek/Boek_2_Compleet.pdf</a:t>
+            </a:r>
+          </a:p>
+          <a:p xmlns:a="http://schemas.openxmlformats.org/drawingml/2006/main">
+            <a:r>
+              <a:rPr sz="1400"/>
+              <a:t>Antwoordmodel: https://github.com/meijer1973/4veco-lessen/blob/a8940a7a79e22857a3e306a91fe923c48c63e716/Boek%202%20-%20Kosten%2C%20opbrengsten%2C%20elasticiteit%20en%20surplus/edities/chat-2026/bronnen/H3/2.3%20Surplus%20en%20welvaart%20%E2%80%93%20antwoorden.md</a:t>
             </a:r>
           </a:p>
           <a:p xmlns:a="http://schemas.openxmlformats.org/drawingml/2006/main">
@@ -794,13 +794,13 @@
           <a:p xmlns:a="http://schemas.openxmlformats.org/drawingml/2006/main">
             <a:r>
               <a:rPr sz="1400"/>
-              <a:t>Bron: Boek 2, chatuitgave 2026, revisie 21 september 2026, gedrukte pagina 93, 95. https://github.com/meijer1973/4veco-lessen/blob/d53080f38ebbdbba319e6d9b89dcba86067a72be/Boek%202%20-%20Kosten%2C%20opbrengsten%2C%20elasticiteit%20en%20surplus/edities/chat-2026/boek/Boek_2_Compleet.pdf</a:t>
-            </a:r>
-          </a:p>
-          <a:p xmlns:a="http://schemas.openxmlformats.org/drawingml/2006/main">
-            <a:r>
-              <a:rPr sz="1400"/>
-              <a:t>Antwoordmodel: https://github.com/meijer1973/4veco-lessen/blob/d53080f38ebbdbba319e6d9b89dcba86067a72be/Boek%202%20-%20Kosten%2C%20opbrengsten%2C%20elasticiteit%20en%20surplus/edities/chat-2026/bronnen/H3/2.3%20Surplus%20en%20welvaart%20%E2%80%93%20antwoorden.md</a:t>
+              <a:t>Bron: Boek 2, chatuitgave 2026, revisie 1 oktober 2026, gedrukte pagina 94, 96. https://github.com/meijer1973/4veco-lessen/blob/a8940a7a79e22857a3e306a91fe923c48c63e716/Boek%202%20-%20Kosten%2C%20opbrengsten%2C%20elasticiteit%20en%20surplus/edities/chat-2026/boek/Boek_2_Compleet.pdf</a:t>
+            </a:r>
+          </a:p>
+          <a:p xmlns:a="http://schemas.openxmlformats.org/drawingml/2006/main">
+            <a:r>
+              <a:rPr sz="1400"/>
+              <a:t>Antwoordmodel: https://github.com/meijer1973/4veco-lessen/blob/a8940a7a79e22857a3e306a91fe923c48c63e716/Boek%202%20-%20Kosten%2C%20opbrengsten%2C%20elasticiteit%20en%20surplus/edities/chat-2026/bronnen/H3/2.3%20Surplus%20en%20welvaart%20%E2%80%93%20antwoorden.md</a:t>
             </a:r>
           </a:p>
           <a:p xmlns:a="http://schemas.openxmlformats.org/drawingml/2006/main">
@@ -931,13 +931,13 @@
           <a:p xmlns:a="http://schemas.openxmlformats.org/drawingml/2006/main">
             <a:r>
               <a:rPr sz="1400"/>
-              <a:t>Bron: Boek 2, chatuitgave 2026, revisie 21 september 2026, gedrukte pagina 92–93, 95. https://github.com/meijer1973/4veco-lessen/blob/d53080f38ebbdbba319e6d9b89dcba86067a72be/Boek%202%20-%20Kosten%2C%20opbrengsten%2C%20elasticiteit%20en%20surplus/edities/chat-2026/boek/Boek_2_Compleet.pdf</a:t>
-            </a:r>
-          </a:p>
-          <a:p xmlns:a="http://schemas.openxmlformats.org/drawingml/2006/main">
-            <a:r>
-              <a:rPr sz="1400"/>
-              <a:t>Antwoordmodel: https://github.com/meijer1973/4veco-lessen/blob/d53080f38ebbdbba319e6d9b89dcba86067a72be/Boek%202%20-%20Kosten%2C%20opbrengsten%2C%20elasticiteit%20en%20surplus/edities/chat-2026/bronnen/H3/2.3%20Surplus%20en%20welvaart%20%E2%80%93%20antwoorden.md</a:t>
+              <a:t>Bron: Boek 2, chatuitgave 2026, revisie 1 oktober 2026, gedrukte pagina 93–94, 96. https://github.com/meijer1973/4veco-lessen/blob/a8940a7a79e22857a3e306a91fe923c48c63e716/Boek%202%20-%20Kosten%2C%20opbrengsten%2C%20elasticiteit%20en%20surplus/edities/chat-2026/boek/Boek_2_Compleet.pdf</a:t>
+            </a:r>
+          </a:p>
+          <a:p xmlns:a="http://schemas.openxmlformats.org/drawingml/2006/main">
+            <a:r>
+              <a:rPr sz="1400"/>
+              <a:t>Antwoordmodel: https://github.com/meijer1973/4veco-lessen/blob/a8940a7a79e22857a3e306a91fe923c48c63e716/Boek%202%20-%20Kosten%2C%20opbrengsten%2C%20elasticiteit%20en%20surplus/edities/chat-2026/bronnen/H3/2.3%20Surplus%20en%20welvaart%20%E2%80%93%20antwoorden.md</a:t>
             </a:r>
           </a:p>
           <a:p xmlns:a="http://schemas.openxmlformats.org/drawingml/2006/main">
@@ -1068,13 +1068,13 @@
           <a:p xmlns:a="http://schemas.openxmlformats.org/drawingml/2006/main">
             <a:r>
               <a:rPr sz="1400"/>
-              <a:t>Bron: Boek 2, chatuitgave 2026, revisie 21 september 2026, gedrukte pagina 93, 96. https://github.com/meijer1973/4veco-lessen/blob/d53080f38ebbdbba319e6d9b89dcba86067a72be/Boek%202%20-%20Kosten%2C%20opbrengsten%2C%20elasticiteit%20en%20surplus/edities/chat-2026/boek/Boek_2_Compleet.pdf</a:t>
-            </a:r>
-          </a:p>
-          <a:p xmlns:a="http://schemas.openxmlformats.org/drawingml/2006/main">
-            <a:r>
-              <a:rPr sz="1400"/>
-              <a:t>Antwoordmodel: https://github.com/meijer1973/4veco-lessen/blob/d53080f38ebbdbba319e6d9b89dcba86067a72be/Boek%202%20-%20Kosten%2C%20opbrengsten%2C%20elasticiteit%20en%20surplus/edities/chat-2026/bronnen/H3/2.3%20Surplus%20en%20welvaart%20%E2%80%93%20antwoorden.md</a:t>
+              <a:t>Bron: Boek 2, chatuitgave 2026, revisie 1 oktober 2026, gedrukte pagina 94, 97. https://github.com/meijer1973/4veco-lessen/blob/a8940a7a79e22857a3e306a91fe923c48c63e716/Boek%202%20-%20Kosten%2C%20opbrengsten%2C%20elasticiteit%20en%20surplus/edities/chat-2026/boek/Boek_2_Compleet.pdf</a:t>
+            </a:r>
+          </a:p>
+          <a:p xmlns:a="http://schemas.openxmlformats.org/drawingml/2006/main">
+            <a:r>
+              <a:rPr sz="1400"/>
+              <a:t>Antwoordmodel: https://github.com/meijer1973/4veco-lessen/blob/a8940a7a79e22857a3e306a91fe923c48c63e716/Boek%202%20-%20Kosten%2C%20opbrengsten%2C%20elasticiteit%20en%20surplus/edities/chat-2026/bronnen/H3/2.3%20Surplus%20en%20welvaart%20%E2%80%93%20antwoorden.md</a:t>
             </a:r>
           </a:p>
           <a:p xmlns:a="http://schemas.openxmlformats.org/drawingml/2006/main">
@@ -1157,7 +1157,7 @@
           <a:p xmlns:a="http://schemas.openxmlformats.org/drawingml/2006/main">
             <a:r>
               <a:rPr sz="1400"/>
-              <a:t>Uitleg: Laat dit overzicht staan tijdens zelfstandig werken. Start 1–2 en basis 3 op p.96; basis 4 op p.97; zelfstandig 5 op p.98; doel 6 op p.99–100. Huiswerk 3,4,5,6 maken en nakijken. Bonus 7 en herhaling 8–9 zijn extra. Start 1 haalt de driehoeken uit §2.3.1 p.74 en §2.3.2 p.81–84 op. Start 2 vraagt het nieuwe Pareto-criterium: lees de definities en het onderscheid met een groter totaal op p.93. Noteer een eerste redenering en twijfel. Dit is ondersteund verkennen. Keer na de uitleg terug naar 2, vóór het basiswerk. Geen aanname dat dit al beheerst wordt. De volledige route kan extra lestijd vragen; er is geen gemeten 55-minutenbegroting.</a:t>
+              <a:t>Uitleg: Laat dit overzicht staan tijdens zelfstandig werken. Start 1–2 en basis 3 op p.97; basis 4 op p.98; zelfstandig 5 op p.99; doel 6 op p.100–101. Huiswerk 3,4,5,6 maken en nakijken. Bonus 7 en herhaling 8–9 zijn extra. Start 1 haalt de driehoeken uit §2.3.1 p.75 en §2.3.2 p.82–85 op. Start 2 vraagt het nieuwe Pareto-criterium: lees de definities en het onderscheid met een groter totaal op p.94. Noteer een eerste redenering en twijfel. Dit is ondersteund verkennen. Keer na de uitleg terug naar 2, vóór het basiswerk. Geen aanname dat dit al beheerst wordt. De volledige route kan extra lestijd vragen; er is geen gemeten 55-minutenbegroting.</a:t>
             </a:r>
           </a:p>
           <a:p xmlns:a="http://schemas.openxmlformats.org/drawingml/2006/main">
@@ -1205,13 +1205,13 @@
           <a:p xmlns:a="http://schemas.openxmlformats.org/drawingml/2006/main">
             <a:r>
               <a:rPr sz="1400"/>
-              <a:t>Bron: Boek 2, chatuitgave 2026, revisie 21 september 2026, gedrukte pagina 90–100. https://github.com/meijer1973/4veco-lessen/blob/d53080f38ebbdbba319e6d9b89dcba86067a72be/Boek%202%20-%20Kosten%2C%20opbrengsten%2C%20elasticiteit%20en%20surplus/edities/chat-2026/boek/Boek_2_Compleet.pdf</a:t>
-            </a:r>
-          </a:p>
-          <a:p xmlns:a="http://schemas.openxmlformats.org/drawingml/2006/main">
-            <a:r>
-              <a:rPr sz="1400"/>
-              <a:t>Antwoordmodel: https://github.com/meijer1973/4veco-lessen/blob/d53080f38ebbdbba319e6d9b89dcba86067a72be/Boek%202%20-%20Kosten%2C%20opbrengsten%2C%20elasticiteit%20en%20surplus/edities/chat-2026/bronnen/H3/2.3%20Surplus%20en%20welvaart%20%E2%80%93%20antwoorden.md</a:t>
+              <a:t>Bron: Boek 2, chatuitgave 2026, revisie 1 oktober 2026, gedrukte pagina 91–101. https://github.com/meijer1973/4veco-lessen/blob/a8940a7a79e22857a3e306a91fe923c48c63e716/Boek%202%20-%20Kosten%2C%20opbrengsten%2C%20elasticiteit%20en%20surplus/edities/chat-2026/boek/Boek_2_Compleet.pdf</a:t>
+            </a:r>
+          </a:p>
+          <a:p xmlns:a="http://schemas.openxmlformats.org/drawingml/2006/main">
+            <a:r>
+              <a:rPr sz="1400"/>
+              <a:t>Antwoordmodel: https://github.com/meijer1973/4veco-lessen/blob/a8940a7a79e22857a3e306a91fe923c48c63e716/Boek%202%20-%20Kosten%2C%20opbrengsten%2C%20elasticiteit%20en%20surplus/edities/chat-2026/bronnen/H3/2.3%20Surplus%20en%20welvaart%20%E2%80%93%20antwoorden.md</a:t>
             </a:r>
           </a:p>
           <a:p xmlns:a="http://schemas.openxmlformats.org/drawingml/2006/main">
@@ -1342,13 +1342,13 @@
           <a:p xmlns:a="http://schemas.openxmlformats.org/drawingml/2006/main">
             <a:r>
               <a:rPr sz="1400"/>
-              <a:t>Bron: Boek 2, chatuitgave 2026, revisie 21 september 2026, gedrukte pagina 99. https://github.com/meijer1973/4veco-lessen/blob/d53080f38ebbdbba319e6d9b89dcba86067a72be/Boek%202%20-%20Kosten%2C%20opbrengsten%2C%20elasticiteit%20en%20surplus/edities/chat-2026/boek/Boek_2_Compleet.pdf</a:t>
-            </a:r>
-          </a:p>
-          <a:p xmlns:a="http://schemas.openxmlformats.org/drawingml/2006/main">
-            <a:r>
-              <a:rPr sz="1400"/>
-              <a:t>Antwoordmodel: https://github.com/meijer1973/4veco-lessen/blob/d53080f38ebbdbba319e6d9b89dcba86067a72be/Boek%202%20-%20Kosten%2C%20opbrengsten%2C%20elasticiteit%20en%20surplus/edities/chat-2026/bronnen/H3/2.3%20Surplus%20en%20welvaart%20%E2%80%93%20antwoorden.md</a:t>
+              <a:t>Bron: Boek 2, chatuitgave 2026, revisie 1 oktober 2026, gedrukte pagina 100. https://github.com/meijer1973/4veco-lessen/blob/a8940a7a79e22857a3e306a91fe923c48c63e716/Boek%202%20-%20Kosten%2C%20opbrengsten%2C%20elasticiteit%20en%20surplus/edities/chat-2026/boek/Boek_2_Compleet.pdf</a:t>
+            </a:r>
+          </a:p>
+          <a:p xmlns:a="http://schemas.openxmlformats.org/drawingml/2006/main">
+            <a:r>
+              <a:rPr sz="1400"/>
+              <a:t>Antwoordmodel: https://github.com/meijer1973/4veco-lessen/blob/a8940a7a79e22857a3e306a91fe923c48c63e716/Boek%202%20-%20Kosten%2C%20opbrengsten%2C%20elasticiteit%20en%20surplus/edities/chat-2026/bronnen/H3/2.3%20Surplus%20en%20welvaart%20%E2%80%93%20antwoorden.md</a:t>
             </a:r>
           </a:p>
           <a:p xmlns:a="http://schemas.openxmlformats.org/drawingml/2006/main">
@@ -1431,7 +1431,7 @@
           <a:p xmlns:a="http://schemas.openxmlformats.org/drawingml/2006/main">
             <a:r>
               <a:rPr sz="1400"/>
-              <a:t>Uitleg: Alle aannames komen uit de boekcontext. Een hogere prijs en een boekingslimiet zijn gegevens, geen les over prijsbeleid. Er staat technisch minstens 60; er staat niet dat 80 transacties uitvoerbaar zijn. Voor Qs bij een prijs geldt wel de gegeven aanbodfunctie.</a:t>
+              <a:t>Uitleg: Alle aannames komen uit de boekcontext. Een hogere prijs en een boekingslimiet zijn gegevens, geen les over prijsbeleid. Er staat technisch minstens 60; er staat niet dat 80 transacties uitvoerbaar zijn. Voor Qa bij een prijs geldt wel de gegeven aanbodfunctie.</a:t>
             </a:r>
           </a:p>
           <a:p xmlns:a="http://schemas.openxmlformats.org/drawingml/2006/main">
@@ -1479,13 +1479,13 @@
           <a:p xmlns:a="http://schemas.openxmlformats.org/drawingml/2006/main">
             <a:r>
               <a:rPr sz="1400"/>
-              <a:t>Bron: Boek 2, chatuitgave 2026, revisie 21 september 2026, gedrukte pagina 99. https://github.com/meijer1973/4veco-lessen/blob/d53080f38ebbdbba319e6d9b89dcba86067a72be/Boek%202%20-%20Kosten%2C%20opbrengsten%2C%20elasticiteit%20en%20surplus/edities/chat-2026/boek/Boek_2_Compleet.pdf</a:t>
-            </a:r>
-          </a:p>
-          <a:p xmlns:a="http://schemas.openxmlformats.org/drawingml/2006/main">
-            <a:r>
-              <a:rPr sz="1400"/>
-              <a:t>Antwoordmodel: https://github.com/meijer1973/4veco-lessen/blob/d53080f38ebbdbba319e6d9b89dcba86067a72be/Boek%202%20-%20Kosten%2C%20opbrengsten%2C%20elasticiteit%20en%20surplus/edities/chat-2026/bronnen/H3/2.3%20Surplus%20en%20welvaart%20%E2%80%93%20antwoorden.md</a:t>
+              <a:t>Bron: Boek 2, chatuitgave 2026, revisie 1 oktober 2026, gedrukte pagina 100. https://github.com/meijer1973/4veco-lessen/blob/a8940a7a79e22857a3e306a91fe923c48c63e716/Boek%202%20-%20Kosten%2C%20opbrengsten%2C%20elasticiteit%20en%20surplus/edities/chat-2026/boek/Boek_2_Compleet.pdf</a:t>
+            </a:r>
+          </a:p>
+          <a:p xmlns:a="http://schemas.openxmlformats.org/drawingml/2006/main">
+            <a:r>
+              <a:rPr sz="1400"/>
+              <a:t>Antwoordmodel: https://github.com/meijer1973/4veco-lessen/blob/a8940a7a79e22857a3e306a91fe923c48c63e716/Boek%202%20-%20Kosten%2C%20opbrengsten%2C%20elasticiteit%20en%20surplus/edities/chat-2026/bronnen/H3/2.3%20Surplus%20en%20welvaart%20%E2%80%93%20antwoorden.md</a:t>
             </a:r>
           </a:p>
           <a:p xmlns:a="http://schemas.openxmlformats.org/drawingml/2006/main">
@@ -1616,13 +1616,13 @@
           <a:p xmlns:a="http://schemas.openxmlformats.org/drawingml/2006/main">
             <a:r>
               <a:rPr sz="1400"/>
-              <a:t>Bron: Boek 2, chatuitgave 2026, revisie 21 september 2026, gedrukte pagina 99. https://github.com/meijer1973/4veco-lessen/blob/d53080f38ebbdbba319e6d9b89dcba86067a72be/Boek%202%20-%20Kosten%2C%20opbrengsten%2C%20elasticiteit%20en%20surplus/edities/chat-2026/boek/Boek_2_Compleet.pdf</a:t>
-            </a:r>
-          </a:p>
-          <a:p xmlns:a="http://schemas.openxmlformats.org/drawingml/2006/main">
-            <a:r>
-              <a:rPr sz="1400"/>
-              <a:t>Antwoordmodel: https://github.com/meijer1973/4veco-lessen/blob/d53080f38ebbdbba319e6d9b89dcba86067a72be/Boek%202%20-%20Kosten%2C%20opbrengsten%2C%20elasticiteit%20en%20surplus/edities/chat-2026/bronnen/H3/2.3%20Surplus%20en%20welvaart%20%E2%80%93%20antwoorden.md</a:t>
+              <a:t>Bron: Boek 2, chatuitgave 2026, revisie 1 oktober 2026, gedrukte pagina 100. https://github.com/meijer1973/4veco-lessen/blob/a8940a7a79e22857a3e306a91fe923c48c63e716/Boek%202%20-%20Kosten%2C%20opbrengsten%2C%20elasticiteit%20en%20surplus/edities/chat-2026/boek/Boek_2_Compleet.pdf</a:t>
+            </a:r>
+          </a:p>
+          <a:p xmlns:a="http://schemas.openxmlformats.org/drawingml/2006/main">
+            <a:r>
+              <a:rPr sz="1400"/>
+              <a:t>Antwoordmodel: https://github.com/meijer1973/4veco-lessen/blob/a8940a7a79e22857a3e306a91fe923c48c63e716/Boek%202%20-%20Kosten%2C%20opbrengsten%2C%20elasticiteit%20en%20surplus/edities/chat-2026/bronnen/H3/2.3%20Surplus%20en%20welvaart%20%E2%80%93%20antwoorden.md</a:t>
             </a:r>
           </a:p>
           <a:p xmlns:a="http://schemas.openxmlformats.org/drawingml/2006/main">
@@ -1729,7 +1729,7 @@
           <a:p xmlns:a="http://schemas.openxmlformats.org/drawingml/2006/main">
             <a:r>
               <a:rPr sz="1400"/>
-              <a:t>Misvatting: Alleen Qd en Qs noemen is onvolledig.</a:t>
+              <a:t>Misvatting: Alleen Qv en Qa noemen is onvolledig.</a:t>
             </a:r>
           </a:p>
           <a:p xmlns:a="http://schemas.openxmlformats.org/drawingml/2006/main">
@@ -1753,13 +1753,13 @@
           <a:p xmlns:a="http://schemas.openxmlformats.org/drawingml/2006/main">
             <a:r>
               <a:rPr sz="1400"/>
-              <a:t>Bron: Boek 2, chatuitgave 2026, revisie 21 september 2026, gedrukte pagina 100. https://github.com/meijer1973/4veco-lessen/blob/d53080f38ebbdbba319e6d9b89dcba86067a72be/Boek%202%20-%20Kosten%2C%20opbrengsten%2C%20elasticiteit%20en%20surplus/edities/chat-2026/boek/Boek_2_Compleet.pdf</a:t>
-            </a:r>
-          </a:p>
-          <a:p xmlns:a="http://schemas.openxmlformats.org/drawingml/2006/main">
-            <a:r>
-              <a:rPr sz="1400"/>
-              <a:t>Antwoordmodel: https://github.com/meijer1973/4veco-lessen/blob/d53080f38ebbdbba319e6d9b89dcba86067a72be/Boek%202%20-%20Kosten%2C%20opbrengsten%2C%20elasticiteit%20en%20surplus/edities/chat-2026/bronnen/H3/2.3%20Surplus%20en%20welvaart%20%E2%80%93%20antwoorden.md</a:t>
+              <a:t>Bron: Boek 2, chatuitgave 2026, revisie 1 oktober 2026, gedrukte pagina 101. https://github.com/meijer1973/4veco-lessen/blob/a8940a7a79e22857a3e306a91fe923c48c63e716/Boek%202%20-%20Kosten%2C%20opbrengsten%2C%20elasticiteit%20en%20surplus/edities/chat-2026/boek/Boek_2_Compleet.pdf</a:t>
+            </a:r>
+          </a:p>
+          <a:p xmlns:a="http://schemas.openxmlformats.org/drawingml/2006/main">
+            <a:r>
+              <a:rPr sz="1400"/>
+              <a:t>Antwoordmodel: https://github.com/meijer1973/4veco-lessen/blob/a8940a7a79e22857a3e306a91fe923c48c63e716/Boek%202%20-%20Kosten%2C%20opbrengsten%2C%20elasticiteit%20en%20surplus/edities/chat-2026/bronnen/H3/2.3%20Surplus%20en%20welvaart%20%E2%80%93%20antwoorden.md</a:t>
             </a:r>
           </a:p>
           <a:p xmlns:a="http://schemas.openxmlformats.org/drawingml/2006/main">
@@ -1890,13 +1890,13 @@
           <a:p xmlns:a="http://schemas.openxmlformats.org/drawingml/2006/main">
             <a:r>
               <a:rPr sz="1400"/>
-              <a:t>Bron: Boek 2, chatuitgave 2026, revisie 21 september 2026, gedrukte pagina 100. https://github.com/meijer1973/4veco-lessen/blob/d53080f38ebbdbba319e6d9b89dcba86067a72be/Boek%202%20-%20Kosten%2C%20opbrengsten%2C%20elasticiteit%20en%20surplus/edities/chat-2026/boek/Boek_2_Compleet.pdf</a:t>
-            </a:r>
-          </a:p>
-          <a:p xmlns:a="http://schemas.openxmlformats.org/drawingml/2006/main">
-            <a:r>
-              <a:rPr sz="1400"/>
-              <a:t>Antwoordmodel: https://github.com/meijer1973/4veco-lessen/blob/d53080f38ebbdbba319e6d9b89dcba86067a72be/Boek%202%20-%20Kosten%2C%20opbrengsten%2C%20elasticiteit%20en%20surplus/edities/chat-2026/bronnen/H3/2.3%20Surplus%20en%20welvaart%20%E2%80%93%20antwoorden.md</a:t>
+              <a:t>Bron: Boek 2, chatuitgave 2026, revisie 1 oktober 2026, gedrukte pagina 101. https://github.com/meijer1973/4veco-lessen/blob/a8940a7a79e22857a3e306a91fe923c48c63e716/Boek%202%20-%20Kosten%2C%20opbrengsten%2C%20elasticiteit%20en%20surplus/edities/chat-2026/boek/Boek_2_Compleet.pdf</a:t>
+            </a:r>
+          </a:p>
+          <a:p xmlns:a="http://schemas.openxmlformats.org/drawingml/2006/main">
+            <a:r>
+              <a:rPr sz="1400"/>
+              <a:t>Antwoordmodel: https://github.com/meijer1973/4veco-lessen/blob/a8940a7a79e22857a3e306a91fe923c48c63e716/Boek%202%20-%20Kosten%2C%20opbrengsten%2C%20elasticiteit%20en%20surplus/edities/chat-2026/bronnen/H3/2.3%20Surplus%20en%20welvaart%20%E2%80%93%20antwoorden.md</a:t>
             </a:r>
           </a:p>
           <a:p xmlns:a="http://schemas.openxmlformats.org/drawingml/2006/main">
@@ -2027,13 +2027,13 @@
           <a:p xmlns:a="http://schemas.openxmlformats.org/drawingml/2006/main">
             <a:r>
               <a:rPr sz="1400"/>
-              <a:t>Bron: Boek 2, chatuitgave 2026, revisie 21 september 2026, gedrukte pagina 74, 80–84, 90–93. https://github.com/meijer1973/4veco-lessen/blob/d53080f38ebbdbba319e6d9b89dcba86067a72be/Boek%202%20-%20Kosten%2C%20opbrengsten%2C%20elasticiteit%20en%20surplus/edities/chat-2026/boek/Boek_2_Compleet.pdf</a:t>
-            </a:r>
-          </a:p>
-          <a:p xmlns:a="http://schemas.openxmlformats.org/drawingml/2006/main">
-            <a:r>
-              <a:rPr sz="1400"/>
-              <a:t>Antwoordmodel: https://github.com/meijer1973/4veco-lessen/blob/d53080f38ebbdbba319e6d9b89dcba86067a72be/Boek%202%20-%20Kosten%2C%20opbrengsten%2C%20elasticiteit%20en%20surplus/edities/chat-2026/bronnen/H3/2.3%20Surplus%20en%20welvaart%20%E2%80%93%20antwoorden.md</a:t>
+              <a:t>Bron: Boek 2, chatuitgave 2026, revisie 1 oktober 2026, gedrukte pagina 75, 81–85, 91–94. https://github.com/meijer1973/4veco-lessen/blob/a8940a7a79e22857a3e306a91fe923c48c63e716/Boek%202%20-%20Kosten%2C%20opbrengsten%2C%20elasticiteit%20en%20surplus/edities/chat-2026/boek/Boek_2_Compleet.pdf</a:t>
+            </a:r>
+          </a:p>
+          <a:p xmlns:a="http://schemas.openxmlformats.org/drawingml/2006/main">
+            <a:r>
+              <a:rPr sz="1400"/>
+              <a:t>Antwoordmodel: https://github.com/meijer1973/4veco-lessen/blob/a8940a7a79e22857a3e306a91fe923c48c63e716/Boek%202%20-%20Kosten%2C%20opbrengsten%2C%20elasticiteit%20en%20surplus/edities/chat-2026/bronnen/H3/2.3%20Surplus%20en%20welvaart%20%E2%80%93%20antwoorden.md</a:t>
             </a:r>
           </a:p>
           <a:p xmlns:a="http://schemas.openxmlformats.org/drawingml/2006/main">
@@ -2164,13 +2164,13 @@
           <a:p xmlns:a="http://schemas.openxmlformats.org/drawingml/2006/main">
             <a:r>
               <a:rPr sz="1400"/>
-              <a:t>Bron: Boek 2, chatuitgave 2026, revisie 21 september 2026, gedrukte pagina 100. https://github.com/meijer1973/4veco-lessen/blob/d53080f38ebbdbba319e6d9b89dcba86067a72be/Boek%202%20-%20Kosten%2C%20opbrengsten%2C%20elasticiteit%20en%20surplus/edities/chat-2026/boek/Boek_2_Compleet.pdf</a:t>
-            </a:r>
-          </a:p>
-          <a:p xmlns:a="http://schemas.openxmlformats.org/drawingml/2006/main">
-            <a:r>
-              <a:rPr sz="1400"/>
-              <a:t>Antwoordmodel: https://github.com/meijer1973/4veco-lessen/blob/d53080f38ebbdbba319e6d9b89dcba86067a72be/Boek%202%20-%20Kosten%2C%20opbrengsten%2C%20elasticiteit%20en%20surplus/edities/chat-2026/bronnen/H3/2.3%20Surplus%20en%20welvaart%20%E2%80%93%20antwoorden.md</a:t>
+              <a:t>Bron: Boek 2, chatuitgave 2026, revisie 1 oktober 2026, gedrukte pagina 101. https://github.com/meijer1973/4veco-lessen/blob/a8940a7a79e22857a3e306a91fe923c48c63e716/Boek%202%20-%20Kosten%2C%20opbrengsten%2C%20elasticiteit%20en%20surplus/edities/chat-2026/boek/Boek_2_Compleet.pdf</a:t>
+            </a:r>
+          </a:p>
+          <a:p xmlns:a="http://schemas.openxmlformats.org/drawingml/2006/main">
+            <a:r>
+              <a:rPr sz="1400"/>
+              <a:t>Antwoordmodel: https://github.com/meijer1973/4veco-lessen/blob/a8940a7a79e22857a3e306a91fe923c48c63e716/Boek%202%20-%20Kosten%2C%20opbrengsten%2C%20elasticiteit%20en%20surplus/edities/chat-2026/bronnen/H3/2.3%20Surplus%20en%20welvaart%20%E2%80%93%20antwoorden.md</a:t>
             </a:r>
           </a:p>
           <a:p xmlns:a="http://schemas.openxmlformats.org/drawingml/2006/main">
@@ -2301,13 +2301,13 @@
           <a:p xmlns:a="http://schemas.openxmlformats.org/drawingml/2006/main">
             <a:r>
               <a:rPr sz="1400"/>
-              <a:t>Bron: Boek 2, chatuitgave 2026, revisie 21 september 2026, gedrukte pagina 93, 100. https://github.com/meijer1973/4veco-lessen/blob/d53080f38ebbdbba319e6d9b89dcba86067a72be/Boek%202%20-%20Kosten%2C%20opbrengsten%2C%20elasticiteit%20en%20surplus/edities/chat-2026/boek/Boek_2_Compleet.pdf</a:t>
-            </a:r>
-          </a:p>
-          <a:p xmlns:a="http://schemas.openxmlformats.org/drawingml/2006/main">
-            <a:r>
-              <a:rPr sz="1400"/>
-              <a:t>Antwoordmodel: https://github.com/meijer1973/4veco-lessen/blob/d53080f38ebbdbba319e6d9b89dcba86067a72be/Boek%202%20-%20Kosten%2C%20opbrengsten%2C%20elasticiteit%20en%20surplus/edities/chat-2026/bronnen/H3/2.3%20Surplus%20en%20welvaart%20%E2%80%93%20antwoorden.md</a:t>
+              <a:t>Bron: Boek 2, chatuitgave 2026, revisie 1 oktober 2026, gedrukte pagina 94, 101. https://github.com/meijer1973/4veco-lessen/blob/a8940a7a79e22857a3e306a91fe923c48c63e716/Boek%202%20-%20Kosten%2C%20opbrengsten%2C%20elasticiteit%20en%20surplus/edities/chat-2026/boek/Boek_2_Compleet.pdf</a:t>
+            </a:r>
+          </a:p>
+          <a:p xmlns:a="http://schemas.openxmlformats.org/drawingml/2006/main">
+            <a:r>
+              <a:rPr sz="1400"/>
+              <a:t>Antwoordmodel: https://github.com/meijer1973/4veco-lessen/blob/a8940a7a79e22857a3e306a91fe923c48c63e716/Boek%202%20-%20Kosten%2C%20opbrengsten%2C%20elasticiteit%20en%20surplus/edities/chat-2026/bronnen/H3/2.3%20Surplus%20en%20welvaart%20%E2%80%93%20antwoorden.md</a:t>
             </a:r>
           </a:p>
           <a:p xmlns:a="http://schemas.openxmlformats.org/drawingml/2006/main">
@@ -2414,7 +2414,7 @@
           <a:p xmlns:a="http://schemas.openxmlformats.org/drawingml/2006/main">
             <a:r>
               <a:rPr sz="1400"/>
-              <a:t>Misvatting: Gebruik Qd of Qs niet als de werkelijk verhandelde hoeveelheid.</a:t>
+              <a:t>Misvatting: Gebruik Qv of Qa niet als de werkelijk verhandelde hoeveelheid.</a:t>
             </a:r>
           </a:p>
           <a:p xmlns:a="http://schemas.openxmlformats.org/drawingml/2006/main">
@@ -2438,13 +2438,13 @@
           <a:p xmlns:a="http://schemas.openxmlformats.org/drawingml/2006/main">
             <a:r>
               <a:rPr sz="1400"/>
-              <a:t>Bron: Boek 2, chatuitgave 2026, revisie 21 september 2026, gedrukte pagina 99–100. https://github.com/meijer1973/4veco-lessen/blob/d53080f38ebbdbba319e6d9b89dcba86067a72be/Boek%202%20-%20Kosten%2C%20opbrengsten%2C%20elasticiteit%20en%20surplus/edities/chat-2026/boek/Boek_2_Compleet.pdf</a:t>
-            </a:r>
-          </a:p>
-          <a:p xmlns:a="http://schemas.openxmlformats.org/drawingml/2006/main">
-            <a:r>
-              <a:rPr sz="1400"/>
-              <a:t>Antwoordmodel: https://github.com/meijer1973/4veco-lessen/blob/d53080f38ebbdbba319e6d9b89dcba86067a72be/Boek%202%20-%20Kosten%2C%20opbrengsten%2C%20elasticiteit%20en%20surplus/edities/chat-2026/bronnen/H3/2.3%20Surplus%20en%20welvaart%20%E2%80%93%20antwoorden.md</a:t>
+              <a:t>Bron: Boek 2, chatuitgave 2026, revisie 1 oktober 2026, gedrukte pagina 100–101. https://github.com/meijer1973/4veco-lessen/blob/a8940a7a79e22857a3e306a91fe923c48c63e716/Boek%202%20-%20Kosten%2C%20opbrengsten%2C%20elasticiteit%20en%20surplus/edities/chat-2026/boek/Boek_2_Compleet.pdf</a:t>
+            </a:r>
+          </a:p>
+          <a:p xmlns:a="http://schemas.openxmlformats.org/drawingml/2006/main">
+            <a:r>
+              <a:rPr sz="1400"/>
+              <a:t>Antwoordmodel: https://github.com/meijer1973/4veco-lessen/blob/a8940a7a79e22857a3e306a91fe923c48c63e716/Boek%202%20-%20Kosten%2C%20opbrengsten%2C%20elasticiteit%20en%20surplus/edities/chat-2026/bronnen/H3/2.3%20Surplus%20en%20welvaart%20%E2%80%93%20antwoorden.md</a:t>
             </a:r>
           </a:p>
           <a:p xmlns:a="http://schemas.openxmlformats.org/drawingml/2006/main">
@@ -2575,13 +2575,13 @@
           <a:p xmlns:a="http://schemas.openxmlformats.org/drawingml/2006/main">
             <a:r>
               <a:rPr sz="1400"/>
-              <a:t>Bron: Boek 2, chatuitgave 2026, revisie 21 september 2026, gedrukte pagina 99–100. https://github.com/meijer1973/4veco-lessen/blob/d53080f38ebbdbba319e6d9b89dcba86067a72be/Boek%202%20-%20Kosten%2C%20opbrengsten%2C%20elasticiteit%20en%20surplus/edities/chat-2026/boek/Boek_2_Compleet.pdf</a:t>
-            </a:r>
-          </a:p>
-          <a:p xmlns:a="http://schemas.openxmlformats.org/drawingml/2006/main">
-            <a:r>
-              <a:rPr sz="1400"/>
-              <a:t>Antwoordmodel: https://github.com/meijer1973/4veco-lessen/blob/d53080f38ebbdbba319e6d9b89dcba86067a72be/Boek%202%20-%20Kosten%2C%20opbrengsten%2C%20elasticiteit%20en%20surplus/edities/chat-2026/bronnen/H3/2.3%20Surplus%20en%20welvaart%20%E2%80%93%20antwoorden.md</a:t>
+              <a:t>Bron: Boek 2, chatuitgave 2026, revisie 1 oktober 2026, gedrukte pagina 100–101. https://github.com/meijer1973/4veco-lessen/blob/a8940a7a79e22857a3e306a91fe923c48c63e716/Boek%202%20-%20Kosten%2C%20opbrengsten%2C%20elasticiteit%20en%20surplus/edities/chat-2026/boek/Boek_2_Compleet.pdf</a:t>
+            </a:r>
+          </a:p>
+          <a:p xmlns:a="http://schemas.openxmlformats.org/drawingml/2006/main">
+            <a:r>
+              <a:rPr sz="1400"/>
+              <a:t>Antwoordmodel: https://github.com/meijer1973/4veco-lessen/blob/a8940a7a79e22857a3e306a91fe923c48c63e716/Boek%202%20-%20Kosten%2C%20opbrengsten%2C%20elasticiteit%20en%20surplus/edities/chat-2026/bronnen/H3/2.3%20Surplus%20en%20welvaart%20%E2%80%93%20antwoorden.md</a:t>
             </a:r>
           </a:p>
           <a:p xmlns:a="http://schemas.openxmlformats.org/drawingml/2006/main">
@@ -2712,13 +2712,13 @@
           <a:p xmlns:a="http://schemas.openxmlformats.org/drawingml/2006/main">
             <a:r>
               <a:rPr sz="1400"/>
-              <a:t>Bron: Boek 2, chatuitgave 2026, revisie 21 september 2026, gedrukte pagina 100. https://github.com/meijer1973/4veco-lessen/blob/d53080f38ebbdbba319e6d9b89dcba86067a72be/Boek%202%20-%20Kosten%2C%20opbrengsten%2C%20elasticiteit%20en%20surplus/edities/chat-2026/boek/Boek_2_Compleet.pdf</a:t>
-            </a:r>
-          </a:p>
-          <a:p xmlns:a="http://schemas.openxmlformats.org/drawingml/2006/main">
-            <a:r>
-              <a:rPr sz="1400"/>
-              <a:t>Antwoordmodel: https://github.com/meijer1973/4veco-lessen/blob/d53080f38ebbdbba319e6d9b89dcba86067a72be/Boek%202%20-%20Kosten%2C%20opbrengsten%2C%20elasticiteit%20en%20surplus/edities/chat-2026/bronnen/H3/2.3%20Surplus%20en%20welvaart%20%E2%80%93%20antwoorden.md</a:t>
+              <a:t>Bron: Boek 2, chatuitgave 2026, revisie 1 oktober 2026, gedrukte pagina 101. https://github.com/meijer1973/4veco-lessen/blob/a8940a7a79e22857a3e306a91fe923c48c63e716/Boek%202%20-%20Kosten%2C%20opbrengsten%2C%20elasticiteit%20en%20surplus/edities/chat-2026/boek/Boek_2_Compleet.pdf</a:t>
+            </a:r>
+          </a:p>
+          <a:p xmlns:a="http://schemas.openxmlformats.org/drawingml/2006/main">
+            <a:r>
+              <a:rPr sz="1400"/>
+              <a:t>Antwoordmodel: https://github.com/meijer1973/4veco-lessen/blob/a8940a7a79e22857a3e306a91fe923c48c63e716/Boek%202%20-%20Kosten%2C%20opbrengsten%2C%20elasticiteit%20en%20surplus/edities/chat-2026/bronnen/H3/2.3%20Surplus%20en%20welvaart%20%E2%80%93%20antwoorden.md</a:t>
             </a:r>
           </a:p>
           <a:p xmlns:a="http://schemas.openxmlformats.org/drawingml/2006/main">
@@ -2849,13 +2849,13 @@
           <a:p xmlns:a="http://schemas.openxmlformats.org/drawingml/2006/main">
             <a:r>
               <a:rPr sz="1400"/>
-              <a:t>Bron: Boek 2, chatuitgave 2026, revisie 21 september 2026, gedrukte pagina 100. https://github.com/meijer1973/4veco-lessen/blob/d53080f38ebbdbba319e6d9b89dcba86067a72be/Boek%202%20-%20Kosten%2C%20opbrengsten%2C%20elasticiteit%20en%20surplus/edities/chat-2026/boek/Boek_2_Compleet.pdf</a:t>
-            </a:r>
-          </a:p>
-          <a:p xmlns:a="http://schemas.openxmlformats.org/drawingml/2006/main">
-            <a:r>
-              <a:rPr sz="1400"/>
-              <a:t>Antwoordmodel: https://github.com/meijer1973/4veco-lessen/blob/d53080f38ebbdbba319e6d9b89dcba86067a72be/Boek%202%20-%20Kosten%2C%20opbrengsten%2C%20elasticiteit%20en%20surplus/edities/chat-2026/bronnen/H3/2.3%20Surplus%20en%20welvaart%20%E2%80%93%20antwoorden.md</a:t>
+              <a:t>Bron: Boek 2, chatuitgave 2026, revisie 1 oktober 2026, gedrukte pagina 101. https://github.com/meijer1973/4veco-lessen/blob/a8940a7a79e22857a3e306a91fe923c48c63e716/Boek%202%20-%20Kosten%2C%20opbrengsten%2C%20elasticiteit%20en%20surplus/edities/chat-2026/boek/Boek_2_Compleet.pdf</a:t>
+            </a:r>
+          </a:p>
+          <a:p xmlns:a="http://schemas.openxmlformats.org/drawingml/2006/main">
+            <a:r>
+              <a:rPr sz="1400"/>
+              <a:t>Antwoordmodel: https://github.com/meijer1973/4veco-lessen/blob/a8940a7a79e22857a3e306a91fe923c48c63e716/Boek%202%20-%20Kosten%2C%20opbrengsten%2C%20elasticiteit%20en%20surplus/edities/chat-2026/bronnen/H3/2.3%20Surplus%20en%20welvaart%20%E2%80%93%20antwoorden.md</a:t>
             </a:r>
           </a:p>
           <a:p xmlns:a="http://schemas.openxmlformats.org/drawingml/2006/main">
@@ -2986,13 +2986,13 @@
           <a:p xmlns:a="http://schemas.openxmlformats.org/drawingml/2006/main">
             <a:r>
               <a:rPr sz="1400"/>
-              <a:t>Bron: Boek 2, chatuitgave 2026, revisie 21 september 2026, gedrukte pagina 99–100. https://github.com/meijer1973/4veco-lessen/blob/d53080f38ebbdbba319e6d9b89dcba86067a72be/Boek%202%20-%20Kosten%2C%20opbrengsten%2C%20elasticiteit%20en%20surplus/edities/chat-2026/boek/Boek_2_Compleet.pdf</a:t>
-            </a:r>
-          </a:p>
-          <a:p xmlns:a="http://schemas.openxmlformats.org/drawingml/2006/main">
-            <a:r>
-              <a:rPr sz="1400"/>
-              <a:t>Antwoordmodel: https://github.com/meijer1973/4veco-lessen/blob/d53080f38ebbdbba319e6d9b89dcba86067a72be/Boek%202%20-%20Kosten%2C%20opbrengsten%2C%20elasticiteit%20en%20surplus/edities/chat-2026/bronnen/H3/2.3%20Surplus%20en%20welvaart%20%E2%80%93%20antwoorden.md</a:t>
+              <a:t>Bron: Boek 2, chatuitgave 2026, revisie 1 oktober 2026, gedrukte pagina 100–101. https://github.com/meijer1973/4veco-lessen/blob/a8940a7a79e22857a3e306a91fe923c48c63e716/Boek%202%20-%20Kosten%2C%20opbrengsten%2C%20elasticiteit%20en%20surplus/edities/chat-2026/boek/Boek_2_Compleet.pdf</a:t>
+            </a:r>
+          </a:p>
+          <a:p xmlns:a="http://schemas.openxmlformats.org/drawingml/2006/main">
+            <a:r>
+              <a:rPr sz="1400"/>
+              <a:t>Antwoordmodel: https://github.com/meijer1973/4veco-lessen/blob/a8940a7a79e22857a3e306a91fe923c48c63e716/Boek%202%20-%20Kosten%2C%20opbrengsten%2C%20elasticiteit%20en%20surplus/edities/chat-2026/bronnen/H3/2.3%20Surplus%20en%20welvaart%20%E2%80%93%20antwoorden.md</a:t>
             </a:r>
           </a:p>
           <a:p xmlns:a="http://schemas.openxmlformats.org/drawingml/2006/main">
@@ -3123,13 +3123,13 @@
           <a:p xmlns:a="http://schemas.openxmlformats.org/drawingml/2006/main">
             <a:r>
               <a:rPr sz="1400"/>
-              <a:t>Bron: Boek 2, chatuitgave 2026, revisie 21 september 2026, gedrukte pagina 100. https://github.com/meijer1973/4veco-lessen/blob/d53080f38ebbdbba319e6d9b89dcba86067a72be/Boek%202%20-%20Kosten%2C%20opbrengsten%2C%20elasticiteit%20en%20surplus/edities/chat-2026/boek/Boek_2_Compleet.pdf</a:t>
-            </a:r>
-          </a:p>
-          <a:p xmlns:a="http://schemas.openxmlformats.org/drawingml/2006/main">
-            <a:r>
-              <a:rPr sz="1400"/>
-              <a:t>Antwoordmodel: https://github.com/meijer1973/4veco-lessen/blob/d53080f38ebbdbba319e6d9b89dcba86067a72be/Boek%202%20-%20Kosten%2C%20opbrengsten%2C%20elasticiteit%20en%20surplus/edities/chat-2026/bronnen/H3/2.3%20Surplus%20en%20welvaart%20%E2%80%93%20antwoorden.md</a:t>
+              <a:t>Bron: Boek 2, chatuitgave 2026, revisie 1 oktober 2026, gedrukte pagina 101. https://github.com/meijer1973/4veco-lessen/blob/a8940a7a79e22857a3e306a91fe923c48c63e716/Boek%202%20-%20Kosten%2C%20opbrengsten%2C%20elasticiteit%20en%20surplus/edities/chat-2026/boek/Boek_2_Compleet.pdf</a:t>
+            </a:r>
+          </a:p>
+          <a:p xmlns:a="http://schemas.openxmlformats.org/drawingml/2006/main">
+            <a:r>
+              <a:rPr sz="1400"/>
+              <a:t>Antwoordmodel: https://github.com/meijer1973/4veco-lessen/blob/a8940a7a79e22857a3e306a91fe923c48c63e716/Boek%202%20-%20Kosten%2C%20opbrengsten%2C%20elasticiteit%20en%20surplus/edities/chat-2026/bronnen/H3/2.3%20Surplus%20en%20welvaart%20%E2%80%93%20antwoorden.md</a:t>
             </a:r>
           </a:p>
           <a:p xmlns:a="http://schemas.openxmlformats.org/drawingml/2006/main">
@@ -3260,13 +3260,13 @@
           <a:p xmlns:a="http://schemas.openxmlformats.org/drawingml/2006/main">
             <a:r>
               <a:rPr sz="1400"/>
-              <a:t>Bron: Boek 2, chatuitgave 2026, revisie 21 september 2026, gedrukte pagina 99–100. https://github.com/meijer1973/4veco-lessen/blob/d53080f38ebbdbba319e6d9b89dcba86067a72be/Boek%202%20-%20Kosten%2C%20opbrengsten%2C%20elasticiteit%20en%20surplus/edities/chat-2026/boek/Boek_2_Compleet.pdf</a:t>
-            </a:r>
-          </a:p>
-          <a:p xmlns:a="http://schemas.openxmlformats.org/drawingml/2006/main">
-            <a:r>
-              <a:rPr sz="1400"/>
-              <a:t>Antwoordmodel: https://github.com/meijer1973/4veco-lessen/blob/d53080f38ebbdbba319e6d9b89dcba86067a72be/Boek%202%20-%20Kosten%2C%20opbrengsten%2C%20elasticiteit%20en%20surplus/edities/chat-2026/bronnen/H3/2.3%20Surplus%20en%20welvaart%20%E2%80%93%20antwoorden.md</a:t>
+              <a:t>Bron: Boek 2, chatuitgave 2026, revisie 1 oktober 2026, gedrukte pagina 100–101. https://github.com/meijer1973/4veco-lessen/blob/a8940a7a79e22857a3e306a91fe923c48c63e716/Boek%202%20-%20Kosten%2C%20opbrengsten%2C%20elasticiteit%20en%20surplus/edities/chat-2026/boek/Boek_2_Compleet.pdf</a:t>
+            </a:r>
+          </a:p>
+          <a:p xmlns:a="http://schemas.openxmlformats.org/drawingml/2006/main">
+            <a:r>
+              <a:rPr sz="1400"/>
+              <a:t>Antwoordmodel: https://github.com/meijer1973/4veco-lessen/blob/a8940a7a79e22857a3e306a91fe923c48c63e716/Boek%202%20-%20Kosten%2C%20opbrengsten%2C%20elasticiteit%20en%20surplus/edities/chat-2026/bronnen/H3/2.3%20Surplus%20en%20welvaart%20%E2%80%93%20antwoorden.md</a:t>
             </a:r>
           </a:p>
           <a:p xmlns:a="http://schemas.openxmlformats.org/drawingml/2006/main">
@@ -3397,13 +3397,13 @@
           <a:p xmlns:a="http://schemas.openxmlformats.org/drawingml/2006/main">
             <a:r>
               <a:rPr sz="1400"/>
-              <a:t>Bron: Boek 2, chatuitgave 2026, revisie 21 september 2026, gedrukte pagina 93, 99–100. https://github.com/meijer1973/4veco-lessen/blob/d53080f38ebbdbba319e6d9b89dcba86067a72be/Boek%202%20-%20Kosten%2C%20opbrengsten%2C%20elasticiteit%20en%20surplus/edities/chat-2026/boek/Boek_2_Compleet.pdf</a:t>
-            </a:r>
-          </a:p>
-          <a:p xmlns:a="http://schemas.openxmlformats.org/drawingml/2006/main">
-            <a:r>
-              <a:rPr sz="1400"/>
-              <a:t>Antwoordmodel: https://github.com/meijer1973/4veco-lessen/blob/d53080f38ebbdbba319e6d9b89dcba86067a72be/Boek%202%20-%20Kosten%2C%20opbrengsten%2C%20elasticiteit%20en%20surplus/edities/chat-2026/bronnen/H3/2.3%20Surplus%20en%20welvaart%20%E2%80%93%20antwoorden.md</a:t>
+              <a:t>Bron: Boek 2, chatuitgave 2026, revisie 1 oktober 2026, gedrukte pagina 94, 100–101. https://github.com/meijer1973/4veco-lessen/blob/a8940a7a79e22857a3e306a91fe923c48c63e716/Boek%202%20-%20Kosten%2C%20opbrengsten%2C%20elasticiteit%20en%20surplus/edities/chat-2026/boek/Boek_2_Compleet.pdf</a:t>
+            </a:r>
+          </a:p>
+          <a:p xmlns:a="http://schemas.openxmlformats.org/drawingml/2006/main">
+            <a:r>
+              <a:rPr sz="1400"/>
+              <a:t>Antwoordmodel: https://github.com/meijer1973/4veco-lessen/blob/a8940a7a79e22857a3e306a91fe923c48c63e716/Boek%202%20-%20Kosten%2C%20opbrengsten%2C%20elasticiteit%20en%20surplus/edities/chat-2026/bronnen/H3/2.3%20Surplus%20en%20welvaart%20%E2%80%93%20antwoorden.md</a:t>
             </a:r>
           </a:p>
           <a:p xmlns:a="http://schemas.openxmlformats.org/drawingml/2006/main">
@@ -3534,13 +3534,13 @@
           <a:p xmlns:a="http://schemas.openxmlformats.org/drawingml/2006/main">
             <a:r>
               <a:rPr sz="1400"/>
-              <a:t>Bron: Boek 2, chatuitgave 2026, revisie 21 september 2026, gedrukte pagina 90–95. https://github.com/meijer1973/4veco-lessen/blob/d53080f38ebbdbba319e6d9b89dcba86067a72be/Boek%202%20-%20Kosten%2C%20opbrengsten%2C%20elasticiteit%20en%20surplus/edities/chat-2026/boek/Boek_2_Compleet.pdf</a:t>
-            </a:r>
-          </a:p>
-          <a:p xmlns:a="http://schemas.openxmlformats.org/drawingml/2006/main">
-            <a:r>
-              <a:rPr sz="1400"/>
-              <a:t>Antwoordmodel: https://github.com/meijer1973/4veco-lessen/blob/d53080f38ebbdbba319e6d9b89dcba86067a72be/Boek%202%20-%20Kosten%2C%20opbrengsten%2C%20elasticiteit%20en%20surplus/edities/chat-2026/bronnen/H3/2.3%20Surplus%20en%20welvaart%20%E2%80%93%20antwoorden.md</a:t>
+              <a:t>Bron: Boek 2, chatuitgave 2026, revisie 1 oktober 2026, gedrukte pagina 91–96. https://github.com/meijer1973/4veco-lessen/blob/a8940a7a79e22857a3e306a91fe923c48c63e716/Boek%202%20-%20Kosten%2C%20opbrengsten%2C%20elasticiteit%20en%20surplus/edities/chat-2026/boek/Boek_2_Compleet.pdf</a:t>
+            </a:r>
+          </a:p>
+          <a:p xmlns:a="http://schemas.openxmlformats.org/drawingml/2006/main">
+            <a:r>
+              <a:rPr sz="1400"/>
+              <a:t>Antwoordmodel: https://github.com/meijer1973/4veco-lessen/blob/a8940a7a79e22857a3e306a91fe923c48c63e716/Boek%202%20-%20Kosten%2C%20opbrengsten%2C%20elasticiteit%20en%20surplus/edities/chat-2026/bronnen/H3/2.3%20Surplus%20en%20welvaart%20%E2%80%93%20antwoorden.md</a:t>
             </a:r>
           </a:p>
           <a:p xmlns:a="http://schemas.openxmlformats.org/drawingml/2006/main">
@@ -3623,7 +3623,7 @@
           <a:p xmlns:a="http://schemas.openxmlformats.org/drawingml/2006/main">
             <a:r>
               <a:rPr sz="1400"/>
-              <a:t>Uitleg: Laat dit overzicht staan tijdens afsluiting / huiswerk. Start 1–2 en basis 3 op p.96; basis 4 op p.97; zelfstandig 5 op p.98; doel 6 op p.99–100. Huiswerk 3,4,5,6 maken en nakijken. Bonus 7 en herhaling 8–9 zijn extra. Start 1 haalt de driehoeken uit §2.3.1 p.74 en §2.3.2 p.81–84 op. Start 2 vraagt het nieuwe Pareto-criterium: lees de definities en het onderscheid met een groter totaal op p.93. Noteer een eerste redenering en twijfel. Dit is ondersteund verkennen. Keer na de uitleg terug naar 2, vóór het basiswerk. Geen aanname dat dit al beheerst wordt. De volledige route kan extra lestijd vragen; er is geen gemeten 55-minutenbegroting.</a:t>
+              <a:t>Uitleg: Laat dit overzicht staan tijdens afsluiting / huiswerk. Start 1–2 en basis 3 op p.97; basis 4 op p.98; zelfstandig 5 op p.99; doel 6 op p.100–101. Huiswerk 3,4,5,6 maken en nakijken. Bonus 7 en herhaling 8–9 zijn extra. Start 1 haalt de driehoeken uit §2.3.1 p.75 en §2.3.2 p.82–85 op. Start 2 vraagt het nieuwe Pareto-criterium: lees de definities en het onderscheid met een groter totaal op p.94. Noteer een eerste redenering en twijfel. Dit is ondersteund verkennen. Keer na de uitleg terug naar 2, vóór het basiswerk. Geen aanname dat dit al beheerst wordt. De volledige route kan extra lestijd vragen; er is geen gemeten 55-minutenbegroting.</a:t>
             </a:r>
           </a:p>
           <a:p xmlns:a="http://schemas.openxmlformats.org/drawingml/2006/main">
@@ -3671,13 +3671,13 @@
           <a:p xmlns:a="http://schemas.openxmlformats.org/drawingml/2006/main">
             <a:r>
               <a:rPr sz="1400"/>
-              <a:t>Bron: Boek 2, chatuitgave 2026, revisie 21 september 2026, gedrukte pagina 90–100. https://github.com/meijer1973/4veco-lessen/blob/d53080f38ebbdbba319e6d9b89dcba86067a72be/Boek%202%20-%20Kosten%2C%20opbrengsten%2C%20elasticiteit%20en%20surplus/edities/chat-2026/boek/Boek_2_Compleet.pdf</a:t>
-            </a:r>
-          </a:p>
-          <a:p xmlns:a="http://schemas.openxmlformats.org/drawingml/2006/main">
-            <a:r>
-              <a:rPr sz="1400"/>
-              <a:t>Antwoordmodel: https://github.com/meijer1973/4veco-lessen/blob/d53080f38ebbdbba319e6d9b89dcba86067a72be/Boek%202%20-%20Kosten%2C%20opbrengsten%2C%20elasticiteit%20en%20surplus/edities/chat-2026/bronnen/H3/2.3%20Surplus%20en%20welvaart%20%E2%80%93%20antwoorden.md</a:t>
+              <a:t>Bron: Boek 2, chatuitgave 2026, revisie 1 oktober 2026, gedrukte pagina 91–101. https://github.com/meijer1973/4veco-lessen/blob/a8940a7a79e22857a3e306a91fe923c48c63e716/Boek%202%20-%20Kosten%2C%20opbrengsten%2C%20elasticiteit%20en%20surplus/edities/chat-2026/boek/Boek_2_Compleet.pdf</a:t>
+            </a:r>
+          </a:p>
+          <a:p xmlns:a="http://schemas.openxmlformats.org/drawingml/2006/main">
+            <a:r>
+              <a:rPr sz="1400"/>
+              <a:t>Antwoordmodel: https://github.com/meijer1973/4veco-lessen/blob/a8940a7a79e22857a3e306a91fe923c48c63e716/Boek%202%20-%20Kosten%2C%20opbrengsten%2C%20elasticiteit%20en%20surplus/edities/chat-2026/bronnen/H3/2.3%20Surplus%20en%20welvaart%20%E2%80%93%20antwoorden.md</a:t>
             </a:r>
           </a:p>
           <a:p xmlns:a="http://schemas.openxmlformats.org/drawingml/2006/main">
@@ -3808,13 +3808,13 @@
           <a:p xmlns:a="http://schemas.openxmlformats.org/drawingml/2006/main">
             <a:r>
               <a:rPr sz="1400"/>
-              <a:t>Bron: Boek 2, chatuitgave 2026, revisie 21 september 2026, gedrukte pagina 81–84. https://github.com/meijer1973/4veco-lessen/blob/d53080f38ebbdbba319e6d9b89dcba86067a72be/Boek%202%20-%20Kosten%2C%20opbrengsten%2C%20elasticiteit%20en%20surplus/edities/chat-2026/boek/Boek_2_Compleet.pdf</a:t>
-            </a:r>
-          </a:p>
-          <a:p xmlns:a="http://schemas.openxmlformats.org/drawingml/2006/main">
-            <a:r>
-              <a:rPr sz="1400"/>
-              <a:t>Antwoordmodel: https://github.com/meijer1973/4veco-lessen/blob/d53080f38ebbdbba319e6d9b89dcba86067a72be/Boek%202%20-%20Kosten%2C%20opbrengsten%2C%20elasticiteit%20en%20surplus/edities/chat-2026/bronnen/H3/2.3%20Surplus%20en%20welvaart%20%E2%80%93%20antwoorden.md</a:t>
+              <a:t>Bron: Boek 2, chatuitgave 2026, revisie 1 oktober 2026, gedrukte pagina 82–85. https://github.com/meijer1973/4veco-lessen/blob/a8940a7a79e22857a3e306a91fe923c48c63e716/Boek%202%20-%20Kosten%2C%20opbrengsten%2C%20elasticiteit%20en%20surplus/edities/chat-2026/boek/Boek_2_Compleet.pdf</a:t>
+            </a:r>
+          </a:p>
+          <a:p xmlns:a="http://schemas.openxmlformats.org/drawingml/2006/main">
+            <a:r>
+              <a:rPr sz="1400"/>
+              <a:t>Antwoordmodel: https://github.com/meijer1973/4veco-lessen/blob/a8940a7a79e22857a3e306a91fe923c48c63e716/Boek%202%20-%20Kosten%2C%20opbrengsten%2C%20elasticiteit%20en%20surplus/edities/chat-2026/bronnen/H3/2.3%20Surplus%20en%20welvaart%20%E2%80%93%20antwoorden.md</a:t>
             </a:r>
           </a:p>
           <a:p xmlns:a="http://schemas.openxmlformats.org/drawingml/2006/main">
@@ -3897,7 +3897,7 @@
           <a:p xmlns:a="http://schemas.openxmlformats.org/drawingml/2006/main">
             <a:r>
               <a:rPr sz="1400"/>
-              <a:t>Uitleg: Vul de regelprijs in beide functies in en isoleer Q. De gewenste hoeveelheden verschillen van werkelijk geboekte plaatsen. De limiet bindt: 24 is kleiner dan beide. Dankzij de toewijzingsregel mogen we de gebieden vanaf Q=0 gebruiken. Qd/Qs betekenen hetzelfde als Qv/Qa uit Boek 1.</a:t>
+              <a:t>Uitleg: Vul de regelprijs in beide functies in en isoleer Q. De gewenste hoeveelheden verschillen van werkelijk geboekte plaatsen. De limiet bindt: 24 is kleiner dan beide. Dankzij de toewijzingsregel mogen we de gebieden vanaf Q=0 gebruiken. Qv is de gevraagde hoeveelheid; Qa is de aangeboden hoeveelheid, net als in het boek.</a:t>
             </a:r>
           </a:p>
           <a:p xmlns:a="http://schemas.openxmlformats.org/drawingml/2006/main">
@@ -3945,13 +3945,13 @@
           <a:p xmlns:a="http://schemas.openxmlformats.org/drawingml/2006/main">
             <a:r>
               <a:rPr sz="1400"/>
-              <a:t>Bron: Boek 2, chatuitgave 2026, revisie 21 september 2026, gedrukte pagina 90, 94. https://github.com/meijer1973/4veco-lessen/blob/d53080f38ebbdbba319e6d9b89dcba86067a72be/Boek%202%20-%20Kosten%2C%20opbrengsten%2C%20elasticiteit%20en%20surplus/edities/chat-2026/boek/Boek_2_Compleet.pdf</a:t>
-            </a:r>
-          </a:p>
-          <a:p xmlns:a="http://schemas.openxmlformats.org/drawingml/2006/main">
-            <a:r>
-              <a:rPr sz="1400"/>
-              <a:t>Antwoordmodel: https://github.com/meijer1973/4veco-lessen/blob/d53080f38ebbdbba319e6d9b89dcba86067a72be/Boek%202%20-%20Kosten%2C%20opbrengsten%2C%20elasticiteit%20en%20surplus/edities/chat-2026/bronnen/H3/2.3%20Surplus%20en%20welvaart%20%E2%80%93%20antwoorden.md</a:t>
+              <a:t>Bron: Boek 2, chatuitgave 2026, revisie 1 oktober 2026, gedrukte pagina 91, 95. https://github.com/meijer1973/4veco-lessen/blob/a8940a7a79e22857a3e306a91fe923c48c63e716/Boek%202%20-%20Kosten%2C%20opbrengsten%2C%20elasticiteit%20en%20surplus/edities/chat-2026/boek/Boek_2_Compleet.pdf</a:t>
+            </a:r>
+          </a:p>
+          <a:p xmlns:a="http://schemas.openxmlformats.org/drawingml/2006/main">
+            <a:r>
+              <a:rPr sz="1400"/>
+              <a:t>Antwoordmodel: https://github.com/meijer1973/4veco-lessen/blob/a8940a7a79e22857a3e306a91fe923c48c63e716/Boek%202%20-%20Kosten%2C%20opbrengsten%2C%20elasticiteit%20en%20surplus/edities/chat-2026/bronnen/H3/2.3%20Surplus%20en%20welvaart%20%E2%80%93%20antwoorden.md</a:t>
             </a:r>
           </a:p>
           <a:p xmlns:a="http://schemas.openxmlformats.org/drawingml/2006/main">
@@ -4082,13 +4082,13 @@
           <a:p xmlns:a="http://schemas.openxmlformats.org/drawingml/2006/main">
             <a:r>
               <a:rPr sz="1400"/>
-              <a:t>Bron: Boek 2, chatuitgave 2026, revisie 21 september 2026, gedrukte pagina 91, 94. https://github.com/meijer1973/4veco-lessen/blob/d53080f38ebbdbba319e6d9b89dcba86067a72be/Boek%202%20-%20Kosten%2C%20opbrengsten%2C%20elasticiteit%20en%20surplus/edities/chat-2026/boek/Boek_2_Compleet.pdf</a:t>
-            </a:r>
-          </a:p>
-          <a:p xmlns:a="http://schemas.openxmlformats.org/drawingml/2006/main">
-            <a:r>
-              <a:rPr sz="1400"/>
-              <a:t>Antwoordmodel: https://github.com/meijer1973/4veco-lessen/blob/d53080f38ebbdbba319e6d9b89dcba86067a72be/Boek%202%20-%20Kosten%2C%20opbrengsten%2C%20elasticiteit%20en%20surplus/edities/chat-2026/bronnen/H3/2.3%20Surplus%20en%20welvaart%20%E2%80%93%20antwoorden.md</a:t>
+              <a:t>Bron: Boek 2, chatuitgave 2026, revisie 1 oktober 2026, gedrukte pagina 92, 95. https://github.com/meijer1973/4veco-lessen/blob/a8940a7a79e22857a3e306a91fe923c48c63e716/Boek%202%20-%20Kosten%2C%20opbrengsten%2C%20elasticiteit%20en%20surplus/edities/chat-2026/boek/Boek_2_Compleet.pdf</a:t>
+            </a:r>
+          </a:p>
+          <a:p xmlns:a="http://schemas.openxmlformats.org/drawingml/2006/main">
+            <a:r>
+              <a:rPr sz="1400"/>
+              <a:t>Antwoordmodel: https://github.com/meijer1973/4veco-lessen/blob/a8940a7a79e22857a3e306a91fe923c48c63e716/Boek%202%20-%20Kosten%2C%20opbrengsten%2C%20elasticiteit%20en%20surplus/edities/chat-2026/bronnen/H3/2.3%20Surplus%20en%20welvaart%20%E2%80%93%20antwoorden.md</a:t>
             </a:r>
           </a:p>
           <a:p xmlns:a="http://schemas.openxmlformats.org/drawingml/2006/main">
@@ -4195,7 +4195,7 @@
           <a:p xmlns:a="http://schemas.openxmlformats.org/drawingml/2006/main">
             <a:r>
               <a:rPr sz="1400"/>
-              <a:t>Misvatting: Gebruik niet Qd=36 als basis. Er gaan maar 24 boekingen door.</a:t>
+              <a:t>Misvatting: Gebruik niet Qv=36 als basis. Er gaan maar 24 boekingen door.</a:t>
             </a:r>
           </a:p>
           <a:p xmlns:a="http://schemas.openxmlformats.org/drawingml/2006/main">
@@ -4219,13 +4219,13 @@
           <a:p xmlns:a="http://schemas.openxmlformats.org/drawingml/2006/main">
             <a:r>
               <a:rPr sz="1400"/>
-              <a:t>Bron: Boek 2, chatuitgave 2026, revisie 21 september 2026, gedrukte pagina 91, 94. https://github.com/meijer1973/4veco-lessen/blob/d53080f38ebbdbba319e6d9b89dcba86067a72be/Boek%202%20-%20Kosten%2C%20opbrengsten%2C%20elasticiteit%20en%20surplus/edities/chat-2026/boek/Boek_2_Compleet.pdf</a:t>
-            </a:r>
-          </a:p>
-          <a:p xmlns:a="http://schemas.openxmlformats.org/drawingml/2006/main">
-            <a:r>
-              <a:rPr sz="1400"/>
-              <a:t>Antwoordmodel: https://github.com/meijer1973/4veco-lessen/blob/d53080f38ebbdbba319e6d9b89dcba86067a72be/Boek%202%20-%20Kosten%2C%20opbrengsten%2C%20elasticiteit%20en%20surplus/edities/chat-2026/bronnen/H3/2.3%20Surplus%20en%20welvaart%20%E2%80%93%20antwoorden.md</a:t>
+              <a:t>Bron: Boek 2, chatuitgave 2026, revisie 1 oktober 2026, gedrukte pagina 92, 95. https://github.com/meijer1973/4veco-lessen/blob/a8940a7a79e22857a3e306a91fe923c48c63e716/Boek%202%20-%20Kosten%2C%20opbrengsten%2C%20elasticiteit%20en%20surplus/edities/chat-2026/boek/Boek_2_Compleet.pdf</a:t>
+            </a:r>
+          </a:p>
+          <a:p xmlns:a="http://schemas.openxmlformats.org/drawingml/2006/main">
+            <a:r>
+              <a:rPr sz="1400"/>
+              <a:t>Antwoordmodel: https://github.com/meijer1973/4veco-lessen/blob/a8940a7a79e22857a3e306a91fe923c48c63e716/Boek%202%20-%20Kosten%2C%20opbrengsten%2C%20elasticiteit%20en%20surplus/edities/chat-2026/bronnen/H3/2.3%20Surplus%20en%20welvaart%20%E2%80%93%20antwoorden.md</a:t>
             </a:r>
           </a:p>
           <a:p xmlns:a="http://schemas.openxmlformats.org/drawingml/2006/main">
@@ -4356,13 +4356,13 @@
           <a:p xmlns:a="http://schemas.openxmlformats.org/drawingml/2006/main">
             <a:r>
               <a:rPr sz="1400"/>
-              <a:t>Bron: Boek 2, chatuitgave 2026, revisie 21 september 2026, gedrukte pagina 91, 94. https://github.com/meijer1973/4veco-lessen/blob/d53080f38ebbdbba319e6d9b89dcba86067a72be/Boek%202%20-%20Kosten%2C%20opbrengsten%2C%20elasticiteit%20en%20surplus/edities/chat-2026/boek/Boek_2_Compleet.pdf</a:t>
-            </a:r>
-          </a:p>
-          <a:p xmlns:a="http://schemas.openxmlformats.org/drawingml/2006/main">
-            <a:r>
-              <a:rPr sz="1400"/>
-              <a:t>Antwoordmodel: https://github.com/meijer1973/4veco-lessen/blob/d53080f38ebbdbba319e6d9b89dcba86067a72be/Boek%202%20-%20Kosten%2C%20opbrengsten%2C%20elasticiteit%20en%20surplus/edities/chat-2026/bronnen/H3/2.3%20Surplus%20en%20welvaart%20%E2%80%93%20antwoorden.md</a:t>
+              <a:t>Bron: Boek 2, chatuitgave 2026, revisie 1 oktober 2026, gedrukte pagina 92, 95. https://github.com/meijer1973/4veco-lessen/blob/a8940a7a79e22857a3e306a91fe923c48c63e716/Boek%202%20-%20Kosten%2C%20opbrengsten%2C%20elasticiteit%20en%20surplus/edities/chat-2026/boek/Boek_2_Compleet.pdf</a:t>
+            </a:r>
+          </a:p>
+          <a:p xmlns:a="http://schemas.openxmlformats.org/drawingml/2006/main">
+            <a:r>
+              <a:rPr sz="1400"/>
+              <a:t>Antwoordmodel: https://github.com/meijer1973/4veco-lessen/blob/a8940a7a79e22857a3e306a91fe923c48c63e716/Boek%202%20-%20Kosten%2C%20opbrengsten%2C%20elasticiteit%20en%20surplus/edities/chat-2026/bronnen/H3/2.3%20Surplus%20en%20welvaart%20%E2%80%93%20antwoorden.md</a:t>
             </a:r>
           </a:p>
           <a:p xmlns:a="http://schemas.openxmlformats.org/drawingml/2006/main">
@@ -4493,13 +4493,13 @@
           <a:p xmlns:a="http://schemas.openxmlformats.org/drawingml/2006/main">
             <a:r>
               <a:rPr sz="1400"/>
-              <a:t>Bron: Boek 2, chatuitgave 2026, revisie 21 september 2026, gedrukte pagina 92, 95. https://github.com/meijer1973/4veco-lessen/blob/d53080f38ebbdbba319e6d9b89dcba86067a72be/Boek%202%20-%20Kosten%2C%20opbrengsten%2C%20elasticiteit%20en%20surplus/edities/chat-2026/boek/Boek_2_Compleet.pdf</a:t>
-            </a:r>
-          </a:p>
-          <a:p xmlns:a="http://schemas.openxmlformats.org/drawingml/2006/main">
-            <a:r>
-              <a:rPr sz="1400"/>
-              <a:t>Antwoordmodel: https://github.com/meijer1973/4veco-lessen/blob/d53080f38ebbdbba319e6d9b89dcba86067a72be/Boek%202%20-%20Kosten%2C%20opbrengsten%2C%20elasticiteit%20en%20surplus/edities/chat-2026/bronnen/H3/2.3%20Surplus%20en%20welvaart%20%E2%80%93%20antwoorden.md</a:t>
+              <a:t>Bron: Boek 2, chatuitgave 2026, revisie 1 oktober 2026, gedrukte pagina 93, 96. https://github.com/meijer1973/4veco-lessen/blob/a8940a7a79e22857a3e306a91fe923c48c63e716/Boek%202%20-%20Kosten%2C%20opbrengsten%2C%20elasticiteit%20en%20surplus/edities/chat-2026/boek/Boek_2_Compleet.pdf</a:t>
+            </a:r>
+          </a:p>
+          <a:p xmlns:a="http://schemas.openxmlformats.org/drawingml/2006/main">
+            <a:r>
+              <a:rPr sz="1400"/>
+              <a:t>Antwoordmodel: https://github.com/meijer1973/4veco-lessen/blob/a8940a7a79e22857a3e306a91fe923c48c63e716/Boek%202%20-%20Kosten%2C%20opbrengsten%2C%20elasticiteit%20en%20surplus/edities/chat-2026/bronnen/H3/2.3%20Surplus%20en%20welvaart%20%E2%80%93%20antwoorden.md</a:t>
             </a:r>
           </a:p>
           <a:p xmlns:a="http://schemas.openxmlformats.org/drawingml/2006/main">
@@ -4579,7 +4579,7 @@
   </p:cSld>
   <p:clrMap bg1="lt1" tx1="dk1" bg2="lt2" tx2="dk2" accent1="accent1" accent2="accent2" accent3="accent3" accent4="accent4" accent5="accent5" accent6="accent6" hlink="hlink" folHlink="folHlink"/>
   <p:sldLayoutIdLst>
-    <p:sldLayoutId xmlns:r="http://schemas.openxmlformats.org/officeDocument/2006/relationships" id="2147483649" r:id="Rf179b259c508488f"/>
+    <p:sldLayoutId xmlns:r="http://schemas.openxmlformats.org/officeDocument/2006/relationships" id="2147483649" r:id="R33a6bd917391480b"/>
   </p:sldLayoutIdLst>
   <p:txStyles>
     <p:titleStyle>
@@ -14219,7 +14219,7 @@
           <p:cNvPr id="29" name="Deze les: §2.3.3 Pareto-efficiëntie en welvaartsverlies">
             <a:extLst xmlns:a="http://schemas.openxmlformats.org/drawingml/2006/main">
               <a:ext uri="{FF2B5EF4-FFF2-40B4-BE49-F238E27FC236}">
-                <a16:creationId xmlns:a16="http://schemas.microsoft.com/office/drawing/2014/main" id="{FD596D9F-F86A-4C32-BB96-CD9C7803A15C}"/>
+                <a16:creationId xmlns:a16="http://schemas.microsoft.com/office/drawing/2014/main" id="{B5A85F5F-8049-4D9F-B566-9260EF3A95C0}"/>
               </a:ext>
             </a:extLst>
           </p:cNvPr>
@@ -14276,7 +14276,7 @@
           <p:cNvPr id="2" name="">
             <a:extLst xmlns:a="http://schemas.openxmlformats.org/drawingml/2006/main">
               <a:ext uri="{FF2B5EF4-FFF2-40B4-BE49-F238E27FC236}">
-                <a16:creationId xmlns:a16="http://schemas.microsoft.com/office/drawing/2014/main" id="{3F4B9A89-A4BC-4864-A432-90BBBBF53D9C}"/>
+                <a16:creationId xmlns:a16="http://schemas.microsoft.com/office/drawing/2014/main" id="{A845D476-505E-4415-9BE1-DE369AAFE0F5}"/>
               </a:ext>
             </a:extLst>
           </p:cNvPr>
@@ -14305,7 +14305,7 @@
           <p:cNvPr id="3" name="§2.3.3 Pareto-efficiëntie en welvaartsverlies">
             <a:extLst xmlns:a="http://schemas.openxmlformats.org/drawingml/2006/main">
               <a:ext uri="{FF2B5EF4-FFF2-40B4-BE49-F238E27FC236}">
-                <a16:creationId xmlns:a16="http://schemas.microsoft.com/office/drawing/2014/main" id="{BAF49310-D99A-4761-9DFD-4B1A8AE56CB2}"/>
+                <a16:creationId xmlns:a16="http://schemas.microsoft.com/office/drawing/2014/main" id="{F2862AA4-F1F2-4DFC-8AD5-0D25A612A51A}"/>
               </a:ext>
             </a:extLst>
           </p:cNvPr>
@@ -14362,7 +14362,7 @@
           <p:cNvPr id="4" name="1">
             <a:extLst xmlns:a="http://schemas.openxmlformats.org/drawingml/2006/main">
               <a:ext uri="{FF2B5EF4-FFF2-40B4-BE49-F238E27FC236}">
-                <a16:creationId xmlns:a16="http://schemas.microsoft.com/office/drawing/2014/main" id="{FA9DBCD3-7AF7-480A-A940-62CF02FC90AF}"/>
+                <a16:creationId xmlns:a16="http://schemas.microsoft.com/office/drawing/2014/main" id="{4568BC3C-7711-4E8F-99A8-9A7ACE584E39}"/>
               </a:ext>
             </a:extLst>
           </p:cNvPr>
@@ -14419,7 +14419,7 @@
           <p:cNvPr id="5" name="phase">
             <a:extLst xmlns:a="http://schemas.openxmlformats.org/drawingml/2006/main">
               <a:ext uri="{FF2B5EF4-FFF2-40B4-BE49-F238E27FC236}">
-                <a16:creationId xmlns:a16="http://schemas.microsoft.com/office/drawing/2014/main" id="{9ACBD2B1-790D-48F1-9F57-108A1B6A0022}"/>
+                <a16:creationId xmlns:a16="http://schemas.microsoft.com/office/drawing/2014/main" id="{2B624E6D-3696-4C86-ABB2-CC5135BBF24B}"/>
               </a:ext>
             </a:extLst>
           </p:cNvPr>
@@ -14476,7 +14476,7 @@
           <p:cNvPr id="6" name="Lesroute">
             <a:extLst xmlns:a="http://schemas.openxmlformats.org/drawingml/2006/main">
               <a:ext uri="{FF2B5EF4-FFF2-40B4-BE49-F238E27FC236}">
-                <a16:creationId xmlns:a16="http://schemas.microsoft.com/office/drawing/2014/main" id="{2988509E-B7DD-46D0-AB57-7F28A0F97895}"/>
+                <a16:creationId xmlns:a16="http://schemas.microsoft.com/office/drawing/2014/main" id="{B78AE691-72F7-4EEF-8381-7DD2EE6D05F0}"/>
               </a:ext>
             </a:extLst>
           </p:cNvPr>
@@ -14533,7 +14533,7 @@
           <p:cNvPr id="7" name="route-number-1">
             <a:extLst xmlns:a="http://schemas.openxmlformats.org/drawingml/2006/main">
               <a:ext uri="{FF2B5EF4-FFF2-40B4-BE49-F238E27FC236}">
-                <a16:creationId xmlns:a16="http://schemas.microsoft.com/office/drawing/2014/main" id="{64573C25-F632-44EF-A43A-72F06E2BA7DA}"/>
+                <a16:creationId xmlns:a16="http://schemas.microsoft.com/office/drawing/2014/main" id="{BA297E61-C9CF-4A29-A6DE-8A4DB8EE9DAB}"/>
               </a:ext>
             </a:extLst>
           </p:cNvPr>
@@ -14590,7 +14590,7 @@
           <p:cNvPr id="8" name="route-1">
             <a:extLst xmlns:a="http://schemas.openxmlformats.org/drawingml/2006/main">
               <a:ext uri="{FF2B5EF4-FFF2-40B4-BE49-F238E27FC236}">
-                <a16:creationId xmlns:a16="http://schemas.microsoft.com/office/drawing/2014/main" id="{C96060F9-0BC9-4352-9292-73C9EAA0FBA7}"/>
+                <a16:creationId xmlns:a16="http://schemas.microsoft.com/office/drawing/2014/main" id="{239C69A6-3E80-472E-B6C4-2A56A57D3C53}"/>
               </a:ext>
             </a:extLst>
           </p:cNvPr>
@@ -14647,7 +14647,7 @@
           <p:cNvPr id="9" name="route-number-2">
             <a:extLst xmlns:a="http://schemas.openxmlformats.org/drawingml/2006/main">
               <a:ext uri="{FF2B5EF4-FFF2-40B4-BE49-F238E27FC236}">
-                <a16:creationId xmlns:a16="http://schemas.microsoft.com/office/drawing/2014/main" id="{CA91170D-5F10-4986-BC13-B5F4021E25DF}"/>
+                <a16:creationId xmlns:a16="http://schemas.microsoft.com/office/drawing/2014/main" id="{327662A6-02F3-45D2-9C99-3467AC8F05C8}"/>
               </a:ext>
             </a:extLst>
           </p:cNvPr>
@@ -14704,7 +14704,7 @@
           <p:cNvPr id="10" name="route-2">
             <a:extLst xmlns:a="http://schemas.openxmlformats.org/drawingml/2006/main">
               <a:ext uri="{FF2B5EF4-FFF2-40B4-BE49-F238E27FC236}">
-                <a16:creationId xmlns:a16="http://schemas.microsoft.com/office/drawing/2014/main" id="{145AD783-C5C1-4906-B7D8-BDFAE0DA96AB}"/>
+                <a16:creationId xmlns:a16="http://schemas.microsoft.com/office/drawing/2014/main" id="{FC25D38D-BE16-446C-9848-FAEB13785FD8}"/>
               </a:ext>
             </a:extLst>
           </p:cNvPr>
@@ -14761,7 +14761,7 @@
           <p:cNvPr id="11" name="route-number-3">
             <a:extLst xmlns:a="http://schemas.openxmlformats.org/drawingml/2006/main">
               <a:ext uri="{FF2B5EF4-FFF2-40B4-BE49-F238E27FC236}">
-                <a16:creationId xmlns:a16="http://schemas.microsoft.com/office/drawing/2014/main" id="{1740E970-CF3E-4D25-9D51-36A0D5ADCC3E}"/>
+                <a16:creationId xmlns:a16="http://schemas.microsoft.com/office/drawing/2014/main" id="{2D8B39F6-6E64-492C-8390-6CCA42108039}"/>
               </a:ext>
             </a:extLst>
           </p:cNvPr>
@@ -14818,7 +14818,7 @@
           <p:cNvPr id="12" name="route-3">
             <a:extLst xmlns:a="http://schemas.openxmlformats.org/drawingml/2006/main">
               <a:ext uri="{FF2B5EF4-FFF2-40B4-BE49-F238E27FC236}">
-                <a16:creationId xmlns:a16="http://schemas.microsoft.com/office/drawing/2014/main" id="{97F0A6AA-A35D-49BF-94DC-458B94692493}"/>
+                <a16:creationId xmlns:a16="http://schemas.microsoft.com/office/drawing/2014/main" id="{BCBA4FC2-F38B-4C9E-800B-C16C8B80BF0D}"/>
               </a:ext>
             </a:extLst>
           </p:cNvPr>
@@ -14875,7 +14875,7 @@
           <p:cNvPr id="13" name="route-number-4">
             <a:extLst xmlns:a="http://schemas.openxmlformats.org/drawingml/2006/main">
               <a:ext uri="{FF2B5EF4-FFF2-40B4-BE49-F238E27FC236}">
-                <a16:creationId xmlns:a16="http://schemas.microsoft.com/office/drawing/2014/main" id="{247EC584-DCC7-4790-8BFD-17899EE63DDA}"/>
+                <a16:creationId xmlns:a16="http://schemas.microsoft.com/office/drawing/2014/main" id="{2ED63BEB-45FD-4730-A5C9-83D7FBC0A1BF}"/>
               </a:ext>
             </a:extLst>
           </p:cNvPr>
@@ -14932,7 +14932,7 @@
           <p:cNvPr id="14" name="route-4">
             <a:extLst xmlns:a="http://schemas.openxmlformats.org/drawingml/2006/main">
               <a:ext uri="{FF2B5EF4-FFF2-40B4-BE49-F238E27FC236}">
-                <a16:creationId xmlns:a16="http://schemas.microsoft.com/office/drawing/2014/main" id="{873EDF71-69CD-4813-874F-41623E36FBFB}"/>
+                <a16:creationId xmlns:a16="http://schemas.microsoft.com/office/drawing/2014/main" id="{DA0EDD87-77D5-4734-9409-8DF7CB2AE8E4}"/>
               </a:ext>
             </a:extLst>
           </p:cNvPr>
@@ -14989,7 +14989,7 @@
           <p:cNvPr id="15" name="route-number-5">
             <a:extLst xmlns:a="http://schemas.openxmlformats.org/drawingml/2006/main">
               <a:ext uri="{FF2B5EF4-FFF2-40B4-BE49-F238E27FC236}">
-                <a16:creationId xmlns:a16="http://schemas.microsoft.com/office/drawing/2014/main" id="{6A78BA1B-13E6-4C31-9155-D9B7556B75E6}"/>
+                <a16:creationId xmlns:a16="http://schemas.microsoft.com/office/drawing/2014/main" id="{F761FDD5-2E5C-4D6B-8A0F-E046D4BB3C38}"/>
               </a:ext>
             </a:extLst>
           </p:cNvPr>
@@ -15046,7 +15046,7 @@
           <p:cNvPr id="16" name="route-5">
             <a:extLst xmlns:a="http://schemas.openxmlformats.org/drawingml/2006/main">
               <a:ext uri="{FF2B5EF4-FFF2-40B4-BE49-F238E27FC236}">
-                <a16:creationId xmlns:a16="http://schemas.microsoft.com/office/drawing/2014/main" id="{E6A010BF-E33A-4B57-8790-5B80AA25D2E9}"/>
+                <a16:creationId xmlns:a16="http://schemas.microsoft.com/office/drawing/2014/main" id="{7D0C2242-8B6D-4C51-8F8A-EA11E6127A1F}"/>
               </a:ext>
             </a:extLst>
           </p:cNvPr>
@@ -15103,7 +15103,7 @@
           <p:cNvPr id="17" name="route-number-6">
             <a:extLst xmlns:a="http://schemas.openxmlformats.org/drawingml/2006/main">
               <a:ext uri="{FF2B5EF4-FFF2-40B4-BE49-F238E27FC236}">
-                <a16:creationId xmlns:a16="http://schemas.microsoft.com/office/drawing/2014/main" id="{446DAF77-7B4E-450D-9A27-77DF5CE7F8FB}"/>
+                <a16:creationId xmlns:a16="http://schemas.microsoft.com/office/drawing/2014/main" id="{2A0C8D92-4F23-4764-9A5A-26CCA94619CC}"/>
               </a:ext>
             </a:extLst>
           </p:cNvPr>
@@ -15160,7 +15160,7 @@
           <p:cNvPr id="18" name="route-6">
             <a:extLst xmlns:a="http://schemas.openxmlformats.org/drawingml/2006/main">
               <a:ext uri="{FF2B5EF4-FFF2-40B4-BE49-F238E27FC236}">
-                <a16:creationId xmlns:a16="http://schemas.microsoft.com/office/drawing/2014/main" id="{A2DADE7D-284E-4062-8A84-37A280ED609C}"/>
+                <a16:creationId xmlns:a16="http://schemas.microsoft.com/office/drawing/2014/main" id="{DD093035-8498-4F83-8148-2D1A77D38B6E}"/>
               </a:ext>
             </a:extLst>
           </p:cNvPr>
@@ -15217,7 +15217,7 @@
           <p:cNvPr id="19" name="route-number-7">
             <a:extLst xmlns:a="http://schemas.openxmlformats.org/drawingml/2006/main">
               <a:ext uri="{FF2B5EF4-FFF2-40B4-BE49-F238E27FC236}">
-                <a16:creationId xmlns:a16="http://schemas.microsoft.com/office/drawing/2014/main" id="{59B17542-2740-449C-9156-112A9E01C0FE}"/>
+                <a16:creationId xmlns:a16="http://schemas.microsoft.com/office/drawing/2014/main" id="{BBCB292D-DA2B-4954-920D-B4C1BCFCBCAD}"/>
               </a:ext>
             </a:extLst>
           </p:cNvPr>
@@ -15274,7 +15274,7 @@
           <p:cNvPr id="20" name="route-7">
             <a:extLst xmlns:a="http://schemas.openxmlformats.org/drawingml/2006/main">
               <a:ext uri="{FF2B5EF4-FFF2-40B4-BE49-F238E27FC236}">
-                <a16:creationId xmlns:a16="http://schemas.microsoft.com/office/drawing/2014/main" id="{139CD381-7806-4452-A618-94C290D8863A}"/>
+                <a16:creationId xmlns:a16="http://schemas.microsoft.com/office/drawing/2014/main" id="{594AC3DA-33D9-4C83-9EA1-8CFAC6637ED4}"/>
               </a:ext>
             </a:extLst>
           </p:cNvPr>
@@ -15331,7 +15331,7 @@
           <p:cNvPr id="21" name="Lesdoelen">
             <a:extLst xmlns:a="http://schemas.openxmlformats.org/drawingml/2006/main">
               <a:ext uri="{FF2B5EF4-FFF2-40B4-BE49-F238E27FC236}">
-                <a16:creationId xmlns:a16="http://schemas.microsoft.com/office/drawing/2014/main" id="{282C46F2-3230-41A2-A8A7-2B1B7073977A}"/>
+                <a16:creationId xmlns:a16="http://schemas.microsoft.com/office/drawing/2014/main" id="{0526193E-8CC9-4F97-B65D-4C91200A4B49}"/>
               </a:ext>
             </a:extLst>
           </p:cNvPr>
@@ -15388,7 +15388,7 @@
           <p:cNvPr id="22" name="overview-goals">
             <a:extLst xmlns:a="http://schemas.openxmlformats.org/drawingml/2006/main">
               <a:ext uri="{FF2B5EF4-FFF2-40B4-BE49-F238E27FC236}">
-                <a16:creationId xmlns:a16="http://schemas.microsoft.com/office/drawing/2014/main" id="{732EFDB8-58D5-40ED-AB35-689B358B5CC9}"/>
+                <a16:creationId xmlns:a16="http://schemas.microsoft.com/office/drawing/2014/main" id="{34124B43-750C-4071-9F2A-C7A11186395F}"/>
               </a:ext>
             </a:extLst>
           </p:cNvPr>
@@ -15491,7 +15491,7 @@
           <p:cNvPr id="23" name="">
             <a:extLst xmlns:a="http://schemas.openxmlformats.org/drawingml/2006/main">
               <a:ext uri="{FF2B5EF4-FFF2-40B4-BE49-F238E27FC236}">
-                <a16:creationId xmlns:a16="http://schemas.microsoft.com/office/drawing/2014/main" id="{63F597AC-DB94-4B8D-A53A-BD4B0DBC7BEF}"/>
+                <a16:creationId xmlns:a16="http://schemas.microsoft.com/office/drawing/2014/main" id="{FBE2CA67-A50C-4B17-A962-AE103D2CE777}"/>
               </a:ext>
             </a:extLst>
           </p:cNvPr>
@@ -15520,7 +15520,7 @@
           <p:cNvPr id="24" name="Startopdracht">
             <a:extLst xmlns:a="http://schemas.openxmlformats.org/drawingml/2006/main">
               <a:ext uri="{FF2B5EF4-FFF2-40B4-BE49-F238E27FC236}">
-                <a16:creationId xmlns:a16="http://schemas.microsoft.com/office/drawing/2014/main" id="{D7FFFE34-0DFB-411A-8FBE-F2642B3650C0}"/>
+                <a16:creationId xmlns:a16="http://schemas.microsoft.com/office/drawing/2014/main" id="{BBA0921C-43E2-4406-83F0-084FF2F2C8EA}"/>
               </a:ext>
             </a:extLst>
           </p:cNvPr>
@@ -15577,7 +15577,7 @@
           <p:cNvPr id="25" name="overview-start">
             <a:extLst xmlns:a="http://schemas.openxmlformats.org/drawingml/2006/main">
               <a:ext uri="{FF2B5EF4-FFF2-40B4-BE49-F238E27FC236}">
-                <a16:creationId xmlns:a16="http://schemas.microsoft.com/office/drawing/2014/main" id="{6996830D-67AA-4D75-9626-0AB3B7B026F9}"/>
+                <a16:creationId xmlns:a16="http://schemas.microsoft.com/office/drawing/2014/main" id="{F201408F-A7FB-4345-B304-41F01559AC58}"/>
               </a:ext>
             </a:extLst>
           </p:cNvPr>
@@ -15624,7 +15624,7 @@
                 <a:ea typeface="Arial"/>
                 <a:cs typeface="Arial"/>
               </a:rPr>
-              <a:t>Pagina 96 · Opgaven 1 en 2</a:t>
+              <a:t>Pagina 97 · Opgaven 1 en 2</a:t>
             </a:r>
           </a:p>
           <a:p xmlns:a="http://schemas.openxmlformats.org/drawingml/2006/main">
@@ -15647,7 +15647,7 @@
                 <a:ea typeface="Arial"/>
                 <a:cs typeface="Arial"/>
               </a:rPr>
-              <a:t>2: verkennen met theorie p. 93</a:t>
+              <a:t>2: verkennen met theorie p. 94</a:t>
             </a:r>
           </a:p>
         </p:txBody>
@@ -15657,7 +15657,7 @@
           <p:cNvPr id="26" name="">
             <a:extLst xmlns:a="http://schemas.openxmlformats.org/drawingml/2006/main">
               <a:ext uri="{FF2B5EF4-FFF2-40B4-BE49-F238E27FC236}">
-                <a16:creationId xmlns:a16="http://schemas.microsoft.com/office/drawing/2014/main" id="{AC219BB5-45C6-433F-9F00-8866ED745910}"/>
+                <a16:creationId xmlns:a16="http://schemas.microsoft.com/office/drawing/2014/main" id="{55EC9FAF-EA6B-4C84-ABE6-CA9F199F2486}"/>
               </a:ext>
             </a:extLst>
           </p:cNvPr>
@@ -15686,7 +15686,7 @@
           <p:cNvPr id="27" name="Huiswerk">
             <a:extLst xmlns:a="http://schemas.openxmlformats.org/drawingml/2006/main">
               <a:ext uri="{FF2B5EF4-FFF2-40B4-BE49-F238E27FC236}">
-                <a16:creationId xmlns:a16="http://schemas.microsoft.com/office/drawing/2014/main" id="{B81A617E-1332-472E-9A24-61E36C0404B4}"/>
+                <a16:creationId xmlns:a16="http://schemas.microsoft.com/office/drawing/2014/main" id="{E203943F-32A3-426A-B61B-5B54468E547F}"/>
               </a:ext>
             </a:extLst>
           </p:cNvPr>
@@ -15743,7 +15743,7 @@
           <p:cNvPr id="28" name="overview-homework">
             <a:extLst xmlns:a="http://schemas.openxmlformats.org/drawingml/2006/main">
               <a:ext uri="{FF2B5EF4-FFF2-40B4-BE49-F238E27FC236}">
-                <a16:creationId xmlns:a16="http://schemas.microsoft.com/office/drawing/2014/main" id="{F0847F6C-9B96-48E3-8F8A-4FDAB59A8232}"/>
+                <a16:creationId xmlns:a16="http://schemas.microsoft.com/office/drawing/2014/main" id="{D4601C7F-71C3-4C8A-B6C8-D598603EBA08}"/>
               </a:ext>
             </a:extLst>
           </p:cNvPr>
@@ -15867,7 +15867,7 @@
     </p:spTree>
     <p:extLst>
       <p:ext uri="{BB962C8B-B14F-4D97-AF65-F5344CB8AC3E}">
-        <p14:creationId xmlns:p14="http://schemas.microsoft.com/office/powerpoint/2010/main" val="1279261656"/>
+        <p14:creationId xmlns:p14="http://schemas.microsoft.com/office/powerpoint/2010/main" val="1604916514"/>
       </p:ext>
     </p:extLst>
   </p:cSld>
@@ -15898,7 +15898,7 @@
           <p:cNvPr id="10" name="Paretoverbetering en Pareto-efficiëntie">
             <a:extLst xmlns:a="http://schemas.openxmlformats.org/drawingml/2006/main">
               <a:ext uri="{FF2B5EF4-FFF2-40B4-BE49-F238E27FC236}">
-                <a16:creationId xmlns:a16="http://schemas.microsoft.com/office/drawing/2014/main" id="{54219D79-F108-48E3-AA62-DE639F07EF65}"/>
+                <a16:creationId xmlns:a16="http://schemas.microsoft.com/office/drawing/2014/main" id="{3C143F76-F59D-4A5E-AC62-A716A0FB11F3}"/>
               </a:ext>
             </a:extLst>
           </p:cNvPr>
@@ -15955,7 +15955,7 @@
           <p:cNvPr id="2" name="">
             <a:extLst xmlns:a="http://schemas.openxmlformats.org/drawingml/2006/main">
               <a:ext uri="{FF2B5EF4-FFF2-40B4-BE49-F238E27FC236}">
-                <a16:creationId xmlns:a16="http://schemas.microsoft.com/office/drawing/2014/main" id="{318CE356-FCFF-4EE1-892A-765DB684FB07}"/>
+                <a16:creationId xmlns:a16="http://schemas.microsoft.com/office/drawing/2014/main" id="{9224385B-7107-4CA5-9955-A208BF29FFF7}"/>
               </a:ext>
             </a:extLst>
           </p:cNvPr>
@@ -15984,7 +15984,7 @@
           <p:cNvPr id="3" name="§2.3.3 Pareto-efficiëntie en welvaartsverlies">
             <a:extLst xmlns:a="http://schemas.openxmlformats.org/drawingml/2006/main">
               <a:ext uri="{FF2B5EF4-FFF2-40B4-BE49-F238E27FC236}">
-                <a16:creationId xmlns:a16="http://schemas.microsoft.com/office/drawing/2014/main" id="{9B5446DE-B79E-4A48-A416-D86468114136}"/>
+                <a16:creationId xmlns:a16="http://schemas.microsoft.com/office/drawing/2014/main" id="{167FBF1B-33C8-4828-86D0-517F16787C7F}"/>
               </a:ext>
             </a:extLst>
           </p:cNvPr>
@@ -16041,7 +16041,7 @@
           <p:cNvPr id="4" name="10">
             <a:extLst xmlns:a="http://schemas.openxmlformats.org/drawingml/2006/main">
               <a:ext uri="{FF2B5EF4-FFF2-40B4-BE49-F238E27FC236}">
-                <a16:creationId xmlns:a16="http://schemas.microsoft.com/office/drawing/2014/main" id="{811FCBE3-CF99-4F93-A71F-F5D273890A2B}"/>
+                <a16:creationId xmlns:a16="http://schemas.microsoft.com/office/drawing/2014/main" id="{717F963A-DF53-4BF9-8F0C-1137EB95BD49}"/>
               </a:ext>
             </a:extLst>
           </p:cNvPr>
@@ -16098,7 +16098,7 @@
           <p:cNvPr id="5" name="Paretoverbetering">
             <a:extLst xmlns:a="http://schemas.openxmlformats.org/drawingml/2006/main">
               <a:ext uri="{FF2B5EF4-FFF2-40B4-BE49-F238E27FC236}">
-                <a16:creationId xmlns:a16="http://schemas.microsoft.com/office/drawing/2014/main" id="{B159C8C0-B31C-4BC7-9145-BE1402D1C80E}"/>
+                <a16:creationId xmlns:a16="http://schemas.microsoft.com/office/drawing/2014/main" id="{FDFE9466-C0D4-4936-9AFC-2699F751E71F}"/>
               </a:ext>
             </a:extLst>
           </p:cNvPr>
@@ -16155,7 +16155,7 @@
           <p:cNvPr id="6" name="Een haalbare verandering waarbij minstens één persoon&#10;erop voorui">
             <a:extLst xmlns:a="http://schemas.openxmlformats.org/drawingml/2006/main">
               <a:ext uri="{FF2B5EF4-FFF2-40B4-BE49-F238E27FC236}">
-                <a16:creationId xmlns:a16="http://schemas.microsoft.com/office/drawing/2014/main" id="{070F3E59-2BB0-4F3B-88B0-D62113C48F5E}"/>
+                <a16:creationId xmlns:a16="http://schemas.microsoft.com/office/drawing/2014/main" id="{1FCA03D4-E619-460F-A315-1435FC341B0B}"/>
               </a:ext>
             </a:extLst>
           </p:cNvPr>
@@ -16235,7 +16235,7 @@
           <p:cNvPr id="7" name="">
             <a:extLst xmlns:a="http://schemas.openxmlformats.org/drawingml/2006/main">
               <a:ext uri="{FF2B5EF4-FFF2-40B4-BE49-F238E27FC236}">
-                <a16:creationId xmlns:a16="http://schemas.microsoft.com/office/drawing/2014/main" id="{3847F798-B683-448D-BC51-762C1FE08675}"/>
+                <a16:creationId xmlns:a16="http://schemas.microsoft.com/office/drawing/2014/main" id="{F9A55AEE-D68C-4481-9392-E161896A88B2}"/>
               </a:ext>
             </a:extLst>
           </p:cNvPr>
@@ -16264,7 +16264,7 @@
           <p:cNvPr id="8" name="Pareto-efficiëntie">
             <a:extLst xmlns:a="http://schemas.openxmlformats.org/drawingml/2006/main">
               <a:ext uri="{FF2B5EF4-FFF2-40B4-BE49-F238E27FC236}">
-                <a16:creationId xmlns:a16="http://schemas.microsoft.com/office/drawing/2014/main" id="{F1DF5F0E-5FF3-4739-95AE-EFAFB8D0BA26}"/>
+                <a16:creationId xmlns:a16="http://schemas.microsoft.com/office/drawing/2014/main" id="{80090ED2-F2C7-4606-B102-A5E4F4DB30D7}"/>
               </a:ext>
             </a:extLst>
           </p:cNvPr>
@@ -16321,7 +16321,7 @@
           <p:cNvPr id="9" name="Er is geen haalbare Paretoverbetering meer mogelijk.&#10;Ook een extr">
             <a:extLst xmlns:a="http://schemas.openxmlformats.org/drawingml/2006/main">
               <a:ext uri="{FF2B5EF4-FFF2-40B4-BE49-F238E27FC236}">
-                <a16:creationId xmlns:a16="http://schemas.microsoft.com/office/drawing/2014/main" id="{59AD4C46-D121-42AD-AFA7-97C248AB4251}"/>
+                <a16:creationId xmlns:a16="http://schemas.microsoft.com/office/drawing/2014/main" id="{A75F64E3-F6F4-496A-B762-77AA83141152}"/>
               </a:ext>
             </a:extLst>
           </p:cNvPr>
@@ -16399,7 +16399,7 @@
     </p:spTree>
     <p:extLst>
       <p:ext uri="{BB962C8B-B14F-4D97-AF65-F5344CB8AC3E}">
-        <p14:creationId xmlns:p14="http://schemas.microsoft.com/office/powerpoint/2010/main" val="1333431229"/>
+        <p14:creationId xmlns:p14="http://schemas.microsoft.com/office/powerpoint/2010/main" val="769467557"/>
       </p:ext>
     </p:extLst>
   </p:cSld>
@@ -16430,7 +16430,7 @@
           <p:cNvPr id="10" name="De mogelijke 25e rondvaartplaats">
             <a:extLst xmlns:a="http://schemas.openxmlformats.org/drawingml/2006/main">
               <a:ext uri="{FF2B5EF4-FFF2-40B4-BE49-F238E27FC236}">
-                <a16:creationId xmlns:a16="http://schemas.microsoft.com/office/drawing/2014/main" id="{D1D5617F-F75C-4BB9-9592-3EE1199DECAD}"/>
+                <a16:creationId xmlns:a16="http://schemas.microsoft.com/office/drawing/2014/main" id="{4E6AE716-2A1D-4931-957A-8243D883459D}"/>
               </a:ext>
             </a:extLst>
           </p:cNvPr>
@@ -16487,7 +16487,7 @@
           <p:cNvPr id="2" name="">
             <a:extLst xmlns:a="http://schemas.openxmlformats.org/drawingml/2006/main">
               <a:ext uri="{FF2B5EF4-FFF2-40B4-BE49-F238E27FC236}">
-                <a16:creationId xmlns:a16="http://schemas.microsoft.com/office/drawing/2014/main" id="{92127C0B-5618-4CC6-9A6A-93BD06B99C64}"/>
+                <a16:creationId xmlns:a16="http://schemas.microsoft.com/office/drawing/2014/main" id="{BF96A47F-350E-45A1-9DE8-ED9941522600}"/>
               </a:ext>
             </a:extLst>
           </p:cNvPr>
@@ -16516,7 +16516,7 @@
           <p:cNvPr id="3" name="§2.3.3 Pareto-efficiëntie en welvaartsverlies">
             <a:extLst xmlns:a="http://schemas.openxmlformats.org/drawingml/2006/main">
               <a:ext uri="{FF2B5EF4-FFF2-40B4-BE49-F238E27FC236}">
-                <a16:creationId xmlns:a16="http://schemas.microsoft.com/office/drawing/2014/main" id="{CBE8D7D0-F41F-4FB7-A1F1-9063C54DEE89}"/>
+                <a16:creationId xmlns:a16="http://schemas.microsoft.com/office/drawing/2014/main" id="{FF97FCA5-C4AA-494E-9F93-53856D7506A5}"/>
               </a:ext>
             </a:extLst>
           </p:cNvPr>
@@ -16573,7 +16573,7 @@
           <p:cNvPr id="4" name="11">
             <a:extLst xmlns:a="http://schemas.openxmlformats.org/drawingml/2006/main">
               <a:ext uri="{FF2B5EF4-FFF2-40B4-BE49-F238E27FC236}">
-                <a16:creationId xmlns:a16="http://schemas.microsoft.com/office/drawing/2014/main" id="{CFE8BFC1-BA7C-4F61-BFAB-8ED956C8C7D4}"/>
+                <a16:creationId xmlns:a16="http://schemas.microsoft.com/office/drawing/2014/main" id="{AFF9256F-C1B4-4E58-B351-4E2AA09DDE47}"/>
               </a:ext>
             </a:extLst>
           </p:cNvPr>
@@ -16630,7 +16630,7 @@
           <p:cNvPr id="5" name="Uitlegvoorbeeld — niet uit het boek">
             <a:extLst xmlns:a="http://schemas.openxmlformats.org/drawingml/2006/main">
               <a:ext uri="{FF2B5EF4-FFF2-40B4-BE49-F238E27FC236}">
-                <a16:creationId xmlns:a16="http://schemas.microsoft.com/office/drawing/2014/main" id="{2487B6F8-4C29-41A5-9B37-658FC52BEC29}"/>
+                <a16:creationId xmlns:a16="http://schemas.microsoft.com/office/drawing/2014/main" id="{1089271F-3FFF-4F7A-92F0-E6AD8FD8FF3C}"/>
               </a:ext>
             </a:extLst>
           </p:cNvPr>
@@ -16859,7 +16859,7 @@
           <p:cNvPr id="7" name="Haalbaar: technische ruimte en kosteloze verruiming.">
             <a:extLst xmlns:a="http://schemas.openxmlformats.org/drawingml/2006/main">
               <a:ext uri="{FF2B5EF4-FFF2-40B4-BE49-F238E27FC236}">
-                <a16:creationId xmlns:a16="http://schemas.microsoft.com/office/drawing/2014/main" id="{9F0CF12C-8FD7-4F83-BF84-31AE87B37F55}"/>
+                <a16:creationId xmlns:a16="http://schemas.microsoft.com/office/drawing/2014/main" id="{0CA25E44-CFEF-48A6-A545-0901D2282773}"/>
               </a:ext>
             </a:extLst>
           </p:cNvPr>
@@ -16916,7 +16916,7 @@
           <p:cNvPr id="8" name="Niemand slechter af: prijs en bestaande transacties blijven gelij">
             <a:extLst xmlns:a="http://schemas.openxmlformats.org/drawingml/2006/main">
               <a:ext uri="{FF2B5EF4-FFF2-40B4-BE49-F238E27FC236}">
-                <a16:creationId xmlns:a16="http://schemas.microsoft.com/office/drawing/2014/main" id="{8A515036-ECBE-48CE-83CA-2783C69857E6}"/>
+                <a16:creationId xmlns:a16="http://schemas.microsoft.com/office/drawing/2014/main" id="{BD62FEE5-89B7-4465-8505-14158A241622}"/>
               </a:ext>
             </a:extLst>
           </p:cNvPr>
@@ -16996,7 +16996,7 @@
           <p:cNvPr id="9" name="Er is een Paretoverbetering. 24 boekingen zijn niet Pareto-effici">
             <a:extLst xmlns:a="http://schemas.openxmlformats.org/drawingml/2006/main">
               <a:ext uri="{FF2B5EF4-FFF2-40B4-BE49-F238E27FC236}">
-                <a16:creationId xmlns:a16="http://schemas.microsoft.com/office/drawing/2014/main" id="{4DFCBE91-360B-4482-A85D-E463AE0347BA}"/>
+                <a16:creationId xmlns:a16="http://schemas.microsoft.com/office/drawing/2014/main" id="{5588A75D-B9D0-461D-B35F-25AAB5B26DF3}"/>
               </a:ext>
             </a:extLst>
           </p:cNvPr>
@@ -17051,7 +17051,7 @@
     </p:spTree>
     <p:extLst>
       <p:ext uri="{BB962C8B-B14F-4D97-AF65-F5344CB8AC3E}">
-        <p14:creationId xmlns:p14="http://schemas.microsoft.com/office/powerpoint/2010/main" val="607423299"/>
+        <p14:creationId xmlns:p14="http://schemas.microsoft.com/office/powerpoint/2010/main" val="2013623395"/>
       </p:ext>
     </p:extLst>
   </p:cSld>
@@ -17082,7 +17082,7 @@
           <p:cNvPr id="10" name="Een hoger totaal en de verdeling van voordeel">
             <a:extLst xmlns:a="http://schemas.openxmlformats.org/drawingml/2006/main">
               <a:ext uri="{FF2B5EF4-FFF2-40B4-BE49-F238E27FC236}">
-                <a16:creationId xmlns:a16="http://schemas.microsoft.com/office/drawing/2014/main" id="{FFBD4243-96C0-4ACF-9D38-30A85D2BED45}"/>
+                <a16:creationId xmlns:a16="http://schemas.microsoft.com/office/drawing/2014/main" id="{EF0ABCCF-9020-4DA1-BF5F-57BF7BC4EE8B}"/>
               </a:ext>
             </a:extLst>
           </p:cNvPr>
@@ -17139,7 +17139,7 @@
           <p:cNvPr id="2" name="">
             <a:extLst xmlns:a="http://schemas.openxmlformats.org/drawingml/2006/main">
               <a:ext uri="{FF2B5EF4-FFF2-40B4-BE49-F238E27FC236}">
-                <a16:creationId xmlns:a16="http://schemas.microsoft.com/office/drawing/2014/main" id="{E7BEA121-FE8B-46DD-AC5D-5A35260BA025}"/>
+                <a16:creationId xmlns:a16="http://schemas.microsoft.com/office/drawing/2014/main" id="{C821610D-A56C-4ED3-8867-F24AC82C5704}"/>
               </a:ext>
             </a:extLst>
           </p:cNvPr>
@@ -17168,7 +17168,7 @@
           <p:cNvPr id="3" name="§2.3.3 Pareto-efficiëntie en welvaartsverlies">
             <a:extLst xmlns:a="http://schemas.openxmlformats.org/drawingml/2006/main">
               <a:ext uri="{FF2B5EF4-FFF2-40B4-BE49-F238E27FC236}">
-                <a16:creationId xmlns:a16="http://schemas.microsoft.com/office/drawing/2014/main" id="{98B357AB-467D-46DC-8CE7-EFA68C057456}"/>
+                <a16:creationId xmlns:a16="http://schemas.microsoft.com/office/drawing/2014/main" id="{7E159EF4-569C-4636-95A9-055DB3223A52}"/>
               </a:ext>
             </a:extLst>
           </p:cNvPr>
@@ -17225,7 +17225,7 @@
           <p:cNvPr id="4" name="12">
             <a:extLst xmlns:a="http://schemas.openxmlformats.org/drawingml/2006/main">
               <a:ext uri="{FF2B5EF4-FFF2-40B4-BE49-F238E27FC236}">
-                <a16:creationId xmlns:a16="http://schemas.microsoft.com/office/drawing/2014/main" id="{2B54967D-A7E6-4390-9C5A-2DB99B43A8E4}"/>
+                <a16:creationId xmlns:a16="http://schemas.microsoft.com/office/drawing/2014/main" id="{D40E1874-89F1-4935-AEE4-E77B235112E0}"/>
               </a:ext>
             </a:extLst>
           </p:cNvPr>
@@ -17282,7 +17282,7 @@
           <p:cNvPr id="5" name="Uitlegvoorbeeld — niet uit het boek">
             <a:extLst xmlns:a="http://schemas.openxmlformats.org/drawingml/2006/main">
               <a:ext uri="{FF2B5EF4-FFF2-40B4-BE49-F238E27FC236}">
-                <a16:creationId xmlns:a16="http://schemas.microsoft.com/office/drawing/2014/main" id="{4BA946A1-B653-4B8D-9ECB-5E7057BCE922}"/>
+                <a16:creationId xmlns:a16="http://schemas.microsoft.com/office/drawing/2014/main" id="{38819FE2-735D-40C8-9FCC-69BDE0BC072F}"/>
               </a:ext>
             </a:extLst>
           </p:cNvPr>
@@ -17657,7 +17657,7 @@
           <p:cNvPr id="7" name="Terug naar het vrije evenwicht vergroot TS, maar verlaagt PS.">
             <a:extLst xmlns:a="http://schemas.openxmlformats.org/drawingml/2006/main">
               <a:ext uri="{FF2B5EF4-FFF2-40B4-BE49-F238E27FC236}">
-                <a16:creationId xmlns:a16="http://schemas.microsoft.com/office/drawing/2014/main" id="{D505E45E-3232-446F-BCC6-956A88646912}"/>
+                <a16:creationId xmlns:a16="http://schemas.microsoft.com/office/drawing/2014/main" id="{80A38E04-4B71-4623-ADA4-E89F285965FD}"/>
               </a:ext>
             </a:extLst>
           </p:cNvPr>
@@ -17714,7 +17714,7 @@
           <p:cNvPr id="8" name="Een extra boeking tegen dezelfde prijs kan wél niemand schaden.">
             <a:extLst xmlns:a="http://schemas.openxmlformats.org/drawingml/2006/main">
               <a:ext uri="{FF2B5EF4-FFF2-40B4-BE49-F238E27FC236}">
-                <a16:creationId xmlns:a16="http://schemas.microsoft.com/office/drawing/2014/main" id="{FF60EAEB-BF31-462F-A663-F521A3B13F60}"/>
+                <a16:creationId xmlns:a16="http://schemas.microsoft.com/office/drawing/2014/main" id="{85922DB3-436F-47C1-BBD8-79F5CA7C7AC8}"/>
               </a:ext>
             </a:extLst>
           </p:cNvPr>
@@ -17771,7 +17771,7 @@
           <p:cNvPr id="9" name="Wat een eerlijke verdeling is, vraagt een apart waardeoordeel.">
             <a:extLst xmlns:a="http://schemas.openxmlformats.org/drawingml/2006/main">
               <a:ext uri="{FF2B5EF4-FFF2-40B4-BE49-F238E27FC236}">
-                <a16:creationId xmlns:a16="http://schemas.microsoft.com/office/drawing/2014/main" id="{13B6FE2F-46DF-4316-9008-D59D6AC99E62}"/>
+                <a16:creationId xmlns:a16="http://schemas.microsoft.com/office/drawing/2014/main" id="{1BB8B367-786E-4502-936C-B112DF219D1B}"/>
               </a:ext>
             </a:extLst>
           </p:cNvPr>
@@ -17826,7 +17826,7 @@
     </p:spTree>
     <p:extLst>
       <p:ext uri="{BB962C8B-B14F-4D97-AF65-F5344CB8AC3E}">
-        <p14:creationId xmlns:p14="http://schemas.microsoft.com/office/powerpoint/2010/main" val="871847857"/>
+        <p14:creationId xmlns:p14="http://schemas.microsoft.com/office/powerpoint/2010/main" val="946064091"/>
       </p:ext>
     </p:extLst>
   </p:cSld>
@@ -17857,7 +17857,7 @@
           <p:cNvPr id="8" name="Terug naar startopgave 2">
             <a:extLst xmlns:a="http://schemas.openxmlformats.org/drawingml/2006/main">
               <a:ext uri="{FF2B5EF4-FFF2-40B4-BE49-F238E27FC236}">
-                <a16:creationId xmlns:a16="http://schemas.microsoft.com/office/drawing/2014/main" id="{2336CCB6-4E43-49A1-84A0-D9FBC41C34E9}"/>
+                <a16:creationId xmlns:a16="http://schemas.microsoft.com/office/drawing/2014/main" id="{8131B496-64F1-4943-ACC9-02B7DCA588BA}"/>
               </a:ext>
             </a:extLst>
           </p:cNvPr>
@@ -17914,7 +17914,7 @@
           <p:cNvPr id="2" name="">
             <a:extLst xmlns:a="http://schemas.openxmlformats.org/drawingml/2006/main">
               <a:ext uri="{FF2B5EF4-FFF2-40B4-BE49-F238E27FC236}">
-                <a16:creationId xmlns:a16="http://schemas.microsoft.com/office/drawing/2014/main" id="{78BDA25F-9AC3-438E-89BB-E62EBA9AFF6E}"/>
+                <a16:creationId xmlns:a16="http://schemas.microsoft.com/office/drawing/2014/main" id="{ACC7D910-D93D-4521-B869-21A7C169E0FF}"/>
               </a:ext>
             </a:extLst>
           </p:cNvPr>
@@ -17943,7 +17943,7 @@
           <p:cNvPr id="3" name="§2.3.3 Pareto-efficiëntie en welvaartsverlies · Startopgave 2 · B">
             <a:extLst xmlns:a="http://schemas.openxmlformats.org/drawingml/2006/main">
               <a:ext uri="{FF2B5EF4-FFF2-40B4-BE49-F238E27FC236}">
-                <a16:creationId xmlns:a16="http://schemas.microsoft.com/office/drawing/2014/main" id="{673E8593-198B-4E7C-B92A-F67285B14326}"/>
+                <a16:creationId xmlns:a16="http://schemas.microsoft.com/office/drawing/2014/main" id="{D4D67B9D-7032-4017-B429-4F11BF78817D}"/>
               </a:ext>
             </a:extLst>
           </p:cNvPr>
@@ -17990,7 +17990,7 @@
                 <a:ea typeface="Arial"/>
                 <a:cs typeface="Arial"/>
               </a:rPr>
-              <a:t>§2.3.3 Pareto-efficiëntie en welvaartsverlies · Startopgave 2 · Boekpagina 96</a:t>
+              <a:t>§2.3.3 Pareto-efficiëntie en welvaartsverlies · Startopgave 2 · Boekpagina 97</a:t>
             </a:r>
           </a:p>
         </p:txBody>
@@ -18000,7 +18000,7 @@
           <p:cNvPr id="4" name="13">
             <a:extLst xmlns:a="http://schemas.openxmlformats.org/drawingml/2006/main">
               <a:ext uri="{FF2B5EF4-FFF2-40B4-BE49-F238E27FC236}">
-                <a16:creationId xmlns:a16="http://schemas.microsoft.com/office/drawing/2014/main" id="{979268CB-FF8D-4B8A-9350-43C0819E5175}"/>
+                <a16:creationId xmlns:a16="http://schemas.microsoft.com/office/drawing/2014/main" id="{B4C68A08-DD60-4D4A-BBE1-F9C0F396F7CC}"/>
               </a:ext>
             </a:extLst>
           </p:cNvPr>
@@ -18057,7 +18057,7 @@
           <p:cNvPr id="5" name="Koper A krijgt € 8 extra voordeel.&#10;Verkoper B krijgt € 3 minder v">
             <a:extLst xmlns:a="http://schemas.openxmlformats.org/drawingml/2006/main">
               <a:ext uri="{FF2B5EF4-FFF2-40B4-BE49-F238E27FC236}">
-                <a16:creationId xmlns:a16="http://schemas.microsoft.com/office/drawing/2014/main" id="{F95FCBE8-F2DE-43FB-B37E-49F38EF9949B}"/>
+                <a16:creationId xmlns:a16="http://schemas.microsoft.com/office/drawing/2014/main" id="{647633A9-4425-4FAF-B9CF-EEB951BD2D47}"/>
               </a:ext>
             </a:extLst>
           </p:cNvPr>
@@ -18160,7 +18160,7 @@
           <p:cNvPr id="6" name="Is dit een Paretoverbetering? Licht toe.">
             <a:extLst xmlns:a="http://schemas.openxmlformats.org/drawingml/2006/main">
               <a:ext uri="{FF2B5EF4-FFF2-40B4-BE49-F238E27FC236}">
-                <a16:creationId xmlns:a16="http://schemas.microsoft.com/office/drawing/2014/main" id="{435EE946-B509-4D13-AFE4-5807CD020B63}"/>
+                <a16:creationId xmlns:a16="http://schemas.microsoft.com/office/drawing/2014/main" id="{255AC339-6F3F-4152-87B6-42D93177575A}"/>
               </a:ext>
             </a:extLst>
           </p:cNvPr>
@@ -18217,7 +18217,7 @@
           <p:cNvPr id="7" name="Herzie je eerste antwoord. Gebruik alle voorwaarden uit de defini">
             <a:extLst xmlns:a="http://schemas.openxmlformats.org/drawingml/2006/main">
               <a:ext uri="{FF2B5EF4-FFF2-40B4-BE49-F238E27FC236}">
-                <a16:creationId xmlns:a16="http://schemas.microsoft.com/office/drawing/2014/main" id="{35B305BA-E8F3-47AC-88A6-FF2CFCDB615A}"/>
+                <a16:creationId xmlns:a16="http://schemas.microsoft.com/office/drawing/2014/main" id="{8CFDACDC-442B-4C10-B7C4-5EC4367FB8D0}"/>
               </a:ext>
             </a:extLst>
           </p:cNvPr>
@@ -18272,7 +18272,7 @@
     </p:spTree>
     <p:extLst>
       <p:ext uri="{BB962C8B-B14F-4D97-AF65-F5344CB8AC3E}">
-        <p14:creationId xmlns:p14="http://schemas.microsoft.com/office/powerpoint/2010/main" val="929919552"/>
+        <p14:creationId xmlns:p14="http://schemas.microsoft.com/office/powerpoint/2010/main" val="1175412236"/>
       </p:ext>
     </p:extLst>
   </p:cSld>
@@ -18303,7 +18303,7 @@
           <p:cNvPr id="29" name="Deze les: §2.3.3 Pareto-efficiëntie en welvaartsverlies">
             <a:extLst xmlns:a="http://schemas.openxmlformats.org/drawingml/2006/main">
               <a:ext uri="{FF2B5EF4-FFF2-40B4-BE49-F238E27FC236}">
-                <a16:creationId xmlns:a16="http://schemas.microsoft.com/office/drawing/2014/main" id="{EAB9A440-8834-4EC9-97F0-6733F2F7B681}"/>
+                <a16:creationId xmlns:a16="http://schemas.microsoft.com/office/drawing/2014/main" id="{40AA7E82-E4DC-47C9-95E1-E7BEF2A6E58D}"/>
               </a:ext>
             </a:extLst>
           </p:cNvPr>
@@ -18360,7 +18360,7 @@
           <p:cNvPr id="2" name="">
             <a:extLst xmlns:a="http://schemas.openxmlformats.org/drawingml/2006/main">
               <a:ext uri="{FF2B5EF4-FFF2-40B4-BE49-F238E27FC236}">
-                <a16:creationId xmlns:a16="http://schemas.microsoft.com/office/drawing/2014/main" id="{550D8440-7663-4716-A2CA-17E900D1F26A}"/>
+                <a16:creationId xmlns:a16="http://schemas.microsoft.com/office/drawing/2014/main" id="{B6CD4EA1-F31E-451C-9846-01D6F734A5A2}"/>
               </a:ext>
             </a:extLst>
           </p:cNvPr>
@@ -18389,7 +18389,7 @@
           <p:cNvPr id="3" name="§2.3.3 Pareto-efficiëntie en welvaartsverlies">
             <a:extLst xmlns:a="http://schemas.openxmlformats.org/drawingml/2006/main">
               <a:ext uri="{FF2B5EF4-FFF2-40B4-BE49-F238E27FC236}">
-                <a16:creationId xmlns:a16="http://schemas.microsoft.com/office/drawing/2014/main" id="{41EA15A4-EA57-4946-BACB-BE81FDD7CCD7}"/>
+                <a16:creationId xmlns:a16="http://schemas.microsoft.com/office/drawing/2014/main" id="{47B483ED-4006-4108-A944-82B3A3BD17F7}"/>
               </a:ext>
             </a:extLst>
           </p:cNvPr>
@@ -18446,7 +18446,7 @@
           <p:cNvPr id="4" name="14">
             <a:extLst xmlns:a="http://schemas.openxmlformats.org/drawingml/2006/main">
               <a:ext uri="{FF2B5EF4-FFF2-40B4-BE49-F238E27FC236}">
-                <a16:creationId xmlns:a16="http://schemas.microsoft.com/office/drawing/2014/main" id="{37468EE1-DD54-40D1-A4D4-26985C098573}"/>
+                <a16:creationId xmlns:a16="http://schemas.microsoft.com/office/drawing/2014/main" id="{E62350FD-F471-417C-AD23-ACFDF424E58D}"/>
               </a:ext>
             </a:extLst>
           </p:cNvPr>
@@ -18503,7 +18503,7 @@
           <p:cNvPr id="5" name="phase">
             <a:extLst xmlns:a="http://schemas.openxmlformats.org/drawingml/2006/main">
               <a:ext uri="{FF2B5EF4-FFF2-40B4-BE49-F238E27FC236}">
-                <a16:creationId xmlns:a16="http://schemas.microsoft.com/office/drawing/2014/main" id="{56EA16B4-3230-4A69-AE9F-5E02FB0C53EE}"/>
+                <a16:creationId xmlns:a16="http://schemas.microsoft.com/office/drawing/2014/main" id="{7E6EB2D2-31DC-46AE-85F8-310190638629}"/>
               </a:ext>
             </a:extLst>
           </p:cNvPr>
@@ -18560,7 +18560,7 @@
           <p:cNvPr id="6" name="Lesroute">
             <a:extLst xmlns:a="http://schemas.openxmlformats.org/drawingml/2006/main">
               <a:ext uri="{FF2B5EF4-FFF2-40B4-BE49-F238E27FC236}">
-                <a16:creationId xmlns:a16="http://schemas.microsoft.com/office/drawing/2014/main" id="{11A4E49C-3D33-4812-8B3A-60E973B302E9}"/>
+                <a16:creationId xmlns:a16="http://schemas.microsoft.com/office/drawing/2014/main" id="{501BD388-2668-4EB7-9E64-3E6A93A759A5}"/>
               </a:ext>
             </a:extLst>
           </p:cNvPr>
@@ -18617,7 +18617,7 @@
           <p:cNvPr id="7" name="route-number-1">
             <a:extLst xmlns:a="http://schemas.openxmlformats.org/drawingml/2006/main">
               <a:ext uri="{FF2B5EF4-FFF2-40B4-BE49-F238E27FC236}">
-                <a16:creationId xmlns:a16="http://schemas.microsoft.com/office/drawing/2014/main" id="{32018F2B-1AD5-4805-86ED-F3B42D473B0F}"/>
+                <a16:creationId xmlns:a16="http://schemas.microsoft.com/office/drawing/2014/main" id="{EA540572-CD6F-44E5-ACF9-0F011C850854}"/>
               </a:ext>
             </a:extLst>
           </p:cNvPr>
@@ -18674,7 +18674,7 @@
           <p:cNvPr id="8" name="route-1">
             <a:extLst xmlns:a="http://schemas.openxmlformats.org/drawingml/2006/main">
               <a:ext uri="{FF2B5EF4-FFF2-40B4-BE49-F238E27FC236}">
-                <a16:creationId xmlns:a16="http://schemas.microsoft.com/office/drawing/2014/main" id="{05F80312-66E8-426F-B4F5-F01652A57519}"/>
+                <a16:creationId xmlns:a16="http://schemas.microsoft.com/office/drawing/2014/main" id="{CFA119D0-D5E7-4FA4-BB2E-35103A2060BB}"/>
               </a:ext>
             </a:extLst>
           </p:cNvPr>
@@ -18731,7 +18731,7 @@
           <p:cNvPr id="9" name="route-number-2">
             <a:extLst xmlns:a="http://schemas.openxmlformats.org/drawingml/2006/main">
               <a:ext uri="{FF2B5EF4-FFF2-40B4-BE49-F238E27FC236}">
-                <a16:creationId xmlns:a16="http://schemas.microsoft.com/office/drawing/2014/main" id="{38321338-9E80-4BCD-B9D3-47A62E2855D1}"/>
+                <a16:creationId xmlns:a16="http://schemas.microsoft.com/office/drawing/2014/main" id="{8F80026D-E7AF-4117-BECA-D703474862F8}"/>
               </a:ext>
             </a:extLst>
           </p:cNvPr>
@@ -18788,7 +18788,7 @@
           <p:cNvPr id="10" name="route-2">
             <a:extLst xmlns:a="http://schemas.openxmlformats.org/drawingml/2006/main">
               <a:ext uri="{FF2B5EF4-FFF2-40B4-BE49-F238E27FC236}">
-                <a16:creationId xmlns:a16="http://schemas.microsoft.com/office/drawing/2014/main" id="{44A29B5D-F3E8-49C7-9F6A-F0A1E46BAD92}"/>
+                <a16:creationId xmlns:a16="http://schemas.microsoft.com/office/drawing/2014/main" id="{388C4F79-B916-46F2-8FEB-1A4E30A3F0BB}"/>
               </a:ext>
             </a:extLst>
           </p:cNvPr>
@@ -18845,7 +18845,7 @@
           <p:cNvPr id="11" name="route-number-3">
             <a:extLst xmlns:a="http://schemas.openxmlformats.org/drawingml/2006/main">
               <a:ext uri="{FF2B5EF4-FFF2-40B4-BE49-F238E27FC236}">
-                <a16:creationId xmlns:a16="http://schemas.microsoft.com/office/drawing/2014/main" id="{62FAA423-43F0-4526-8232-27152202E662}"/>
+                <a16:creationId xmlns:a16="http://schemas.microsoft.com/office/drawing/2014/main" id="{AE2374C5-12E0-4108-9A71-B90AC5ED8989}"/>
               </a:ext>
             </a:extLst>
           </p:cNvPr>
@@ -18902,7 +18902,7 @@
           <p:cNvPr id="12" name="route-3">
             <a:extLst xmlns:a="http://schemas.openxmlformats.org/drawingml/2006/main">
               <a:ext uri="{FF2B5EF4-FFF2-40B4-BE49-F238E27FC236}">
-                <a16:creationId xmlns:a16="http://schemas.microsoft.com/office/drawing/2014/main" id="{27C67517-19C7-4BD8-8758-9E5A047A37A0}"/>
+                <a16:creationId xmlns:a16="http://schemas.microsoft.com/office/drawing/2014/main" id="{71A7D208-F1AC-4BEA-985D-EAD9CEA0093C}"/>
               </a:ext>
             </a:extLst>
           </p:cNvPr>
@@ -18959,7 +18959,7 @@
           <p:cNvPr id="13" name="route-number-4">
             <a:extLst xmlns:a="http://schemas.openxmlformats.org/drawingml/2006/main">
               <a:ext uri="{FF2B5EF4-FFF2-40B4-BE49-F238E27FC236}">
-                <a16:creationId xmlns:a16="http://schemas.microsoft.com/office/drawing/2014/main" id="{DBB40A86-C59D-43D6-A802-79E0A71E6C14}"/>
+                <a16:creationId xmlns:a16="http://schemas.microsoft.com/office/drawing/2014/main" id="{27F62C57-F605-4F98-B170-7D8C4AF03623}"/>
               </a:ext>
             </a:extLst>
           </p:cNvPr>
@@ -19016,7 +19016,7 @@
           <p:cNvPr id="14" name="route-4">
             <a:extLst xmlns:a="http://schemas.openxmlformats.org/drawingml/2006/main">
               <a:ext uri="{FF2B5EF4-FFF2-40B4-BE49-F238E27FC236}">
-                <a16:creationId xmlns:a16="http://schemas.microsoft.com/office/drawing/2014/main" id="{C28906F5-FAE6-453C-8125-1E437A7297CF}"/>
+                <a16:creationId xmlns:a16="http://schemas.microsoft.com/office/drawing/2014/main" id="{35D0AFF1-A52F-4705-901A-223106B5555A}"/>
               </a:ext>
             </a:extLst>
           </p:cNvPr>
@@ -19073,7 +19073,7 @@
           <p:cNvPr id="15" name="route-number-5">
             <a:extLst xmlns:a="http://schemas.openxmlformats.org/drawingml/2006/main">
               <a:ext uri="{FF2B5EF4-FFF2-40B4-BE49-F238E27FC236}">
-                <a16:creationId xmlns:a16="http://schemas.microsoft.com/office/drawing/2014/main" id="{86E8CF40-4330-41FD-8FD3-3F592B6003CB}"/>
+                <a16:creationId xmlns:a16="http://schemas.microsoft.com/office/drawing/2014/main" id="{22295CBD-E497-424A-B64B-5FAEAAA64B54}"/>
               </a:ext>
             </a:extLst>
           </p:cNvPr>
@@ -19130,7 +19130,7 @@
           <p:cNvPr id="16" name="route-5">
             <a:extLst xmlns:a="http://schemas.openxmlformats.org/drawingml/2006/main">
               <a:ext uri="{FF2B5EF4-FFF2-40B4-BE49-F238E27FC236}">
-                <a16:creationId xmlns:a16="http://schemas.microsoft.com/office/drawing/2014/main" id="{872866EE-56BC-42B8-90D6-21EA9767C5D6}"/>
+                <a16:creationId xmlns:a16="http://schemas.microsoft.com/office/drawing/2014/main" id="{6E4323E0-3A46-4248-8817-07D5B29BCB39}"/>
               </a:ext>
             </a:extLst>
           </p:cNvPr>
@@ -19187,7 +19187,7 @@
           <p:cNvPr id="17" name="route-number-6">
             <a:extLst xmlns:a="http://schemas.openxmlformats.org/drawingml/2006/main">
               <a:ext uri="{FF2B5EF4-FFF2-40B4-BE49-F238E27FC236}">
-                <a16:creationId xmlns:a16="http://schemas.microsoft.com/office/drawing/2014/main" id="{88718C2C-28AE-4C19-8585-C2A1764F6DB4}"/>
+                <a16:creationId xmlns:a16="http://schemas.microsoft.com/office/drawing/2014/main" id="{D15E42F1-4EF8-4F72-BFD3-FB396549536E}"/>
               </a:ext>
             </a:extLst>
           </p:cNvPr>
@@ -19244,7 +19244,7 @@
           <p:cNvPr id="18" name="route-6">
             <a:extLst xmlns:a="http://schemas.openxmlformats.org/drawingml/2006/main">
               <a:ext uri="{FF2B5EF4-FFF2-40B4-BE49-F238E27FC236}">
-                <a16:creationId xmlns:a16="http://schemas.microsoft.com/office/drawing/2014/main" id="{78D226EA-1F4F-4D36-9539-A3E41D5077B7}"/>
+                <a16:creationId xmlns:a16="http://schemas.microsoft.com/office/drawing/2014/main" id="{0296BEEB-28D8-4FC7-9AA5-684A5A236B4F}"/>
               </a:ext>
             </a:extLst>
           </p:cNvPr>
@@ -19301,7 +19301,7 @@
           <p:cNvPr id="19" name="route-number-7">
             <a:extLst xmlns:a="http://schemas.openxmlformats.org/drawingml/2006/main">
               <a:ext uri="{FF2B5EF4-FFF2-40B4-BE49-F238E27FC236}">
-                <a16:creationId xmlns:a16="http://schemas.microsoft.com/office/drawing/2014/main" id="{DB7B3DF9-3035-4CF8-94CA-4676EC3B10CA}"/>
+                <a16:creationId xmlns:a16="http://schemas.microsoft.com/office/drawing/2014/main" id="{B82B42F5-04B5-49C5-A66D-756D0E1A3BA8}"/>
               </a:ext>
             </a:extLst>
           </p:cNvPr>
@@ -19358,7 +19358,7 @@
           <p:cNvPr id="20" name="route-7">
             <a:extLst xmlns:a="http://schemas.openxmlformats.org/drawingml/2006/main">
               <a:ext uri="{FF2B5EF4-FFF2-40B4-BE49-F238E27FC236}">
-                <a16:creationId xmlns:a16="http://schemas.microsoft.com/office/drawing/2014/main" id="{53AD4D58-9B8C-483C-808B-8ABD2F90A83A}"/>
+                <a16:creationId xmlns:a16="http://schemas.microsoft.com/office/drawing/2014/main" id="{6EC4F8A4-127C-4183-B3E6-FDE0657F3A88}"/>
               </a:ext>
             </a:extLst>
           </p:cNvPr>
@@ -19415,7 +19415,7 @@
           <p:cNvPr id="21" name="Lesdoelen">
             <a:extLst xmlns:a="http://schemas.openxmlformats.org/drawingml/2006/main">
               <a:ext uri="{FF2B5EF4-FFF2-40B4-BE49-F238E27FC236}">
-                <a16:creationId xmlns:a16="http://schemas.microsoft.com/office/drawing/2014/main" id="{E7CDA884-1759-4739-8F5B-90E46782D8BB}"/>
+                <a16:creationId xmlns:a16="http://schemas.microsoft.com/office/drawing/2014/main" id="{0ADEBC38-B28E-4A65-96AA-1BBA7F52859E}"/>
               </a:ext>
             </a:extLst>
           </p:cNvPr>
@@ -19472,7 +19472,7 @@
           <p:cNvPr id="22" name="overview-goals">
             <a:extLst xmlns:a="http://schemas.openxmlformats.org/drawingml/2006/main">
               <a:ext uri="{FF2B5EF4-FFF2-40B4-BE49-F238E27FC236}">
-                <a16:creationId xmlns:a16="http://schemas.microsoft.com/office/drawing/2014/main" id="{C599DBE0-E4E7-4753-A674-F8643837E762}"/>
+                <a16:creationId xmlns:a16="http://schemas.microsoft.com/office/drawing/2014/main" id="{E80CD3AB-2786-4251-967E-8AC9E32B75B8}"/>
               </a:ext>
             </a:extLst>
           </p:cNvPr>
@@ -19575,7 +19575,7 @@
           <p:cNvPr id="23" name="">
             <a:extLst xmlns:a="http://schemas.openxmlformats.org/drawingml/2006/main">
               <a:ext uri="{FF2B5EF4-FFF2-40B4-BE49-F238E27FC236}">
-                <a16:creationId xmlns:a16="http://schemas.microsoft.com/office/drawing/2014/main" id="{F9BD8187-FF68-403A-8921-FD2826A01241}"/>
+                <a16:creationId xmlns:a16="http://schemas.microsoft.com/office/drawing/2014/main" id="{BA31C264-F954-4535-B81D-E4EAE865B293}"/>
               </a:ext>
             </a:extLst>
           </p:cNvPr>
@@ -19604,7 +19604,7 @@
           <p:cNvPr id="24" name="Startopdracht">
             <a:extLst xmlns:a="http://schemas.openxmlformats.org/drawingml/2006/main">
               <a:ext uri="{FF2B5EF4-FFF2-40B4-BE49-F238E27FC236}">
-                <a16:creationId xmlns:a16="http://schemas.microsoft.com/office/drawing/2014/main" id="{9BAFE976-376D-4585-BB74-C804DA98A199}"/>
+                <a16:creationId xmlns:a16="http://schemas.microsoft.com/office/drawing/2014/main" id="{7D5D2AC3-DCA0-4AA2-8467-CD8758DFB61C}"/>
               </a:ext>
             </a:extLst>
           </p:cNvPr>
@@ -19661,7 +19661,7 @@
           <p:cNvPr id="25" name="overview-start">
             <a:extLst xmlns:a="http://schemas.openxmlformats.org/drawingml/2006/main">
               <a:ext uri="{FF2B5EF4-FFF2-40B4-BE49-F238E27FC236}">
-                <a16:creationId xmlns:a16="http://schemas.microsoft.com/office/drawing/2014/main" id="{6B345AA0-B68F-488C-B8CE-3541F6D8C03F}"/>
+                <a16:creationId xmlns:a16="http://schemas.microsoft.com/office/drawing/2014/main" id="{53EB9307-E692-4DF3-8977-16921BE6FAB1}"/>
               </a:ext>
             </a:extLst>
           </p:cNvPr>
@@ -19708,7 +19708,7 @@
                 <a:ea typeface="Arial"/>
                 <a:cs typeface="Arial"/>
               </a:rPr>
-              <a:t>Pagina 96 · Opgaven 1 en 2</a:t>
+              <a:t>Pagina 97 · Opgaven 1 en 2</a:t>
             </a:r>
           </a:p>
           <a:p xmlns:a="http://schemas.openxmlformats.org/drawingml/2006/main">
@@ -19731,7 +19731,7 @@
                 <a:ea typeface="Arial"/>
                 <a:cs typeface="Arial"/>
               </a:rPr>
-              <a:t>2: verkennen met theorie p. 93</a:t>
+              <a:t>2: verkennen met theorie p. 94</a:t>
             </a:r>
           </a:p>
         </p:txBody>
@@ -19741,7 +19741,7 @@
           <p:cNvPr id="26" name="">
             <a:extLst xmlns:a="http://schemas.openxmlformats.org/drawingml/2006/main">
               <a:ext uri="{FF2B5EF4-FFF2-40B4-BE49-F238E27FC236}">
-                <a16:creationId xmlns:a16="http://schemas.microsoft.com/office/drawing/2014/main" id="{9C670989-1C33-4A01-B0BB-141EA99475E8}"/>
+                <a16:creationId xmlns:a16="http://schemas.microsoft.com/office/drawing/2014/main" id="{005B8F75-CC69-4E36-8640-63A34FC463BE}"/>
               </a:ext>
             </a:extLst>
           </p:cNvPr>
@@ -19770,7 +19770,7 @@
           <p:cNvPr id="27" name="Huiswerk">
             <a:extLst xmlns:a="http://schemas.openxmlformats.org/drawingml/2006/main">
               <a:ext uri="{FF2B5EF4-FFF2-40B4-BE49-F238E27FC236}">
-                <a16:creationId xmlns:a16="http://schemas.microsoft.com/office/drawing/2014/main" id="{01FB6E50-42A4-4FF3-8BBE-5E992ECF3BF2}"/>
+                <a16:creationId xmlns:a16="http://schemas.microsoft.com/office/drawing/2014/main" id="{EE80782C-FEF0-432E-9039-7AF9E93EBDDC}"/>
               </a:ext>
             </a:extLst>
           </p:cNvPr>
@@ -19827,7 +19827,7 @@
           <p:cNvPr id="28" name="overview-homework">
             <a:extLst xmlns:a="http://schemas.openxmlformats.org/drawingml/2006/main">
               <a:ext uri="{FF2B5EF4-FFF2-40B4-BE49-F238E27FC236}">
-                <a16:creationId xmlns:a16="http://schemas.microsoft.com/office/drawing/2014/main" id="{090C80DE-B34E-4267-AD11-61338B71D717}"/>
+                <a16:creationId xmlns:a16="http://schemas.microsoft.com/office/drawing/2014/main" id="{6A7F458B-892C-4B6C-8247-E57246EEF09D}"/>
               </a:ext>
             </a:extLst>
           </p:cNvPr>
@@ -19951,7 +19951,7 @@
     </p:spTree>
     <p:extLst>
       <p:ext uri="{BB962C8B-B14F-4D97-AF65-F5344CB8AC3E}">
-        <p14:creationId xmlns:p14="http://schemas.microsoft.com/office/powerpoint/2010/main" val="1004307070"/>
+        <p14:creationId xmlns:p14="http://schemas.microsoft.com/office/powerpoint/2010/main" val="1542458442"/>
       </p:ext>
     </p:extLst>
   </p:cSld>
@@ -19982,7 +19982,7 @@
           <p:cNvPr id="8" name="Opgave 6: Concertkaartjes, de markt">
             <a:extLst xmlns:a="http://schemas.openxmlformats.org/drawingml/2006/main">
               <a:ext uri="{FF2B5EF4-FFF2-40B4-BE49-F238E27FC236}">
-                <a16:creationId xmlns:a16="http://schemas.microsoft.com/office/drawing/2014/main" id="{92EED358-EEC0-4DE0-90A6-3F7962EDE095}"/>
+                <a16:creationId xmlns:a16="http://schemas.microsoft.com/office/drawing/2014/main" id="{E4A2D355-46B1-461B-B000-22BC3EE68B7C}"/>
               </a:ext>
             </a:extLst>
           </p:cNvPr>
@@ -20039,7 +20039,7 @@
           <p:cNvPr id="2" name="">
             <a:extLst xmlns:a="http://schemas.openxmlformats.org/drawingml/2006/main">
               <a:ext uri="{FF2B5EF4-FFF2-40B4-BE49-F238E27FC236}">
-                <a16:creationId xmlns:a16="http://schemas.microsoft.com/office/drawing/2014/main" id="{AF8DEE53-38D3-4B3D-A670-FF03FC633F93}"/>
+                <a16:creationId xmlns:a16="http://schemas.microsoft.com/office/drawing/2014/main" id="{402E8441-EA4B-4F33-A881-48C0DE1E610B}"/>
               </a:ext>
             </a:extLst>
           </p:cNvPr>
@@ -20068,7 +20068,7 @@
           <p:cNvPr id="3" name="§2.3.3 Pareto-efficiëntie en welvaartsverlies · Opgave 6 · Boekpa">
             <a:extLst xmlns:a="http://schemas.openxmlformats.org/drawingml/2006/main">
               <a:ext uri="{FF2B5EF4-FFF2-40B4-BE49-F238E27FC236}">
-                <a16:creationId xmlns:a16="http://schemas.microsoft.com/office/drawing/2014/main" id="{6825C894-00D4-4EB5-AAD9-4C492F76488E}"/>
+                <a16:creationId xmlns:a16="http://schemas.microsoft.com/office/drawing/2014/main" id="{229AB346-687A-41B0-8C45-A97DF84989C9}"/>
               </a:ext>
             </a:extLst>
           </p:cNvPr>
@@ -20115,7 +20115,7 @@
                 <a:ea typeface="Arial"/>
                 <a:cs typeface="Arial"/>
               </a:rPr>
-              <a:t>§2.3.3 Pareto-efficiëntie en welvaartsverlies · Opgave 6 · Boekpagina 99–100</a:t>
+              <a:t>§2.3.3 Pareto-efficiëntie en welvaartsverlies · Opgave 6 · Boekpagina 100–101</a:t>
             </a:r>
           </a:p>
         </p:txBody>
@@ -20125,7 +20125,7 @@
           <p:cNvPr id="4" name="15">
             <a:extLst xmlns:a="http://schemas.openxmlformats.org/drawingml/2006/main">
               <a:ext uri="{FF2B5EF4-FFF2-40B4-BE49-F238E27FC236}">
-                <a16:creationId xmlns:a16="http://schemas.microsoft.com/office/drawing/2014/main" id="{123316F9-4047-4383-B16A-8523B76DD009}"/>
+                <a16:creationId xmlns:a16="http://schemas.microsoft.com/office/drawing/2014/main" id="{BC3EEA8C-9236-49F8-A3DF-A3B3FCA85A41}"/>
               </a:ext>
             </a:extLst>
           </p:cNvPr>
@@ -20182,7 +20182,7 @@
           <p:cNvPr id="5" name="Gebruik opnieuw vraag P = 50 − 0,5Q&#10;en aanbod P = 5 + 0,25Q.">
             <a:extLst xmlns:a="http://schemas.openxmlformats.org/drawingml/2006/main">
               <a:ext uri="{FF2B5EF4-FFF2-40B4-BE49-F238E27FC236}">
-                <a16:creationId xmlns:a16="http://schemas.microsoft.com/office/drawing/2014/main" id="{A1FDDA5F-975A-4FB9-8FCB-EA2DCB87C433}"/>
+                <a16:creationId xmlns:a16="http://schemas.microsoft.com/office/drawing/2014/main" id="{E066722F-28F7-4783-905D-BBFD7F9A324C}"/>
               </a:ext>
             </a:extLst>
           </p:cNvPr>
@@ -20262,7 +20262,7 @@
           <p:cNvPr id="6" name="P in euro per kaartje; Q in kaartjes.">
             <a:extLst xmlns:a="http://schemas.openxmlformats.org/drawingml/2006/main">
               <a:ext uri="{FF2B5EF4-FFF2-40B4-BE49-F238E27FC236}">
-                <a16:creationId xmlns:a16="http://schemas.microsoft.com/office/drawing/2014/main" id="{9440AF7F-CB79-425F-8F5B-904D96B1C2AE}"/>
+                <a16:creationId xmlns:a16="http://schemas.microsoft.com/office/drawing/2014/main" id="{6772A978-AC3A-4B15-B097-C881AEAE531E}"/>
               </a:ext>
             </a:extLst>
           </p:cNvPr>
@@ -20489,7 +20489,7 @@
     </p:spTree>
     <p:extLst>
       <p:ext uri="{BB962C8B-B14F-4D97-AF65-F5344CB8AC3E}">
-        <p14:creationId xmlns:p14="http://schemas.microsoft.com/office/powerpoint/2010/main" val="1871535301"/>
+        <p14:creationId xmlns:p14="http://schemas.microsoft.com/office/powerpoint/2010/main" val="1140806075"/>
       </p:ext>
     </p:extLst>
   </p:cSld>
@@ -20520,7 +20520,7 @@
           <p:cNvPr id="9" name="Opgave 6: de reserveringsregel">
             <a:extLst xmlns:a="http://schemas.openxmlformats.org/drawingml/2006/main">
               <a:ext uri="{FF2B5EF4-FFF2-40B4-BE49-F238E27FC236}">
-                <a16:creationId xmlns:a16="http://schemas.microsoft.com/office/drawing/2014/main" id="{A51EDBE9-688E-4F37-BD33-52EFF0C9B40B}"/>
+                <a16:creationId xmlns:a16="http://schemas.microsoft.com/office/drawing/2014/main" id="{3183473D-916D-4A01-AF82-BD543B77CBBE}"/>
               </a:ext>
             </a:extLst>
           </p:cNvPr>
@@ -20577,7 +20577,7 @@
           <p:cNvPr id="2" name="">
             <a:extLst xmlns:a="http://schemas.openxmlformats.org/drawingml/2006/main">
               <a:ext uri="{FF2B5EF4-FFF2-40B4-BE49-F238E27FC236}">
-                <a16:creationId xmlns:a16="http://schemas.microsoft.com/office/drawing/2014/main" id="{0C59670C-AB17-471F-BFCF-E2F3EA888C84}"/>
+                <a16:creationId xmlns:a16="http://schemas.microsoft.com/office/drawing/2014/main" id="{05008E33-BBD5-45C1-A9F0-DCF934358B24}"/>
               </a:ext>
             </a:extLst>
           </p:cNvPr>
@@ -20606,7 +20606,7 @@
           <p:cNvPr id="3" name="§2.3.3 Pareto-efficiëntie en welvaartsverlies · Opgave 6 · Boekpa">
             <a:extLst xmlns:a="http://schemas.openxmlformats.org/drawingml/2006/main">
               <a:ext uri="{FF2B5EF4-FFF2-40B4-BE49-F238E27FC236}">
-                <a16:creationId xmlns:a16="http://schemas.microsoft.com/office/drawing/2014/main" id="{998C3097-576E-461C-B169-3DD9ABB8CBA3}"/>
+                <a16:creationId xmlns:a16="http://schemas.microsoft.com/office/drawing/2014/main" id="{4AAD00AA-4A80-422E-B8C6-7D18E6718889}"/>
               </a:ext>
             </a:extLst>
           </p:cNvPr>
@@ -20653,7 +20653,7 @@
                 <a:ea typeface="Arial"/>
                 <a:cs typeface="Arial"/>
               </a:rPr>
-              <a:t>§2.3.3 Pareto-efficiëntie en welvaartsverlies · Opgave 6 · Boekpagina 99–100</a:t>
+              <a:t>§2.3.3 Pareto-efficiëntie en welvaartsverlies · Opgave 6 · Boekpagina 100–101</a:t>
             </a:r>
           </a:p>
         </p:txBody>
@@ -20663,7 +20663,7 @@
           <p:cNvPr id="4" name="16">
             <a:extLst xmlns:a="http://schemas.openxmlformats.org/drawingml/2006/main">
               <a:ext uri="{FF2B5EF4-FFF2-40B4-BE49-F238E27FC236}">
-                <a16:creationId xmlns:a16="http://schemas.microsoft.com/office/drawing/2014/main" id="{908750EE-BA47-409C-9683-26561F7C13ED}"/>
+                <a16:creationId xmlns:a16="http://schemas.microsoft.com/office/drawing/2014/main" id="{AB3954D0-59D6-496E-8012-8C61DA95B499}"/>
               </a:ext>
             </a:extLst>
           </p:cNvPr>
@@ -20720,7 +20720,7 @@
           <p:cNvPr id="5" name="Een kosteloos verruimbare reserveringsregel zet de prijs op € 25&#10;">
             <a:extLst xmlns:a="http://schemas.openxmlformats.org/drawingml/2006/main">
               <a:ext uri="{FF2B5EF4-FFF2-40B4-BE49-F238E27FC236}">
-                <a16:creationId xmlns:a16="http://schemas.microsoft.com/office/drawing/2014/main" id="{C06565CB-A21B-4479-A616-5E8E10F708C7}"/>
+                <a16:creationId xmlns:a16="http://schemas.microsoft.com/office/drawing/2014/main" id="{237A8F49-D417-44C1-AFA9-BC9E8CD8222C}"/>
               </a:ext>
             </a:extLst>
           </p:cNvPr>
@@ -20800,7 +20800,7 @@
           <p:cNvPr id="6" name="Het platform kan technisch minstens 60 transacties verwerken.">
             <a:extLst xmlns:a="http://schemas.openxmlformats.org/drawingml/2006/main">
               <a:ext uri="{FF2B5EF4-FFF2-40B4-BE49-F238E27FC236}">
-                <a16:creationId xmlns:a16="http://schemas.microsoft.com/office/drawing/2014/main" id="{843D8412-C4D3-4BAA-8957-509D3F5C1B04}"/>
+                <a16:creationId xmlns:a16="http://schemas.microsoft.com/office/drawing/2014/main" id="{B60C3742-1A15-4E10-A38E-257B21E78CF1}"/>
               </a:ext>
             </a:extLst>
           </p:cNvPr>
@@ -20857,7 +20857,7 @@
           <p:cNvPr id="7" name="De 40 kaartjes gaan naar de vragers met de hoogste betalingsberei">
             <a:extLst xmlns:a="http://schemas.openxmlformats.org/drawingml/2006/main">
               <a:ext uri="{FF2B5EF4-FFF2-40B4-BE49-F238E27FC236}">
-                <a16:creationId xmlns:a16="http://schemas.microsoft.com/office/drawing/2014/main" id="{D1F49E76-8E98-46C2-B5E3-F02F2B5F6433}"/>
+                <a16:creationId xmlns:a16="http://schemas.microsoft.com/office/drawing/2014/main" id="{EFBCBE05-DE39-4447-9C37-AEF65F8DEE1A}"/>
               </a:ext>
             </a:extLst>
           </p:cNvPr>
@@ -20960,7 +20960,7 @@
           <p:cNvPr id="8" name="Bij verruiming blijven de prijs en alle bestaande transacties ong">
             <a:extLst xmlns:a="http://schemas.openxmlformats.org/drawingml/2006/main">
               <a:ext uri="{FF2B5EF4-FFF2-40B4-BE49-F238E27FC236}">
-                <a16:creationId xmlns:a16="http://schemas.microsoft.com/office/drawing/2014/main" id="{0C1FD959-0FDD-4506-A33E-15132B367B23}"/>
+                <a16:creationId xmlns:a16="http://schemas.microsoft.com/office/drawing/2014/main" id="{1256B80A-992E-43D8-A684-557610D8E7BC}"/>
               </a:ext>
             </a:extLst>
           </p:cNvPr>
@@ -21015,7 +21015,7 @@
     </p:spTree>
     <p:extLst>
       <p:ext uri="{BB962C8B-B14F-4D97-AF65-F5344CB8AC3E}">
-        <p14:creationId xmlns:p14="http://schemas.microsoft.com/office/powerpoint/2010/main" val="478766692"/>
+        <p14:creationId xmlns:p14="http://schemas.microsoft.com/office/powerpoint/2010/main" val="503036400"/>
       </p:ext>
     </p:extLst>
   </p:cSld>
@@ -21046,7 +21046,7 @@
           <p:cNvPr id="7" name="Opgave 6: de basisgrafiek">
             <a:extLst xmlns:a="http://schemas.openxmlformats.org/drawingml/2006/main">
               <a:ext uri="{FF2B5EF4-FFF2-40B4-BE49-F238E27FC236}">
-                <a16:creationId xmlns:a16="http://schemas.microsoft.com/office/drawing/2014/main" id="{C67EB6E4-B0A0-409E-A790-652C76F87F43}"/>
+                <a16:creationId xmlns:a16="http://schemas.microsoft.com/office/drawing/2014/main" id="{E918C1F5-B3F2-432E-8CD7-D511B482DC96}"/>
               </a:ext>
             </a:extLst>
           </p:cNvPr>
@@ -21103,7 +21103,7 @@
           <p:cNvPr id="2" name="">
             <a:extLst xmlns:a="http://schemas.openxmlformats.org/drawingml/2006/main">
               <a:ext uri="{FF2B5EF4-FFF2-40B4-BE49-F238E27FC236}">
-                <a16:creationId xmlns:a16="http://schemas.microsoft.com/office/drawing/2014/main" id="{35FD4D3A-022C-42AB-9017-87A1C0528D6D}"/>
+                <a16:creationId xmlns:a16="http://schemas.microsoft.com/office/drawing/2014/main" id="{EE289CEE-5804-4FB7-8945-5696ED30BDE7}"/>
               </a:ext>
             </a:extLst>
           </p:cNvPr>
@@ -21132,7 +21132,7 @@
           <p:cNvPr id="3" name="§2.3.3 Pareto-efficiëntie en welvaartsverlies · Opgave 6 · Boekpa">
             <a:extLst xmlns:a="http://schemas.openxmlformats.org/drawingml/2006/main">
               <a:ext uri="{FF2B5EF4-FFF2-40B4-BE49-F238E27FC236}">
-                <a16:creationId xmlns:a16="http://schemas.microsoft.com/office/drawing/2014/main" id="{4B9A4A4F-5C41-4BF6-BC41-47FFAF20F4B8}"/>
+                <a16:creationId xmlns:a16="http://schemas.microsoft.com/office/drawing/2014/main" id="{29A87381-0AD3-4C65-A8F1-E08A8F9B0D20}"/>
               </a:ext>
             </a:extLst>
           </p:cNvPr>
@@ -21179,7 +21179,7 @@
                 <a:ea typeface="Arial"/>
                 <a:cs typeface="Arial"/>
               </a:rPr>
-              <a:t>§2.3.3 Pareto-efficiëntie en welvaartsverlies · Opgave 6 · Boekpagina 99–100</a:t>
+              <a:t>§2.3.3 Pareto-efficiëntie en welvaartsverlies · Opgave 6 · Boekpagina 100–101</a:t>
             </a:r>
           </a:p>
         </p:txBody>
@@ -21189,7 +21189,7 @@
           <p:cNvPr id="4" name="17">
             <a:extLst xmlns:a="http://schemas.openxmlformats.org/drawingml/2006/main">
               <a:ext uri="{FF2B5EF4-FFF2-40B4-BE49-F238E27FC236}">
-                <a16:creationId xmlns:a16="http://schemas.microsoft.com/office/drawing/2014/main" id="{FDF21D3C-B3C8-4643-82AF-216FD7641998}"/>
+                <a16:creationId xmlns:a16="http://schemas.microsoft.com/office/drawing/2014/main" id="{9F82600D-06FB-4E34-BDD8-A8369169493C}"/>
               </a:ext>
             </a:extLst>
           </p:cNvPr>
@@ -21246,7 +21246,7 @@
           <p:cNvPr id="5" name="V: P = 50 − 0,5Q     A = MK: P = 5 + 0,25Q">
             <a:extLst xmlns:a="http://schemas.openxmlformats.org/drawingml/2006/main">
               <a:ext uri="{FF2B5EF4-FFF2-40B4-BE49-F238E27FC236}">
-                <a16:creationId xmlns:a16="http://schemas.microsoft.com/office/drawing/2014/main" id="{11488F7A-3D66-44EF-9076-99466E6C56B3}"/>
+                <a16:creationId xmlns:a16="http://schemas.microsoft.com/office/drawing/2014/main" id="{17ED981B-0291-4D5A-85F9-B0BF1EC88846}"/>
               </a:ext>
             </a:extLst>
           </p:cNvPr>
@@ -21310,14 +21310,14 @@
         </p:xfrm>
         <a:graphic xmlns:a="http://schemas.openxmlformats.org/drawingml/2006/main">
           <a:graphicData uri="http://schemas.openxmlformats.org/drawingml/2006/chart">
-            <c:chart xmlns:r="http://schemas.openxmlformats.org/officeDocument/2006/relationships" xmlns:c="http://schemas.openxmlformats.org/drawingml/2006/chart" r:id="R4e4fe0f084f944db"/>
+            <c:chart xmlns:r="http://schemas.openxmlformats.org/officeDocument/2006/relationships" xmlns:c="http://schemas.openxmlformats.org/drawingml/2006/chart" r:id="Rcb53554ece774404"/>
           </a:graphicData>
         </a:graphic>
       </p:graphicFrame>
     </p:spTree>
     <p:extLst>
       <p:ext uri="{BB962C8B-B14F-4D97-AF65-F5344CB8AC3E}">
-        <p14:creationId xmlns:p14="http://schemas.microsoft.com/office/powerpoint/2010/main" val="19485778"/>
+        <p14:creationId xmlns:p14="http://schemas.microsoft.com/office/powerpoint/2010/main" val="702166519"/>
       </p:ext>
     </p:extLst>
   </p:cSld>
@@ -21348,7 +21348,7 @@
           <p:cNvPr id="10" name="Opgave 6: vragen a en b">
             <a:extLst xmlns:a="http://schemas.openxmlformats.org/drawingml/2006/main">
               <a:ext uri="{FF2B5EF4-FFF2-40B4-BE49-F238E27FC236}">
-                <a16:creationId xmlns:a16="http://schemas.microsoft.com/office/drawing/2014/main" id="{3C399342-77C9-4162-940F-3C9BA15DE63B}"/>
+                <a16:creationId xmlns:a16="http://schemas.microsoft.com/office/drawing/2014/main" id="{DFDEB924-781D-4F3B-8147-C61C698F50A5}"/>
               </a:ext>
             </a:extLst>
           </p:cNvPr>
@@ -21405,7 +21405,7 @@
           <p:cNvPr id="2" name="">
             <a:extLst xmlns:a="http://schemas.openxmlformats.org/drawingml/2006/main">
               <a:ext uri="{FF2B5EF4-FFF2-40B4-BE49-F238E27FC236}">
-                <a16:creationId xmlns:a16="http://schemas.microsoft.com/office/drawing/2014/main" id="{E6624EB8-51A6-48D3-9993-BCC30E446B65}"/>
+                <a16:creationId xmlns:a16="http://schemas.microsoft.com/office/drawing/2014/main" id="{8273A30C-1D0D-43EA-A427-846E21002A55}"/>
               </a:ext>
             </a:extLst>
           </p:cNvPr>
@@ -21434,7 +21434,7 @@
           <p:cNvPr id="3" name="§2.3.3 Pareto-efficiëntie en welvaartsverlies · Opgave 6 · Boekpa">
             <a:extLst xmlns:a="http://schemas.openxmlformats.org/drawingml/2006/main">
               <a:ext uri="{FF2B5EF4-FFF2-40B4-BE49-F238E27FC236}">
-                <a16:creationId xmlns:a16="http://schemas.microsoft.com/office/drawing/2014/main" id="{91BF027D-2C6D-4F8F-A721-44413BC532FE}"/>
+                <a16:creationId xmlns:a16="http://schemas.microsoft.com/office/drawing/2014/main" id="{0D3C3A07-67FF-4F74-B88A-439D45326952}"/>
               </a:ext>
             </a:extLst>
           </p:cNvPr>
@@ -21481,7 +21481,7 @@
                 <a:ea typeface="Arial"/>
                 <a:cs typeface="Arial"/>
               </a:rPr>
-              <a:t>§2.3.3 Pareto-efficiëntie en welvaartsverlies · Opgave 6 · Boekpagina 99–100</a:t>
+              <a:t>§2.3.3 Pareto-efficiëntie en welvaartsverlies · Opgave 6 · Boekpagina 100–101</a:t>
             </a:r>
           </a:p>
         </p:txBody>
@@ -21491,7 +21491,7 @@
           <p:cNvPr id="4" name="18">
             <a:extLst xmlns:a="http://schemas.openxmlformats.org/drawingml/2006/main">
               <a:ext uri="{FF2B5EF4-FFF2-40B4-BE49-F238E27FC236}">
-                <a16:creationId xmlns:a16="http://schemas.microsoft.com/office/drawing/2014/main" id="{FE15D30D-21B0-46BC-B51E-C8EA0A619FF8}"/>
+                <a16:creationId xmlns:a16="http://schemas.microsoft.com/office/drawing/2014/main" id="{22E651DF-7E40-4333-A27D-41C700C9241B}"/>
               </a:ext>
             </a:extLst>
           </p:cNvPr>
@@ -21548,7 +21548,7 @@
           <p:cNvPr id="5" name="a)">
             <a:extLst xmlns:a="http://schemas.openxmlformats.org/drawingml/2006/main">
               <a:ext uri="{FF2B5EF4-FFF2-40B4-BE49-F238E27FC236}">
-                <a16:creationId xmlns:a16="http://schemas.microsoft.com/office/drawing/2014/main" id="{5341DF91-FB21-4F6B-A795-80551FAD9CA8}"/>
+                <a16:creationId xmlns:a16="http://schemas.microsoft.com/office/drawing/2014/main" id="{53969E76-C5A8-4854-A454-420D73203D50}"/>
               </a:ext>
             </a:extLst>
           </p:cNvPr>
@@ -21605,7 +21605,7 @@
           <p:cNvPr id="6" name="Omschrijf Pareto-efficiëntie binnen dit marktmodel: wanneer kan g">
             <a:extLst xmlns:a="http://schemas.openxmlformats.org/drawingml/2006/main">
               <a:ext uri="{FF2B5EF4-FFF2-40B4-BE49-F238E27FC236}">
-                <a16:creationId xmlns:a16="http://schemas.microsoft.com/office/drawing/2014/main" id="{05E0437F-3FDC-4DE4-88A1-B2450B16CEC8}"/>
+                <a16:creationId xmlns:a16="http://schemas.microsoft.com/office/drawing/2014/main" id="{120FA19F-8903-4AD9-9A3A-CABB6061C4D9}"/>
               </a:ext>
             </a:extLst>
           </p:cNvPr>
@@ -21662,7 +21662,7 @@
           <p:cNvPr id="7" name="">
             <a:extLst xmlns:a="http://schemas.openxmlformats.org/drawingml/2006/main">
               <a:ext uri="{FF2B5EF4-FFF2-40B4-BE49-F238E27FC236}">
-                <a16:creationId xmlns:a16="http://schemas.microsoft.com/office/drawing/2014/main" id="{3587D48D-46B8-4A74-A134-AA74C873A231}"/>
+                <a16:creationId xmlns:a16="http://schemas.microsoft.com/office/drawing/2014/main" id="{BEAC3479-E3BE-4559-9149-D0BC518A6E8B}"/>
               </a:ext>
             </a:extLst>
           </p:cNvPr>
@@ -21691,7 +21691,7 @@
           <p:cNvPr id="8" name="b)">
             <a:extLst xmlns:a="http://schemas.openxmlformats.org/drawingml/2006/main">
               <a:ext uri="{FF2B5EF4-FFF2-40B4-BE49-F238E27FC236}">
-                <a16:creationId xmlns:a16="http://schemas.microsoft.com/office/drawing/2014/main" id="{E4E82BDD-13DA-4884-B10C-B788F5E7B211}"/>
+                <a16:creationId xmlns:a16="http://schemas.microsoft.com/office/drawing/2014/main" id="{D0A92E6D-F449-4B20-B3E5-28E9A486B81B}"/>
               </a:ext>
             </a:extLst>
           </p:cNvPr>
@@ -21745,10 +21745,10 @@
       </p:sp>
       <p:sp>
         <p:nvSpPr>
-          <p:cNvPr id="9" name="Bereken bij P = € 25 de gevraagde hoeveelheid (Qd) en aangeboden ">
+          <p:cNvPr id="9" name="Bereken bij P = € 25 de gevraagde hoeveelheid (Qv) en aangeboden ">
             <a:extLst xmlns:a="http://schemas.openxmlformats.org/drawingml/2006/main">
               <a:ext uri="{FF2B5EF4-FFF2-40B4-BE49-F238E27FC236}">
-                <a16:creationId xmlns:a16="http://schemas.microsoft.com/office/drawing/2014/main" id="{A6DF2DAD-4494-4576-BCF1-118FF984A537}"/>
+                <a16:creationId xmlns:a16="http://schemas.microsoft.com/office/drawing/2014/main" id="{2320B0C1-DE75-416C-9048-486F0894D0C9}"/>
               </a:ext>
             </a:extLst>
           </p:cNvPr>
@@ -21795,7 +21795,7 @@
                 <a:ea typeface="Arial"/>
                 <a:cs typeface="Arial"/>
               </a:rPr>
-              <a:t>Bereken bij P = € 25 de gevraagde hoeveelheid (Qd) en aangeboden hoeveelheid (Qs). Leg met de reserveringsregel uit waarom het werkelijke aantal transacties 40 is en welke vragers en aanbieders handelen.</a:t>
+              <a:t>Bereken bij P = € 25 de gevraagde hoeveelheid (Qv) en aangeboden hoeveelheid (Qa). Leg met de reserveringsregel uit waarom het werkelijke aantal transacties 40 is en welke vragers en aanbieders handelen.</a:t>
             </a:r>
           </a:p>
         </p:txBody>
@@ -21803,7 +21803,7 @@
     </p:spTree>
     <p:extLst>
       <p:ext uri="{BB962C8B-B14F-4D97-AF65-F5344CB8AC3E}">
-        <p14:creationId xmlns:p14="http://schemas.microsoft.com/office/powerpoint/2010/main" val="1068676675"/>
+        <p14:creationId xmlns:p14="http://schemas.microsoft.com/office/powerpoint/2010/main" val="1997107589"/>
       </p:ext>
     </p:extLst>
   </p:cSld>
@@ -21834,7 +21834,7 @@
           <p:cNvPr id="10" name="Opgave 6: vragen c en d">
             <a:extLst xmlns:a="http://schemas.openxmlformats.org/drawingml/2006/main">
               <a:ext uri="{FF2B5EF4-FFF2-40B4-BE49-F238E27FC236}">
-                <a16:creationId xmlns:a16="http://schemas.microsoft.com/office/drawing/2014/main" id="{E70AB987-3DCC-4960-BEEC-ADC99D570F74}"/>
+                <a16:creationId xmlns:a16="http://schemas.microsoft.com/office/drawing/2014/main" id="{A470B791-36B8-4330-8D05-E5B0F75C31A1}"/>
               </a:ext>
             </a:extLst>
           </p:cNvPr>
@@ -21891,7 +21891,7 @@
           <p:cNvPr id="2" name="">
             <a:extLst xmlns:a="http://schemas.openxmlformats.org/drawingml/2006/main">
               <a:ext uri="{FF2B5EF4-FFF2-40B4-BE49-F238E27FC236}">
-                <a16:creationId xmlns:a16="http://schemas.microsoft.com/office/drawing/2014/main" id="{A9EE6400-5D83-42AA-BA33-A8EBF4A2FDEA}"/>
+                <a16:creationId xmlns:a16="http://schemas.microsoft.com/office/drawing/2014/main" id="{7DC7B73C-768A-4C6B-84CE-8C75743106BA}"/>
               </a:ext>
             </a:extLst>
           </p:cNvPr>
@@ -21920,7 +21920,7 @@
           <p:cNvPr id="3" name="§2.3.3 Pareto-efficiëntie en welvaartsverlies · Opgave 6 · Boekpa">
             <a:extLst xmlns:a="http://schemas.openxmlformats.org/drawingml/2006/main">
               <a:ext uri="{FF2B5EF4-FFF2-40B4-BE49-F238E27FC236}">
-                <a16:creationId xmlns:a16="http://schemas.microsoft.com/office/drawing/2014/main" id="{10BAFC84-F235-4A7B-A658-49D798B9F8CC}"/>
+                <a16:creationId xmlns:a16="http://schemas.microsoft.com/office/drawing/2014/main" id="{E9265053-0993-4282-87B2-2BC4A1B4101C}"/>
               </a:ext>
             </a:extLst>
           </p:cNvPr>
@@ -21967,7 +21967,7 @@
                 <a:ea typeface="Arial"/>
                 <a:cs typeface="Arial"/>
               </a:rPr>
-              <a:t>§2.3.3 Pareto-efficiëntie en welvaartsverlies · Opgave 6 · Boekpagina 99–100</a:t>
+              <a:t>§2.3.3 Pareto-efficiëntie en welvaartsverlies · Opgave 6 · Boekpagina 100–101</a:t>
             </a:r>
           </a:p>
         </p:txBody>
@@ -21977,7 +21977,7 @@
           <p:cNvPr id="4" name="19">
             <a:extLst xmlns:a="http://schemas.openxmlformats.org/drawingml/2006/main">
               <a:ext uri="{FF2B5EF4-FFF2-40B4-BE49-F238E27FC236}">
-                <a16:creationId xmlns:a16="http://schemas.microsoft.com/office/drawing/2014/main" id="{A8D9EEED-1E1A-4829-9B9E-3B05F1A062AA}"/>
+                <a16:creationId xmlns:a16="http://schemas.microsoft.com/office/drawing/2014/main" id="{2532C591-1004-404E-A635-A64C4C216257}"/>
               </a:ext>
             </a:extLst>
           </p:cNvPr>
@@ -22034,7 +22034,7 @@
           <p:cNvPr id="5" name="c)">
             <a:extLst xmlns:a="http://schemas.openxmlformats.org/drawingml/2006/main">
               <a:ext uri="{FF2B5EF4-FFF2-40B4-BE49-F238E27FC236}">
-                <a16:creationId xmlns:a16="http://schemas.microsoft.com/office/drawing/2014/main" id="{3548D97A-DE18-4E43-9498-F6BBACCD26AB}"/>
+                <a16:creationId xmlns:a16="http://schemas.microsoft.com/office/drawing/2014/main" id="{B6C3B026-A741-4064-8714-2B2080A885D1}"/>
               </a:ext>
             </a:extLst>
           </p:cNvPr>
@@ -22091,7 +22091,7 @@
           <p:cNvPr id="6" name="Bereken bij 40 transacties en P = € 25 het CS en PS. Splits elk o">
             <a:extLst xmlns:a="http://schemas.openxmlformats.org/drawingml/2006/main">
               <a:ext uri="{FF2B5EF4-FFF2-40B4-BE49-F238E27FC236}">
-                <a16:creationId xmlns:a16="http://schemas.microsoft.com/office/drawing/2014/main" id="{E333C93A-F308-479C-BCAA-A94D2F68E84D}"/>
+                <a16:creationId xmlns:a16="http://schemas.microsoft.com/office/drawing/2014/main" id="{49123AD1-483C-462A-88BF-8D3A1294518D}"/>
               </a:ext>
             </a:extLst>
           </p:cNvPr>
@@ -22148,7 +22148,7 @@
           <p:cNvPr id="7" name="">
             <a:extLst xmlns:a="http://schemas.openxmlformats.org/drawingml/2006/main">
               <a:ext uri="{FF2B5EF4-FFF2-40B4-BE49-F238E27FC236}">
-                <a16:creationId xmlns:a16="http://schemas.microsoft.com/office/drawing/2014/main" id="{312A9922-C52D-4CA9-8436-07441C44F20E}"/>
+                <a16:creationId xmlns:a16="http://schemas.microsoft.com/office/drawing/2014/main" id="{D7FD9FBB-EC54-4CFF-BE27-731F6E275586}"/>
               </a:ext>
             </a:extLst>
           </p:cNvPr>
@@ -22177,7 +22177,7 @@
           <p:cNvPr id="8" name="d)">
             <a:extLst xmlns:a="http://schemas.openxmlformats.org/drawingml/2006/main">
               <a:ext uri="{FF2B5EF4-FFF2-40B4-BE49-F238E27FC236}">
-                <a16:creationId xmlns:a16="http://schemas.microsoft.com/office/drawing/2014/main" id="{2DA50A91-C471-4C6F-9D4D-5AEF16EE1833}"/>
+                <a16:creationId xmlns:a16="http://schemas.microsoft.com/office/drawing/2014/main" id="{7B736877-C863-4D5E-85F4-65E62F2D8D46}"/>
               </a:ext>
             </a:extLst>
           </p:cNvPr>
@@ -22234,7 +22234,7 @@
           <p:cNvPr id="9" name="Bereken TS en het welvaartsverlies ten opzichte van het vrije eve">
             <a:extLst xmlns:a="http://schemas.openxmlformats.org/drawingml/2006/main">
               <a:ext uri="{FF2B5EF4-FFF2-40B4-BE49-F238E27FC236}">
-                <a16:creationId xmlns:a16="http://schemas.microsoft.com/office/drawing/2014/main" id="{725C15C0-DA4C-4EF8-98F2-7F8EC5B8A2E7}"/>
+                <a16:creationId xmlns:a16="http://schemas.microsoft.com/office/drawing/2014/main" id="{4D52AB77-1581-4829-A93A-F1B61798E6AB}"/>
               </a:ext>
             </a:extLst>
           </p:cNvPr>
@@ -22289,7 +22289,7 @@
     </p:spTree>
     <p:extLst>
       <p:ext uri="{BB962C8B-B14F-4D97-AF65-F5344CB8AC3E}">
-        <p14:creationId xmlns:p14="http://schemas.microsoft.com/office/powerpoint/2010/main" val="1879687580"/>
+        <p14:creationId xmlns:p14="http://schemas.microsoft.com/office/powerpoint/2010/main" val="272223645"/>
       </p:ext>
     </p:extLst>
   </p:cSld>
@@ -22320,7 +22320,7 @@
           <p:cNvPr id="9" name="Lesdoelen en voorkennis">
             <a:extLst xmlns:a="http://schemas.openxmlformats.org/drawingml/2006/main">
               <a:ext uri="{FF2B5EF4-FFF2-40B4-BE49-F238E27FC236}">
-                <a16:creationId xmlns:a16="http://schemas.microsoft.com/office/drawing/2014/main" id="{E84D4955-68DB-490D-A9F6-C6A1B4DDB7AE}"/>
+                <a16:creationId xmlns:a16="http://schemas.microsoft.com/office/drawing/2014/main" id="{2EC55685-E826-405F-936B-4C9294F58166}"/>
               </a:ext>
             </a:extLst>
           </p:cNvPr>
@@ -22377,7 +22377,7 @@
           <p:cNvPr id="2" name="">
             <a:extLst xmlns:a="http://schemas.openxmlformats.org/drawingml/2006/main">
               <a:ext uri="{FF2B5EF4-FFF2-40B4-BE49-F238E27FC236}">
-                <a16:creationId xmlns:a16="http://schemas.microsoft.com/office/drawing/2014/main" id="{021740D2-49AA-46F0-A51A-15081737877F}"/>
+                <a16:creationId xmlns:a16="http://schemas.microsoft.com/office/drawing/2014/main" id="{D192A160-D240-4E3B-B31A-DB03AC4EEB9C}"/>
               </a:ext>
             </a:extLst>
           </p:cNvPr>
@@ -22406,7 +22406,7 @@
           <p:cNvPr id="3" name="§2.3.3 Pareto-efficiëntie en welvaartsverlies">
             <a:extLst xmlns:a="http://schemas.openxmlformats.org/drawingml/2006/main">
               <a:ext uri="{FF2B5EF4-FFF2-40B4-BE49-F238E27FC236}">
-                <a16:creationId xmlns:a16="http://schemas.microsoft.com/office/drawing/2014/main" id="{C855A60A-F102-4F4A-9ABC-BE4821E1B8EC}"/>
+                <a16:creationId xmlns:a16="http://schemas.microsoft.com/office/drawing/2014/main" id="{4111677F-6E69-4B77-8030-3F324FCA7B80}"/>
               </a:ext>
             </a:extLst>
           </p:cNvPr>
@@ -22463,7 +22463,7 @@
           <p:cNvPr id="4" name="2">
             <a:extLst xmlns:a="http://schemas.openxmlformats.org/drawingml/2006/main">
               <a:ext uri="{FF2B5EF4-FFF2-40B4-BE49-F238E27FC236}">
-                <a16:creationId xmlns:a16="http://schemas.microsoft.com/office/drawing/2014/main" id="{19065BC1-D335-4754-ADE3-E020F109E48C}"/>
+                <a16:creationId xmlns:a16="http://schemas.microsoft.com/office/drawing/2014/main" id="{A4B13D75-7980-47BF-8AD5-E4C7D03FC070}"/>
               </a:ext>
             </a:extLst>
           </p:cNvPr>
@@ -22742,7 +22742,7 @@
           <p:cNvPr id="6" name="CS: boven de prijs en onder de vraaglijn.">
             <a:extLst xmlns:a="http://schemas.openxmlformats.org/drawingml/2006/main">
               <a:ext uri="{FF2B5EF4-FFF2-40B4-BE49-F238E27FC236}">
-                <a16:creationId xmlns:a16="http://schemas.microsoft.com/office/drawing/2014/main" id="{D36517E1-047F-4E15-A8CD-F859E82619CE}"/>
+                <a16:creationId xmlns:a16="http://schemas.microsoft.com/office/drawing/2014/main" id="{81698AB5-5DB2-49F5-A7DC-C2765F8EFD45}"/>
               </a:ext>
             </a:extLst>
           </p:cNvPr>
@@ -22799,7 +22799,7 @@
           <p:cNvPr id="7" name="PS: onder de prijs en boven de MK-lijn. TS = CS + PS.">
             <a:extLst xmlns:a="http://schemas.openxmlformats.org/drawingml/2006/main">
               <a:ext uri="{FF2B5EF4-FFF2-40B4-BE49-F238E27FC236}">
-                <a16:creationId xmlns:a16="http://schemas.microsoft.com/office/drawing/2014/main" id="{29412A6F-3A35-473B-B441-380132A1439D}"/>
+                <a16:creationId xmlns:a16="http://schemas.microsoft.com/office/drawing/2014/main" id="{B5EE98A0-4A8D-4EF9-BA2C-F4B7AA4CEE08}"/>
               </a:ext>
             </a:extLst>
           </p:cNvPr>
@@ -22856,7 +22856,7 @@
           <p:cNvPr id="8" name="Eenheid: producten × euro per product = euro.">
             <a:extLst xmlns:a="http://schemas.openxmlformats.org/drawingml/2006/main">
               <a:ext uri="{FF2B5EF4-FFF2-40B4-BE49-F238E27FC236}">
-                <a16:creationId xmlns:a16="http://schemas.microsoft.com/office/drawing/2014/main" id="{10EC98AD-AACC-4319-8EC9-3604FE6DB0C4}"/>
+                <a16:creationId xmlns:a16="http://schemas.microsoft.com/office/drawing/2014/main" id="{0C97B03E-0595-4AFF-A60A-26A452850BBC}"/>
               </a:ext>
             </a:extLst>
           </p:cNvPr>
@@ -22911,7 +22911,7 @@
     </p:spTree>
     <p:extLst>
       <p:ext uri="{BB962C8B-B14F-4D97-AF65-F5344CB8AC3E}">
-        <p14:creationId xmlns:p14="http://schemas.microsoft.com/office/powerpoint/2010/main" val="692409475"/>
+        <p14:creationId xmlns:p14="http://schemas.microsoft.com/office/powerpoint/2010/main" val="616258577"/>
       </p:ext>
     </p:extLst>
   </p:cSld>
@@ -22942,7 +22942,7 @@
           <p:cNvPr id="10" name="Opgave 6: vragen e en f">
             <a:extLst xmlns:a="http://schemas.openxmlformats.org/drawingml/2006/main">
               <a:ext uri="{FF2B5EF4-FFF2-40B4-BE49-F238E27FC236}">
-                <a16:creationId xmlns:a16="http://schemas.microsoft.com/office/drawing/2014/main" id="{BCBC0A15-5D87-4CD4-9388-0F8FD0290D5A}"/>
+                <a16:creationId xmlns:a16="http://schemas.microsoft.com/office/drawing/2014/main" id="{9BCC509D-34D0-4AE8-96BC-DFF892821501}"/>
               </a:ext>
             </a:extLst>
           </p:cNvPr>
@@ -22999,7 +22999,7 @@
           <p:cNvPr id="2" name="">
             <a:extLst xmlns:a="http://schemas.openxmlformats.org/drawingml/2006/main">
               <a:ext uri="{FF2B5EF4-FFF2-40B4-BE49-F238E27FC236}">
-                <a16:creationId xmlns:a16="http://schemas.microsoft.com/office/drawing/2014/main" id="{201C08C1-3FD2-4607-B74A-C670F9F52A02}"/>
+                <a16:creationId xmlns:a16="http://schemas.microsoft.com/office/drawing/2014/main" id="{10EB984B-00B6-472F-8E49-72B04CADBD74}"/>
               </a:ext>
             </a:extLst>
           </p:cNvPr>
@@ -23028,7 +23028,7 @@
           <p:cNvPr id="3" name="§2.3.3 Pareto-efficiëntie en welvaartsverlies · Opgave 6 · Boekpa">
             <a:extLst xmlns:a="http://schemas.openxmlformats.org/drawingml/2006/main">
               <a:ext uri="{FF2B5EF4-FFF2-40B4-BE49-F238E27FC236}">
-                <a16:creationId xmlns:a16="http://schemas.microsoft.com/office/drawing/2014/main" id="{528B37B2-E8DF-4879-B4BD-D8C6327D3AC7}"/>
+                <a16:creationId xmlns:a16="http://schemas.microsoft.com/office/drawing/2014/main" id="{248FB7B3-46E3-4AD9-AA04-6466782DFF43}"/>
               </a:ext>
             </a:extLst>
           </p:cNvPr>
@@ -23075,7 +23075,7 @@
                 <a:ea typeface="Arial"/>
                 <a:cs typeface="Arial"/>
               </a:rPr>
-              <a:t>§2.3.3 Pareto-efficiëntie en welvaartsverlies · Opgave 6 · Boekpagina 99–100</a:t>
+              <a:t>§2.3.3 Pareto-efficiëntie en welvaartsverlies · Opgave 6 · Boekpagina 100–101</a:t>
             </a:r>
           </a:p>
         </p:txBody>
@@ -23085,7 +23085,7 @@
           <p:cNvPr id="4" name="20">
             <a:extLst xmlns:a="http://schemas.openxmlformats.org/drawingml/2006/main">
               <a:ext uri="{FF2B5EF4-FFF2-40B4-BE49-F238E27FC236}">
-                <a16:creationId xmlns:a16="http://schemas.microsoft.com/office/drawing/2014/main" id="{A79BEC69-B747-407A-A0EE-B0EEDC2E87CF}"/>
+                <a16:creationId xmlns:a16="http://schemas.microsoft.com/office/drawing/2014/main" id="{AA73C87A-0BB6-4F6E-BB1F-E1AED50946A8}"/>
               </a:ext>
             </a:extLst>
           </p:cNvPr>
@@ -23142,7 +23142,7 @@
           <p:cNvPr id="5" name="e)">
             <a:extLst xmlns:a="http://schemas.openxmlformats.org/drawingml/2006/main">
               <a:ext uri="{FF2B5EF4-FFF2-40B4-BE49-F238E27FC236}">
-                <a16:creationId xmlns:a16="http://schemas.microsoft.com/office/drawing/2014/main" id="{7A1D3440-F977-44AC-94E2-E6B858D3F308}"/>
+                <a16:creationId xmlns:a16="http://schemas.microsoft.com/office/drawing/2014/main" id="{7A5AF169-57F3-4E82-8BA5-D914B8E84559}"/>
               </a:ext>
             </a:extLst>
           </p:cNvPr>
@@ -23199,7 +23199,7 @@
           <p:cNvPr id="6" name="Pas je definitie uit vraag a toe op de 41e transactie. Leg met be">
             <a:extLst xmlns:a="http://schemas.openxmlformats.org/drawingml/2006/main">
               <a:ext uri="{FF2B5EF4-FFF2-40B4-BE49-F238E27FC236}">
-                <a16:creationId xmlns:a16="http://schemas.microsoft.com/office/drawing/2014/main" id="{4CA20FE5-AFE3-4C67-8FD2-BCFA59C011A6}"/>
+                <a16:creationId xmlns:a16="http://schemas.microsoft.com/office/drawing/2014/main" id="{B780E7C2-6B58-4C74-8A7D-AD4BD66193F1}"/>
               </a:ext>
             </a:extLst>
           </p:cNvPr>
@@ -23256,7 +23256,7 @@
           <p:cNvPr id="7" name="">
             <a:extLst xmlns:a="http://schemas.openxmlformats.org/drawingml/2006/main">
               <a:ext uri="{FF2B5EF4-FFF2-40B4-BE49-F238E27FC236}">
-                <a16:creationId xmlns:a16="http://schemas.microsoft.com/office/drawing/2014/main" id="{99946AB9-D4AF-441D-837A-7CC39997FF30}"/>
+                <a16:creationId xmlns:a16="http://schemas.microsoft.com/office/drawing/2014/main" id="{F4FDAC8C-7161-446D-9F42-6C60159D9584}"/>
               </a:ext>
             </a:extLst>
           </p:cNvPr>
@@ -23285,7 +23285,7 @@
           <p:cNvPr id="8" name="f)">
             <a:extLst xmlns:a="http://schemas.openxmlformats.org/drawingml/2006/main">
               <a:ext uri="{FF2B5EF4-FFF2-40B4-BE49-F238E27FC236}">
-                <a16:creationId xmlns:a16="http://schemas.microsoft.com/office/drawing/2014/main" id="{B8A6045F-9743-4604-ACE7-F4038127EEF2}"/>
+                <a16:creationId xmlns:a16="http://schemas.microsoft.com/office/drawing/2014/main" id="{DC5B6FA7-C5B9-4B6F-B4FC-AC6AD42F1ECF}"/>
               </a:ext>
             </a:extLst>
           </p:cNvPr>
@@ -23342,7 +23342,7 @@
           <p:cNvPr id="9" name="Leg uit waarom een hoger TS of Pareto-efficiëntie niet automatisc">
             <a:extLst xmlns:a="http://schemas.openxmlformats.org/drawingml/2006/main">
               <a:ext uri="{FF2B5EF4-FFF2-40B4-BE49-F238E27FC236}">
-                <a16:creationId xmlns:a16="http://schemas.microsoft.com/office/drawing/2014/main" id="{FEBB4CAF-18FE-46A5-BB02-F6469C317111}"/>
+                <a16:creationId xmlns:a16="http://schemas.microsoft.com/office/drawing/2014/main" id="{AB9E72D5-72CB-4ECA-B5DE-81DE0A3327DB}"/>
               </a:ext>
             </a:extLst>
           </p:cNvPr>
@@ -23397,7 +23397,7 @@
     </p:spTree>
     <p:extLst>
       <p:ext uri="{BB962C8B-B14F-4D97-AF65-F5344CB8AC3E}">
-        <p14:creationId xmlns:p14="http://schemas.microsoft.com/office/powerpoint/2010/main" val="2056804457"/>
+        <p14:creationId xmlns:p14="http://schemas.microsoft.com/office/powerpoint/2010/main" val="85145284"/>
       </p:ext>
     </p:extLst>
   </p:cSld>
@@ -23428,7 +23428,7 @@
           <p:cNvPr id="8" name="Opgave 6a: Pareto-efficiëntie">
             <a:extLst xmlns:a="http://schemas.openxmlformats.org/drawingml/2006/main">
               <a:ext uri="{FF2B5EF4-FFF2-40B4-BE49-F238E27FC236}">
-                <a16:creationId xmlns:a16="http://schemas.microsoft.com/office/drawing/2014/main" id="{42D3EE30-2D0A-433D-8BFB-19A7D4E0D3EC}"/>
+                <a16:creationId xmlns:a16="http://schemas.microsoft.com/office/drawing/2014/main" id="{0921BA2D-BDD9-4177-B3BE-D4AA57EF7B82}"/>
               </a:ext>
             </a:extLst>
           </p:cNvPr>
@@ -23485,7 +23485,7 @@
           <p:cNvPr id="2" name="">
             <a:extLst xmlns:a="http://schemas.openxmlformats.org/drawingml/2006/main">
               <a:ext uri="{FF2B5EF4-FFF2-40B4-BE49-F238E27FC236}">
-                <a16:creationId xmlns:a16="http://schemas.microsoft.com/office/drawing/2014/main" id="{6513EE9E-80EC-410B-ADFF-078C30AFEE5D}"/>
+                <a16:creationId xmlns:a16="http://schemas.microsoft.com/office/drawing/2014/main" id="{39E37F2B-A1EA-4FEC-B006-CD3959B176E2}"/>
               </a:ext>
             </a:extLst>
           </p:cNvPr>
@@ -23514,7 +23514,7 @@
           <p:cNvPr id="3" name="§2.3.3 Pareto-efficiëntie en welvaartsverlies · Opgave 6 · Boekpa">
             <a:extLst xmlns:a="http://schemas.openxmlformats.org/drawingml/2006/main">
               <a:ext uri="{FF2B5EF4-FFF2-40B4-BE49-F238E27FC236}">
-                <a16:creationId xmlns:a16="http://schemas.microsoft.com/office/drawing/2014/main" id="{82A04F2F-9F61-4AA3-9B14-D10E4F998007}"/>
+                <a16:creationId xmlns:a16="http://schemas.microsoft.com/office/drawing/2014/main" id="{3A76F86D-BD93-469E-B206-E08CB8C192E9}"/>
               </a:ext>
             </a:extLst>
           </p:cNvPr>
@@ -23561,7 +23561,7 @@
                 <a:ea typeface="Arial"/>
                 <a:cs typeface="Arial"/>
               </a:rPr>
-              <a:t>§2.3.3 Pareto-efficiëntie en welvaartsverlies · Opgave 6 · Boekpagina 99–100</a:t>
+              <a:t>§2.3.3 Pareto-efficiëntie en welvaartsverlies · Opgave 6 · Boekpagina 100–101</a:t>
             </a:r>
           </a:p>
         </p:txBody>
@@ -23571,7 +23571,7 @@
           <p:cNvPr id="4" name="21">
             <a:extLst xmlns:a="http://schemas.openxmlformats.org/drawingml/2006/main">
               <a:ext uri="{FF2B5EF4-FFF2-40B4-BE49-F238E27FC236}">
-                <a16:creationId xmlns:a16="http://schemas.microsoft.com/office/drawing/2014/main" id="{9F220EE5-2A21-4BCB-BEA1-78F1481F4D91}"/>
+                <a16:creationId xmlns:a16="http://schemas.microsoft.com/office/drawing/2014/main" id="{B750779E-094E-4682-92AC-3F938B6E250B}"/>
               </a:ext>
             </a:extLst>
           </p:cNvPr>
@@ -23628,7 +23628,7 @@
           <p:cNvPr id="5" name="Er is geen haalbare extra transactie of herverdeling&#10;die iemand b">
             <a:extLst xmlns:a="http://schemas.openxmlformats.org/drawingml/2006/main">
               <a:ext uri="{FF2B5EF4-FFF2-40B4-BE49-F238E27FC236}">
-                <a16:creationId xmlns:a16="http://schemas.microsoft.com/office/drawing/2014/main" id="{8C779251-EE70-411B-8CF4-5E3EAD218D03}"/>
+                <a16:creationId xmlns:a16="http://schemas.microsoft.com/office/drawing/2014/main" id="{D3F7298C-BB74-41A6-A9AE-4809175E876F}"/>
               </a:ext>
             </a:extLst>
           </p:cNvPr>
@@ -23731,7 +23731,7 @@
           <p:cNvPr id="6" name="Dit geldt binnen de gegeven modelaannames.">
             <a:extLst xmlns:a="http://schemas.openxmlformats.org/drawingml/2006/main">
               <a:ext uri="{FF2B5EF4-FFF2-40B4-BE49-F238E27FC236}">
-                <a16:creationId xmlns:a16="http://schemas.microsoft.com/office/drawing/2014/main" id="{9F6A0FDB-4BE8-422F-B3AD-A9085F63513A}"/>
+                <a16:creationId xmlns:a16="http://schemas.microsoft.com/office/drawing/2014/main" id="{C5F116DD-7CEC-4722-8AF4-866A99766808}"/>
               </a:ext>
             </a:extLst>
           </p:cNvPr>
@@ -23788,7 +23788,7 @@
           <p:cNvPr id="7" name="Voor het tegendeel volstaat één concrete, haalbare Paretoverbeter">
             <a:extLst xmlns:a="http://schemas.openxmlformats.org/drawingml/2006/main">
               <a:ext uri="{FF2B5EF4-FFF2-40B4-BE49-F238E27FC236}">
-                <a16:creationId xmlns:a16="http://schemas.microsoft.com/office/drawing/2014/main" id="{EB0E9A48-A9EF-4490-804E-8B5B2326B62F}"/>
+                <a16:creationId xmlns:a16="http://schemas.microsoft.com/office/drawing/2014/main" id="{8F42F1CD-112F-4FDB-9E31-A07216BF8367}"/>
               </a:ext>
             </a:extLst>
           </p:cNvPr>
@@ -23843,7 +23843,7 @@
     </p:spTree>
     <p:extLst>
       <p:ext uri="{BB962C8B-B14F-4D97-AF65-F5344CB8AC3E}">
-        <p14:creationId xmlns:p14="http://schemas.microsoft.com/office/powerpoint/2010/main" val="539937621"/>
+        <p14:creationId xmlns:p14="http://schemas.microsoft.com/office/powerpoint/2010/main" val="1201888164"/>
       </p:ext>
     </p:extLst>
   </p:cSld>
@@ -23874,7 +23874,7 @@
           <p:cNvPr id="10" name="Opgave 6b: hoeveelheden en toewijzing">
             <a:extLst xmlns:a="http://schemas.openxmlformats.org/drawingml/2006/main">
               <a:ext uri="{FF2B5EF4-FFF2-40B4-BE49-F238E27FC236}">
-                <a16:creationId xmlns:a16="http://schemas.microsoft.com/office/drawing/2014/main" id="{440E6D95-95BD-453C-8863-4D270DE2BC08}"/>
+                <a16:creationId xmlns:a16="http://schemas.microsoft.com/office/drawing/2014/main" id="{6EC6FF3E-C417-48B3-A2B5-C610396C5A5D}"/>
               </a:ext>
             </a:extLst>
           </p:cNvPr>
@@ -23931,7 +23931,7 @@
           <p:cNvPr id="2" name="">
             <a:extLst xmlns:a="http://schemas.openxmlformats.org/drawingml/2006/main">
               <a:ext uri="{FF2B5EF4-FFF2-40B4-BE49-F238E27FC236}">
-                <a16:creationId xmlns:a16="http://schemas.microsoft.com/office/drawing/2014/main" id="{BBA3F675-2DA8-4BE6-B852-72C137FF633C}"/>
+                <a16:creationId xmlns:a16="http://schemas.microsoft.com/office/drawing/2014/main" id="{8219C47F-15F2-4841-A61C-6F5AF4EC31F4}"/>
               </a:ext>
             </a:extLst>
           </p:cNvPr>
@@ -23960,7 +23960,7 @@
           <p:cNvPr id="3" name="§2.3.3 Pareto-efficiëntie en welvaartsverlies · Opgave 6 · Boekpa">
             <a:extLst xmlns:a="http://schemas.openxmlformats.org/drawingml/2006/main">
               <a:ext uri="{FF2B5EF4-FFF2-40B4-BE49-F238E27FC236}">
-                <a16:creationId xmlns:a16="http://schemas.microsoft.com/office/drawing/2014/main" id="{D5510F08-B18F-47E5-9B1E-075422DF89C5}"/>
+                <a16:creationId xmlns:a16="http://schemas.microsoft.com/office/drawing/2014/main" id="{081700E5-AD06-4CE7-B756-B57BED14CD7B}"/>
               </a:ext>
             </a:extLst>
           </p:cNvPr>
@@ -24007,7 +24007,7 @@
                 <a:ea typeface="Arial"/>
                 <a:cs typeface="Arial"/>
               </a:rPr>
-              <a:t>§2.3.3 Pareto-efficiëntie en welvaartsverlies · Opgave 6 · Boekpagina 99–100</a:t>
+              <a:t>§2.3.3 Pareto-efficiëntie en welvaartsverlies · Opgave 6 · Boekpagina 100–101</a:t>
             </a:r>
           </a:p>
         </p:txBody>
@@ -24017,7 +24017,7 @@
           <p:cNvPr id="4" name="22">
             <a:extLst xmlns:a="http://schemas.openxmlformats.org/drawingml/2006/main">
               <a:ext uri="{FF2B5EF4-FFF2-40B4-BE49-F238E27FC236}">
-                <a16:creationId xmlns:a16="http://schemas.microsoft.com/office/drawing/2014/main" id="{19A4489B-05F3-42AC-9A21-E1011BAAE2DC}"/>
+                <a16:creationId xmlns:a16="http://schemas.microsoft.com/office/drawing/2014/main" id="{30227E35-4711-4BC8-B15F-3A350AEDAA09}"/>
               </a:ext>
             </a:extLst>
           </p:cNvPr>
@@ -24071,10 +24071,10 @@
       </p:sp>
       <p:sp>
         <p:nvSpPr>
-          <p:cNvPr id="5" name="Vraag: 25 = 50 − 0,5Qd&#10;0,5Qd = 25; Qd = 50 kaartjes">
+          <p:cNvPr id="5" name="Vraag: 25 = 50 − 0,5Qv&#10;0,5Qv = 25; Qv = 50 kaartjes">
             <a:extLst xmlns:a="http://schemas.openxmlformats.org/drawingml/2006/main">
               <a:ext uri="{FF2B5EF4-FFF2-40B4-BE49-F238E27FC236}">
-                <a16:creationId xmlns:a16="http://schemas.microsoft.com/office/drawing/2014/main" id="{1FB1ADC8-2CE9-4C49-9B10-71C44B943D8D}"/>
+                <a16:creationId xmlns:a16="http://schemas.microsoft.com/office/drawing/2014/main" id="{B997B8C7-313E-46B7-8600-4D8A30DADC79}"/>
               </a:ext>
             </a:extLst>
           </p:cNvPr>
@@ -24121,7 +24121,7 @@
                 <a:ea typeface="Arial"/>
                 <a:cs typeface="Arial"/>
               </a:rPr>
-              <a:t>Vraag: 25 = 50 − 0,5Qd</a:t>
+              <a:t>Vraag: 25 = 50 − 0,5Qv</a:t>
             </a:r>
           </a:p>
           <a:p xmlns:a="http://schemas.openxmlformats.org/drawingml/2006/main">
@@ -24144,17 +24144,17 @@
                 <a:ea typeface="Arial"/>
                 <a:cs typeface="Arial"/>
               </a:rPr>
-              <a:t>0,5Qd = 25; Qd = 50 kaartjes</a:t>
+              <a:t>0,5Qv = 25; Qv = 50 kaartjes</a:t>
             </a:r>
           </a:p>
         </p:txBody>
       </p:sp>
       <p:sp>
         <p:nvSpPr>
-          <p:cNvPr id="6" name="Aanbod: 25 = 5 + 0,25Qs&#10;0,25Qs = 20; Qs = 80 kaartjes">
+          <p:cNvPr id="6" name="Aanbod: 25 = 5 + 0,25Qa&#10;0,25Qa = 20; Qa = 80 kaartjes">
             <a:extLst xmlns:a="http://schemas.openxmlformats.org/drawingml/2006/main">
               <a:ext uri="{FF2B5EF4-FFF2-40B4-BE49-F238E27FC236}">
-                <a16:creationId xmlns:a16="http://schemas.microsoft.com/office/drawing/2014/main" id="{E403AD15-29F8-4668-8E0F-96674282DFDA}"/>
+                <a16:creationId xmlns:a16="http://schemas.microsoft.com/office/drawing/2014/main" id="{A965D4FE-4F86-452E-B7BB-76AE627D358D}"/>
               </a:ext>
             </a:extLst>
           </p:cNvPr>
@@ -24201,7 +24201,7 @@
                 <a:ea typeface="Arial"/>
                 <a:cs typeface="Arial"/>
               </a:rPr>
-              <a:t>Aanbod: 25 = 5 + 0,25Qs</a:t>
+              <a:t>Aanbod: 25 = 5 + 0,25Qa</a:t>
             </a:r>
           </a:p>
           <a:p xmlns:a="http://schemas.openxmlformats.org/drawingml/2006/main">
@@ -24224,7 +24224,7 @@
                 <a:ea typeface="Arial"/>
                 <a:cs typeface="Arial"/>
               </a:rPr>
-              <a:t>0,25Qs = 20; Qs = 80 kaartjes</a:t>
+              <a:t>0,25Qa = 20; Qa = 80 kaartjes</a:t>
             </a:r>
           </a:p>
         </p:txBody>
@@ -24234,7 +24234,7 @@
           <p:cNvPr id="7" name="">
             <a:extLst xmlns:a="http://schemas.openxmlformats.org/drawingml/2006/main">
               <a:ext uri="{FF2B5EF4-FFF2-40B4-BE49-F238E27FC236}">
-                <a16:creationId xmlns:a16="http://schemas.microsoft.com/office/drawing/2014/main" id="{4ED77E6A-6690-4313-A652-DB7959DD52E2}"/>
+                <a16:creationId xmlns:a16="http://schemas.microsoft.com/office/drawing/2014/main" id="{857436A6-C276-4A67-8F38-6861C38DEAFB}"/>
               </a:ext>
             </a:extLst>
           </p:cNvPr>
@@ -24263,7 +24263,7 @@
           <p:cNvPr id="8" name="40 &lt; 50 en 40 &lt; 80. De boekingsgrens bindt: 40 transacties.">
             <a:extLst xmlns:a="http://schemas.openxmlformats.org/drawingml/2006/main">
               <a:ext uri="{FF2B5EF4-FFF2-40B4-BE49-F238E27FC236}">
-                <a16:creationId xmlns:a16="http://schemas.microsoft.com/office/drawing/2014/main" id="{D3318FF4-D942-4AEB-9087-30775C39DFD7}"/>
+                <a16:creationId xmlns:a16="http://schemas.microsoft.com/office/drawing/2014/main" id="{2801514B-2C5A-4A84-A1A9-7A91F0D565E3}"/>
               </a:ext>
             </a:extLst>
           </p:cNvPr>
@@ -24320,7 +24320,7 @@
           <p:cNvPr id="9" name="Kopers met de hoogste betalingsbereidheid kopen&#10;bij aanbieders me">
             <a:extLst xmlns:a="http://schemas.openxmlformats.org/drawingml/2006/main">
               <a:ext uri="{FF2B5EF4-FFF2-40B4-BE49-F238E27FC236}">
-                <a16:creationId xmlns:a16="http://schemas.microsoft.com/office/drawing/2014/main" id="{8EBC619D-E895-4B5E-A531-80346C507248}"/>
+                <a16:creationId xmlns:a16="http://schemas.microsoft.com/office/drawing/2014/main" id="{FF0679C5-FE29-4C61-8027-992FB044E0DB}"/>
               </a:ext>
             </a:extLst>
           </p:cNvPr>
@@ -24398,7 +24398,7 @@
     </p:spTree>
     <p:extLst>
       <p:ext uri="{BB962C8B-B14F-4D97-AF65-F5344CB8AC3E}">
-        <p14:creationId xmlns:p14="http://schemas.microsoft.com/office/powerpoint/2010/main" val="387769243"/>
+        <p14:creationId xmlns:p14="http://schemas.microsoft.com/office/powerpoint/2010/main" val="1785405008"/>
       </p:ext>
     </p:extLst>
   </p:cSld>
@@ -24429,7 +24429,7 @@
           <p:cNvPr id="9" name="Opgave 6c: de hoogten bij 40 transacties">
             <a:extLst xmlns:a="http://schemas.openxmlformats.org/drawingml/2006/main">
               <a:ext uri="{FF2B5EF4-FFF2-40B4-BE49-F238E27FC236}">
-                <a16:creationId xmlns:a16="http://schemas.microsoft.com/office/drawing/2014/main" id="{59FBCB9E-8A9E-46BC-A61B-A0DF623C3EE6}"/>
+                <a16:creationId xmlns:a16="http://schemas.microsoft.com/office/drawing/2014/main" id="{8DB45C1F-88BD-49BB-AD02-9666DB3FED6B}"/>
               </a:ext>
             </a:extLst>
           </p:cNvPr>
@@ -24486,7 +24486,7 @@
           <p:cNvPr id="2" name="">
             <a:extLst xmlns:a="http://schemas.openxmlformats.org/drawingml/2006/main">
               <a:ext uri="{FF2B5EF4-FFF2-40B4-BE49-F238E27FC236}">
-                <a16:creationId xmlns:a16="http://schemas.microsoft.com/office/drawing/2014/main" id="{CE26532C-5A48-4B1D-8E8E-801B616A19D4}"/>
+                <a16:creationId xmlns:a16="http://schemas.microsoft.com/office/drawing/2014/main" id="{111E3466-E19A-4F46-AC43-3A23CBFC74E3}"/>
               </a:ext>
             </a:extLst>
           </p:cNvPr>
@@ -24515,7 +24515,7 @@
           <p:cNvPr id="3" name="§2.3.3 Pareto-efficiëntie en welvaartsverlies · Opgave 6 · Boekpa">
             <a:extLst xmlns:a="http://schemas.openxmlformats.org/drawingml/2006/main">
               <a:ext uri="{FF2B5EF4-FFF2-40B4-BE49-F238E27FC236}">
-                <a16:creationId xmlns:a16="http://schemas.microsoft.com/office/drawing/2014/main" id="{FD1BD7D5-B387-406E-B17D-E9A78B5D7BB9}"/>
+                <a16:creationId xmlns:a16="http://schemas.microsoft.com/office/drawing/2014/main" id="{CCF5D9AE-C918-4804-96CD-876F7C050873}"/>
               </a:ext>
             </a:extLst>
           </p:cNvPr>
@@ -24562,7 +24562,7 @@
                 <a:ea typeface="Arial"/>
                 <a:cs typeface="Arial"/>
               </a:rPr>
-              <a:t>§2.3.3 Pareto-efficiëntie en welvaartsverlies · Opgave 6 · Boekpagina 99–100</a:t>
+              <a:t>§2.3.3 Pareto-efficiëntie en welvaartsverlies · Opgave 6 · Boekpagina 100–101</a:t>
             </a:r>
           </a:p>
         </p:txBody>
@@ -24572,7 +24572,7 @@
           <p:cNvPr id="4" name="23">
             <a:extLst xmlns:a="http://schemas.openxmlformats.org/drawingml/2006/main">
               <a:ext uri="{FF2B5EF4-FFF2-40B4-BE49-F238E27FC236}">
-                <a16:creationId xmlns:a16="http://schemas.microsoft.com/office/drawing/2014/main" id="{736B8B3E-0FED-479A-849A-C65F14E6188C}"/>
+                <a16:creationId xmlns:a16="http://schemas.microsoft.com/office/drawing/2014/main" id="{A0AA9C63-1DE1-4D22-8B83-B1D41BDEB791}"/>
               </a:ext>
             </a:extLst>
           </p:cNvPr>
@@ -24636,7 +24636,7 @@
         </p:xfrm>
         <a:graphic xmlns:a="http://schemas.openxmlformats.org/drawingml/2006/main">
           <a:graphicData uri="http://schemas.openxmlformats.org/drawingml/2006/chart">
-            <c:chart xmlns:r="http://schemas.openxmlformats.org/officeDocument/2006/relationships" xmlns:c="http://schemas.openxmlformats.org/drawingml/2006/chart" r:id="Re63ecbbcaf6847f4"/>
+            <c:chart xmlns:r="http://schemas.openxmlformats.org/officeDocument/2006/relationships" xmlns:c="http://schemas.openxmlformats.org/drawingml/2006/chart" r:id="R6760bade573c491a"/>
           </a:graphicData>
         </a:graphic>
       </p:graphicFrame>
@@ -24645,7 +24645,7 @@
           <p:cNvPr id="6" name="Betalingsbereidheid&#10;50 − 0,5 × 40&#10;= € 30 per kaartje">
             <a:extLst xmlns:a="http://schemas.openxmlformats.org/drawingml/2006/main">
               <a:ext uri="{FF2B5EF4-FFF2-40B4-BE49-F238E27FC236}">
-                <a16:creationId xmlns:a16="http://schemas.microsoft.com/office/drawing/2014/main" id="{39364C80-6697-4C4C-B9A8-4A8E49B99AEF}"/>
+                <a16:creationId xmlns:a16="http://schemas.microsoft.com/office/drawing/2014/main" id="{5D4209D5-604B-4D54-B5F7-7BA2A2FAC716}"/>
               </a:ext>
             </a:extLst>
           </p:cNvPr>
@@ -24748,7 +24748,7 @@
           <p:cNvPr id="7" name="Marginale kosten&#10;5 + 0,25 × 40&#10;= € 15 per kaartje">
             <a:extLst xmlns:a="http://schemas.openxmlformats.org/drawingml/2006/main">
               <a:ext uri="{FF2B5EF4-FFF2-40B4-BE49-F238E27FC236}">
-                <a16:creationId xmlns:a16="http://schemas.microsoft.com/office/drawing/2014/main" id="{E912CC05-D230-4A06-A0DB-427DBF07BAF9}"/>
+                <a16:creationId xmlns:a16="http://schemas.microsoft.com/office/drawing/2014/main" id="{408A26D5-3CEE-4073-A054-EF535C5F3101}"/>
               </a:ext>
             </a:extLst>
           </p:cNvPr>
@@ -24851,7 +24851,7 @@
           <p:cNvPr id="8" name="De prijs ligt ertussen:&#10;€ 15 &lt; € 25 &lt; € 30.">
             <a:extLst xmlns:a="http://schemas.openxmlformats.org/drawingml/2006/main">
               <a:ext uri="{FF2B5EF4-FFF2-40B4-BE49-F238E27FC236}">
-                <a16:creationId xmlns:a16="http://schemas.microsoft.com/office/drawing/2014/main" id="{D82C172B-3B57-463D-9262-0A64546E2588}"/>
+                <a16:creationId xmlns:a16="http://schemas.microsoft.com/office/drawing/2014/main" id="{98D8A425-C9A6-4DA0-BB74-8322E0F510E2}"/>
               </a:ext>
             </a:extLst>
           </p:cNvPr>
@@ -24929,7 +24929,7 @@
     </p:spTree>
     <p:extLst>
       <p:ext uri="{BB962C8B-B14F-4D97-AF65-F5344CB8AC3E}">
-        <p14:creationId xmlns:p14="http://schemas.microsoft.com/office/powerpoint/2010/main" val="2026607007"/>
+        <p14:creationId xmlns:p14="http://schemas.microsoft.com/office/powerpoint/2010/main" val="130460244"/>
       </p:ext>
     </p:extLst>
   </p:cSld>
@@ -24960,7 +24960,7 @@
           <p:cNvPr id="11" name="Opgave 6c: consumentensurplus">
             <a:extLst xmlns:a="http://schemas.openxmlformats.org/drawingml/2006/main">
               <a:ext uri="{FF2B5EF4-FFF2-40B4-BE49-F238E27FC236}">
-                <a16:creationId xmlns:a16="http://schemas.microsoft.com/office/drawing/2014/main" id="{4E70E1E2-5366-464B-B16D-AE134B466F92}"/>
+                <a16:creationId xmlns:a16="http://schemas.microsoft.com/office/drawing/2014/main" id="{DE6EBEA3-BE5E-4E3B-9ACA-7073F1287408}"/>
               </a:ext>
             </a:extLst>
           </p:cNvPr>
@@ -25017,7 +25017,7 @@
           <p:cNvPr id="2" name="">
             <a:extLst xmlns:a="http://schemas.openxmlformats.org/drawingml/2006/main">
               <a:ext uri="{FF2B5EF4-FFF2-40B4-BE49-F238E27FC236}">
-                <a16:creationId xmlns:a16="http://schemas.microsoft.com/office/drawing/2014/main" id="{6D212E8D-5A6C-4BCB-B470-CCAAD8132307}"/>
+                <a16:creationId xmlns:a16="http://schemas.microsoft.com/office/drawing/2014/main" id="{20570AA4-E510-4C09-8741-C91090F77514}"/>
               </a:ext>
             </a:extLst>
           </p:cNvPr>
@@ -25046,7 +25046,7 @@
           <p:cNvPr id="3" name="§2.3.3 Pareto-efficiëntie en welvaartsverlies · Opgave 6 · Boekpa">
             <a:extLst xmlns:a="http://schemas.openxmlformats.org/drawingml/2006/main">
               <a:ext uri="{FF2B5EF4-FFF2-40B4-BE49-F238E27FC236}">
-                <a16:creationId xmlns:a16="http://schemas.microsoft.com/office/drawing/2014/main" id="{800700D3-CC76-4B30-A951-D997951B2D65}"/>
+                <a16:creationId xmlns:a16="http://schemas.microsoft.com/office/drawing/2014/main" id="{3DEFF103-AD89-4C3A-ABBE-F9F60215F486}"/>
               </a:ext>
             </a:extLst>
           </p:cNvPr>
@@ -25093,7 +25093,7 @@
                 <a:ea typeface="Arial"/>
                 <a:cs typeface="Arial"/>
               </a:rPr>
-              <a:t>§2.3.3 Pareto-efficiëntie en welvaartsverlies · Opgave 6 · Boekpagina 99–100</a:t>
+              <a:t>§2.3.3 Pareto-efficiëntie en welvaartsverlies · Opgave 6 · Boekpagina 100–101</a:t>
             </a:r>
           </a:p>
         </p:txBody>
@@ -25103,7 +25103,7 @@
           <p:cNvPr id="4" name="24">
             <a:extLst xmlns:a="http://schemas.openxmlformats.org/drawingml/2006/main">
               <a:ext uri="{FF2B5EF4-FFF2-40B4-BE49-F238E27FC236}">
-                <a16:creationId xmlns:a16="http://schemas.microsoft.com/office/drawing/2014/main" id="{632D22CC-6B7D-445B-80DA-D78293835B00}"/>
+                <a16:creationId xmlns:a16="http://schemas.microsoft.com/office/drawing/2014/main" id="{6E86E947-3206-44AC-800B-27270C389741}"/>
               </a:ext>
             </a:extLst>
           </p:cNvPr>
@@ -25160,7 +25160,7 @@
           <p:cNvPr id="5" name="CS rechthoek">
             <a:extLst xmlns:a="http://schemas.openxmlformats.org/drawingml/2006/main">
               <a:ext uri="{FF2B5EF4-FFF2-40B4-BE49-F238E27FC236}">
-                <a16:creationId xmlns:a16="http://schemas.microsoft.com/office/drawing/2014/main" id="{F8C1A9D8-52B4-44BD-9265-83ED135DA60A}"/>
+                <a16:creationId xmlns:a16="http://schemas.microsoft.com/office/drawing/2014/main" id="{E5692B04-6960-4456-9A84-332958EDE9B6}"/>
               </a:ext>
             </a:extLst>
           </p:cNvPr>
@@ -25206,7 +25206,7 @@
           <p:cNvPr id="6" name="CS driehoek">
             <a:extLst xmlns:a="http://schemas.openxmlformats.org/drawingml/2006/main">
               <a:ext uri="{FF2B5EF4-FFF2-40B4-BE49-F238E27FC236}">
-                <a16:creationId xmlns:a16="http://schemas.microsoft.com/office/drawing/2014/main" id="{542FD830-3048-476A-B647-FDD643258E74}"/>
+                <a16:creationId xmlns:a16="http://schemas.microsoft.com/office/drawing/2014/main" id="{52717CE8-A8EA-4AF3-9207-0C4C2F236BDA}"/>
               </a:ext>
             </a:extLst>
           </p:cNvPr>
@@ -25256,7 +25256,7 @@
         </p:xfrm>
         <a:graphic xmlns:a="http://schemas.openxmlformats.org/drawingml/2006/main">
           <a:graphicData uri="http://schemas.openxmlformats.org/drawingml/2006/chart">
-            <c:chart xmlns:r="http://schemas.openxmlformats.org/officeDocument/2006/relationships" xmlns:c="http://schemas.openxmlformats.org/drawingml/2006/chart" r:id="R1b1af87858da4b11"/>
+            <c:chart xmlns:r="http://schemas.openxmlformats.org/officeDocument/2006/relationships" xmlns:c="http://schemas.openxmlformats.org/drawingml/2006/chart" r:id="Rb750ad8c7f454b1f"/>
           </a:graphicData>
         </a:graphic>
       </p:graphicFrame>
@@ -25265,7 +25265,7 @@
           <p:cNvPr id="8" name="Rechthoek&#10;40 × (30 − 25) = € 200">
             <a:extLst xmlns:a="http://schemas.openxmlformats.org/drawingml/2006/main">
               <a:ext uri="{FF2B5EF4-FFF2-40B4-BE49-F238E27FC236}">
-                <a16:creationId xmlns:a16="http://schemas.microsoft.com/office/drawing/2014/main" id="{567CAE59-4183-402C-8341-38F97FF4EB92}"/>
+                <a16:creationId xmlns:a16="http://schemas.microsoft.com/office/drawing/2014/main" id="{68431D8C-4C6A-4054-A3E4-D6F65B4B6199}"/>
               </a:ext>
             </a:extLst>
           </p:cNvPr>
@@ -25345,7 +25345,7 @@
           <p:cNvPr id="9" name="Driehoek&#10;½ × 40 × (50 − 30)&#10;= € 400">
             <a:extLst xmlns:a="http://schemas.openxmlformats.org/drawingml/2006/main">
               <a:ext uri="{FF2B5EF4-FFF2-40B4-BE49-F238E27FC236}">
-                <a16:creationId xmlns:a16="http://schemas.microsoft.com/office/drawing/2014/main" id="{33DF4782-88EF-4B98-801B-E6AF9D3F31E0}"/>
+                <a16:creationId xmlns:a16="http://schemas.microsoft.com/office/drawing/2014/main" id="{11D2FC4E-A152-4D9F-BB6A-9836D063E19E}"/>
               </a:ext>
             </a:extLst>
           </p:cNvPr>
@@ -25448,7 +25448,7 @@
           <p:cNvPr id="10" name="CS = 200 + 400&#10;= € 600">
             <a:extLst xmlns:a="http://schemas.openxmlformats.org/drawingml/2006/main">
               <a:ext uri="{FF2B5EF4-FFF2-40B4-BE49-F238E27FC236}">
-                <a16:creationId xmlns:a16="http://schemas.microsoft.com/office/drawing/2014/main" id="{9A7C4D7F-46C3-4E17-9B7D-EE4AB944DBA3}"/>
+                <a16:creationId xmlns:a16="http://schemas.microsoft.com/office/drawing/2014/main" id="{6CBE6E3A-7A49-4EF1-8DAD-2F213DF9D2B9}"/>
               </a:ext>
             </a:extLst>
           </p:cNvPr>
@@ -25526,7 +25526,7 @@
     </p:spTree>
     <p:extLst>
       <p:ext uri="{BB962C8B-B14F-4D97-AF65-F5344CB8AC3E}">
-        <p14:creationId xmlns:p14="http://schemas.microsoft.com/office/powerpoint/2010/main" val="894465204"/>
+        <p14:creationId xmlns:p14="http://schemas.microsoft.com/office/powerpoint/2010/main" val="1631627289"/>
       </p:ext>
     </p:extLst>
   </p:cSld>
@@ -25557,7 +25557,7 @@
           <p:cNvPr id="11" name="Opgave 6c: producentensurplus">
             <a:extLst xmlns:a="http://schemas.openxmlformats.org/drawingml/2006/main">
               <a:ext uri="{FF2B5EF4-FFF2-40B4-BE49-F238E27FC236}">
-                <a16:creationId xmlns:a16="http://schemas.microsoft.com/office/drawing/2014/main" id="{77987B6B-235F-464E-B5C8-36B6E1D93161}"/>
+                <a16:creationId xmlns:a16="http://schemas.microsoft.com/office/drawing/2014/main" id="{3AB08CBD-999A-4B58-B8FD-F9CBD43290AC}"/>
               </a:ext>
             </a:extLst>
           </p:cNvPr>
@@ -25614,7 +25614,7 @@
           <p:cNvPr id="2" name="">
             <a:extLst xmlns:a="http://schemas.openxmlformats.org/drawingml/2006/main">
               <a:ext uri="{FF2B5EF4-FFF2-40B4-BE49-F238E27FC236}">
-                <a16:creationId xmlns:a16="http://schemas.microsoft.com/office/drawing/2014/main" id="{7F2EC1E6-BF6C-4D2B-B768-C055E847476F}"/>
+                <a16:creationId xmlns:a16="http://schemas.microsoft.com/office/drawing/2014/main" id="{5993C34F-1CDE-490C-9072-CCAB23371021}"/>
               </a:ext>
             </a:extLst>
           </p:cNvPr>
@@ -25643,7 +25643,7 @@
           <p:cNvPr id="3" name="§2.3.3 Pareto-efficiëntie en welvaartsverlies · Opgave 6 · Boekpa">
             <a:extLst xmlns:a="http://schemas.openxmlformats.org/drawingml/2006/main">
               <a:ext uri="{FF2B5EF4-FFF2-40B4-BE49-F238E27FC236}">
-                <a16:creationId xmlns:a16="http://schemas.microsoft.com/office/drawing/2014/main" id="{81735E6B-6430-497B-B58F-B34C8B8CAB1A}"/>
+                <a16:creationId xmlns:a16="http://schemas.microsoft.com/office/drawing/2014/main" id="{C6F8724B-93A5-4FDD-83B5-7B6555E456F3}"/>
               </a:ext>
             </a:extLst>
           </p:cNvPr>
@@ -25690,7 +25690,7 @@
                 <a:ea typeface="Arial"/>
                 <a:cs typeface="Arial"/>
               </a:rPr>
-              <a:t>§2.3.3 Pareto-efficiëntie en welvaartsverlies · Opgave 6 · Boekpagina 99–100</a:t>
+              <a:t>§2.3.3 Pareto-efficiëntie en welvaartsverlies · Opgave 6 · Boekpagina 100–101</a:t>
             </a:r>
           </a:p>
         </p:txBody>
@@ -25700,7 +25700,7 @@
           <p:cNvPr id="4" name="25">
             <a:extLst xmlns:a="http://schemas.openxmlformats.org/drawingml/2006/main">
               <a:ext uri="{FF2B5EF4-FFF2-40B4-BE49-F238E27FC236}">
-                <a16:creationId xmlns:a16="http://schemas.microsoft.com/office/drawing/2014/main" id="{1EFD5B17-1F50-41C8-82F7-D873E07B7F20}"/>
+                <a16:creationId xmlns:a16="http://schemas.microsoft.com/office/drawing/2014/main" id="{B61689E6-5543-4399-A863-777C8227364B}"/>
               </a:ext>
             </a:extLst>
           </p:cNvPr>
@@ -25757,7 +25757,7 @@
           <p:cNvPr id="5" name="PS rechthoek">
             <a:extLst xmlns:a="http://schemas.openxmlformats.org/drawingml/2006/main">
               <a:ext uri="{FF2B5EF4-FFF2-40B4-BE49-F238E27FC236}">
-                <a16:creationId xmlns:a16="http://schemas.microsoft.com/office/drawing/2014/main" id="{5BFFB96D-8096-4DB4-8647-AFA514D5BBEC}"/>
+                <a16:creationId xmlns:a16="http://schemas.microsoft.com/office/drawing/2014/main" id="{B40AF115-0C40-4B71-B5CF-812458A5D5BB}"/>
               </a:ext>
             </a:extLst>
           </p:cNvPr>
@@ -25803,7 +25803,7 @@
           <p:cNvPr id="6" name="PS driehoek">
             <a:extLst xmlns:a="http://schemas.openxmlformats.org/drawingml/2006/main">
               <a:ext uri="{FF2B5EF4-FFF2-40B4-BE49-F238E27FC236}">
-                <a16:creationId xmlns:a16="http://schemas.microsoft.com/office/drawing/2014/main" id="{0F66C3E3-14EB-4980-88AE-270F31FBBECA}"/>
+                <a16:creationId xmlns:a16="http://schemas.microsoft.com/office/drawing/2014/main" id="{F20C123E-C3E4-48E6-927B-4957DB5113C2}"/>
               </a:ext>
             </a:extLst>
           </p:cNvPr>
@@ -25853,7 +25853,7 @@
         </p:xfrm>
         <a:graphic xmlns:a="http://schemas.openxmlformats.org/drawingml/2006/main">
           <a:graphicData uri="http://schemas.openxmlformats.org/drawingml/2006/chart">
-            <c:chart xmlns:r="http://schemas.openxmlformats.org/officeDocument/2006/relationships" xmlns:c="http://schemas.openxmlformats.org/drawingml/2006/chart" r:id="R2e585aa1b69441f3"/>
+            <c:chart xmlns:r="http://schemas.openxmlformats.org/officeDocument/2006/relationships" xmlns:c="http://schemas.openxmlformats.org/drawingml/2006/chart" r:id="Rf6d89efe68fc432b"/>
           </a:graphicData>
         </a:graphic>
       </p:graphicFrame>
@@ -25862,7 +25862,7 @@
           <p:cNvPr id="8" name="Rechthoek&#10;40 × (25 − 15) = € 400">
             <a:extLst xmlns:a="http://schemas.openxmlformats.org/drawingml/2006/main">
               <a:ext uri="{FF2B5EF4-FFF2-40B4-BE49-F238E27FC236}">
-                <a16:creationId xmlns:a16="http://schemas.microsoft.com/office/drawing/2014/main" id="{775A31A5-CD47-4C4F-AEA0-B26308532F0C}"/>
+                <a16:creationId xmlns:a16="http://schemas.microsoft.com/office/drawing/2014/main" id="{E877AE6C-ACEF-4442-86DD-B61C1B2775AD}"/>
               </a:ext>
             </a:extLst>
           </p:cNvPr>
@@ -25942,7 +25942,7 @@
           <p:cNvPr id="9" name="Driehoek&#10;½ × 40 × (15 − 5)&#10;= € 200">
             <a:extLst xmlns:a="http://schemas.openxmlformats.org/drawingml/2006/main">
               <a:ext uri="{FF2B5EF4-FFF2-40B4-BE49-F238E27FC236}">
-                <a16:creationId xmlns:a16="http://schemas.microsoft.com/office/drawing/2014/main" id="{EA34CF50-D484-4553-AB30-6040AB44CCAC}"/>
+                <a16:creationId xmlns:a16="http://schemas.microsoft.com/office/drawing/2014/main" id="{FBF15890-8452-4CEE-8082-57B93EEB5ECE}"/>
               </a:ext>
             </a:extLst>
           </p:cNvPr>
@@ -26045,7 +26045,7 @@
           <p:cNvPr id="10" name="PS = 400 + 200&#10;= € 600">
             <a:extLst xmlns:a="http://schemas.openxmlformats.org/drawingml/2006/main">
               <a:ext uri="{FF2B5EF4-FFF2-40B4-BE49-F238E27FC236}">
-                <a16:creationId xmlns:a16="http://schemas.microsoft.com/office/drawing/2014/main" id="{52E0D51F-57CA-4BBE-ACA5-8EB61DC302D7}"/>
+                <a16:creationId xmlns:a16="http://schemas.microsoft.com/office/drawing/2014/main" id="{15C83425-EC51-4B10-AF73-8EC20A7936A1}"/>
               </a:ext>
             </a:extLst>
           </p:cNvPr>
@@ -26123,7 +26123,7 @@
     </p:spTree>
     <p:extLst>
       <p:ext uri="{BB962C8B-B14F-4D97-AF65-F5344CB8AC3E}">
-        <p14:creationId xmlns:p14="http://schemas.microsoft.com/office/powerpoint/2010/main" val="2120844390"/>
+        <p14:creationId xmlns:p14="http://schemas.microsoft.com/office/powerpoint/2010/main" val="1998164514"/>
       </p:ext>
     </p:extLst>
   </p:cSld>
@@ -26154,7 +26154,7 @@
           <p:cNvPr id="11" name="Opgave 6d: totaal surplus en welvaartsverlies">
             <a:extLst xmlns:a="http://schemas.openxmlformats.org/drawingml/2006/main">
               <a:ext uri="{FF2B5EF4-FFF2-40B4-BE49-F238E27FC236}">
-                <a16:creationId xmlns:a16="http://schemas.microsoft.com/office/drawing/2014/main" id="{99426A21-D98F-42C8-B7C5-FE5390BB404A}"/>
+                <a16:creationId xmlns:a16="http://schemas.microsoft.com/office/drawing/2014/main" id="{DCBEFF92-1708-4F8B-AA55-98A601C694F1}"/>
               </a:ext>
             </a:extLst>
           </p:cNvPr>
@@ -26211,7 +26211,7 @@
           <p:cNvPr id="2" name="">
             <a:extLst xmlns:a="http://schemas.openxmlformats.org/drawingml/2006/main">
               <a:ext uri="{FF2B5EF4-FFF2-40B4-BE49-F238E27FC236}">
-                <a16:creationId xmlns:a16="http://schemas.microsoft.com/office/drawing/2014/main" id="{190D894C-1D97-45AC-B9E4-082F8B34CD8B}"/>
+                <a16:creationId xmlns:a16="http://schemas.microsoft.com/office/drawing/2014/main" id="{3FA6EDBC-38DD-4EB7-84A8-BA43B3ED3F9D}"/>
               </a:ext>
             </a:extLst>
           </p:cNvPr>
@@ -26240,7 +26240,7 @@
           <p:cNvPr id="3" name="§2.3.3 Pareto-efficiëntie en welvaartsverlies · Opgave 6 · Boekpa">
             <a:extLst xmlns:a="http://schemas.openxmlformats.org/drawingml/2006/main">
               <a:ext uri="{FF2B5EF4-FFF2-40B4-BE49-F238E27FC236}">
-                <a16:creationId xmlns:a16="http://schemas.microsoft.com/office/drawing/2014/main" id="{EAA8AEAD-BE9F-4DB2-AE9D-9CCF1F4A7DB4}"/>
+                <a16:creationId xmlns:a16="http://schemas.microsoft.com/office/drawing/2014/main" id="{90C9124D-F7C8-4234-B7A3-DA2CB1CB8C93}"/>
               </a:ext>
             </a:extLst>
           </p:cNvPr>
@@ -26287,7 +26287,7 @@
                 <a:ea typeface="Arial"/>
                 <a:cs typeface="Arial"/>
               </a:rPr>
-              <a:t>§2.3.3 Pareto-efficiëntie en welvaartsverlies · Opgave 6 · Boekpagina 99–100</a:t>
+              <a:t>§2.3.3 Pareto-efficiëntie en welvaartsverlies · Opgave 6 · Boekpagina 100–101</a:t>
             </a:r>
           </a:p>
         </p:txBody>
@@ -26297,7 +26297,7 @@
           <p:cNvPr id="4" name="26">
             <a:extLst xmlns:a="http://schemas.openxmlformats.org/drawingml/2006/main">
               <a:ext uri="{FF2B5EF4-FFF2-40B4-BE49-F238E27FC236}">
-                <a16:creationId xmlns:a16="http://schemas.microsoft.com/office/drawing/2014/main" id="{7D17E44A-7C61-465A-A46D-B2BD22F09E2D}"/>
+                <a16:creationId xmlns:a16="http://schemas.microsoft.com/office/drawing/2014/main" id="{64AA06CB-BCB3-43BF-99BC-F11DD25D33D7}"/>
               </a:ext>
             </a:extLst>
           </p:cNvPr>
@@ -26354,7 +26354,7 @@
           <p:cNvPr id="5" name="TS = CS + PS">
             <a:extLst xmlns:a="http://schemas.openxmlformats.org/drawingml/2006/main">
               <a:ext uri="{FF2B5EF4-FFF2-40B4-BE49-F238E27FC236}">
-                <a16:creationId xmlns:a16="http://schemas.microsoft.com/office/drawing/2014/main" id="{CD399B07-D28D-414E-8140-C610DEFFAF96}"/>
+                <a16:creationId xmlns:a16="http://schemas.microsoft.com/office/drawing/2014/main" id="{C4FAB72E-C835-4C89-AFB5-36065CBCA454}"/>
               </a:ext>
             </a:extLst>
           </p:cNvPr>
@@ -26411,7 +26411,7 @@
           <p:cNvPr id="6" name="TS = 600 + 600 = € 1.200">
             <a:extLst xmlns:a="http://schemas.openxmlformats.org/drawingml/2006/main">
               <a:ext uri="{FF2B5EF4-FFF2-40B4-BE49-F238E27FC236}">
-                <a16:creationId xmlns:a16="http://schemas.microsoft.com/office/drawing/2014/main" id="{80F31BCC-340E-421A-8493-6BF2DC8636B3}"/>
+                <a16:creationId xmlns:a16="http://schemas.microsoft.com/office/drawing/2014/main" id="{041174D6-7C7D-4E67-8C59-9E7F664E0B42}"/>
               </a:ext>
             </a:extLst>
           </p:cNvPr>
@@ -26468,7 +26468,7 @@
           <p:cNvPr id="7" name="">
             <a:extLst xmlns:a="http://schemas.openxmlformats.org/drawingml/2006/main">
               <a:ext uri="{FF2B5EF4-FFF2-40B4-BE49-F238E27FC236}">
-                <a16:creationId xmlns:a16="http://schemas.microsoft.com/office/drawing/2014/main" id="{FBBB47DD-6797-4895-B86F-B6B2569E18BB}"/>
+                <a16:creationId xmlns:a16="http://schemas.microsoft.com/office/drawing/2014/main" id="{CB818F92-8B0F-484F-B800-8DD895D24D70}"/>
               </a:ext>
             </a:extLst>
           </p:cNvPr>
@@ -26497,7 +26497,7 @@
           <p:cNvPr id="8" name="Welvaartsverlies = maximaal TS − werkelijk TS">
             <a:extLst xmlns:a="http://schemas.openxmlformats.org/drawingml/2006/main">
               <a:ext uri="{FF2B5EF4-FFF2-40B4-BE49-F238E27FC236}">
-                <a16:creationId xmlns:a16="http://schemas.microsoft.com/office/drawing/2014/main" id="{B6319267-6D9D-41CE-AB09-69A8BCB30FC5}"/>
+                <a16:creationId xmlns:a16="http://schemas.microsoft.com/office/drawing/2014/main" id="{57BC0CA9-7B71-4F81-9D97-92AB4A0ECF21}"/>
               </a:ext>
             </a:extLst>
           </p:cNvPr>
@@ -26554,7 +26554,7 @@
           <p:cNvPr id="9" name="Welvaartsverlies = 1.350 − 1.200 = € 150">
             <a:extLst xmlns:a="http://schemas.openxmlformats.org/drawingml/2006/main">
               <a:ext uri="{FF2B5EF4-FFF2-40B4-BE49-F238E27FC236}">
-                <a16:creationId xmlns:a16="http://schemas.microsoft.com/office/drawing/2014/main" id="{7BC1CDC9-6F95-4FAF-85E5-F0A2885FF332}"/>
+                <a16:creationId xmlns:a16="http://schemas.microsoft.com/office/drawing/2014/main" id="{39BC4038-982C-408C-A396-F12DD44F222A}"/>
               </a:ext>
             </a:extLst>
           </p:cNvPr>
@@ -26611,7 +26611,7 @@
           <p:cNvPr id="10" name="Dit voordeel ontvangt niemand, omdat voordelige handel uitblijft.">
             <a:extLst xmlns:a="http://schemas.openxmlformats.org/drawingml/2006/main">
               <a:ext uri="{FF2B5EF4-FFF2-40B4-BE49-F238E27FC236}">
-                <a16:creationId xmlns:a16="http://schemas.microsoft.com/office/drawing/2014/main" id="{3D4381B6-CF87-4739-8C39-F93EB7B7EA13}"/>
+                <a16:creationId xmlns:a16="http://schemas.microsoft.com/office/drawing/2014/main" id="{C483749F-FE94-499A-A540-404E132141E1}"/>
               </a:ext>
             </a:extLst>
           </p:cNvPr>
@@ -26666,7 +26666,7 @@
     </p:spTree>
     <p:extLst>
       <p:ext uri="{BB962C8B-B14F-4D97-AF65-F5344CB8AC3E}">
-        <p14:creationId xmlns:p14="http://schemas.microsoft.com/office/powerpoint/2010/main" val="1912924017"/>
+        <p14:creationId xmlns:p14="http://schemas.microsoft.com/office/powerpoint/2010/main" val="967944287"/>
       </p:ext>
     </p:extLst>
   </p:cSld>
@@ -26697,7 +26697,7 @@
           <p:cNvPr id="11" name="Opgave 6d: de verliesdriehoek">
             <a:extLst xmlns:a="http://schemas.openxmlformats.org/drawingml/2006/main">
               <a:ext uri="{FF2B5EF4-FFF2-40B4-BE49-F238E27FC236}">
-                <a16:creationId xmlns:a16="http://schemas.microsoft.com/office/drawing/2014/main" id="{FF9CC6A7-2913-4EB7-A14A-503D57539F21}"/>
+                <a16:creationId xmlns:a16="http://schemas.microsoft.com/office/drawing/2014/main" id="{E3BA543E-4F78-4546-9F03-917713863228}"/>
               </a:ext>
             </a:extLst>
           </p:cNvPr>
@@ -26754,7 +26754,7 @@
           <p:cNvPr id="2" name="">
             <a:extLst xmlns:a="http://schemas.openxmlformats.org/drawingml/2006/main">
               <a:ext uri="{FF2B5EF4-FFF2-40B4-BE49-F238E27FC236}">
-                <a16:creationId xmlns:a16="http://schemas.microsoft.com/office/drawing/2014/main" id="{B4691266-CAEB-410D-B6EE-1B6DF94488E8}"/>
+                <a16:creationId xmlns:a16="http://schemas.microsoft.com/office/drawing/2014/main" id="{A074916F-34D6-496A-A3A6-146A21B36333}"/>
               </a:ext>
             </a:extLst>
           </p:cNvPr>
@@ -26783,7 +26783,7 @@
           <p:cNvPr id="3" name="§2.3.3 Pareto-efficiëntie en welvaartsverlies · Opgave 6 · Boekpa">
             <a:extLst xmlns:a="http://schemas.openxmlformats.org/drawingml/2006/main">
               <a:ext uri="{FF2B5EF4-FFF2-40B4-BE49-F238E27FC236}">
-                <a16:creationId xmlns:a16="http://schemas.microsoft.com/office/drawing/2014/main" id="{F18B262A-1968-4F99-AE7C-A5B4BA9586A7}"/>
+                <a16:creationId xmlns:a16="http://schemas.microsoft.com/office/drawing/2014/main" id="{33D49A2B-EF2E-47BF-AC91-A00B4856D9BE}"/>
               </a:ext>
             </a:extLst>
           </p:cNvPr>
@@ -26830,7 +26830,7 @@
                 <a:ea typeface="Arial"/>
                 <a:cs typeface="Arial"/>
               </a:rPr>
-              <a:t>§2.3.3 Pareto-efficiëntie en welvaartsverlies · Opgave 6 · Boekpagina 99–100</a:t>
+              <a:t>§2.3.3 Pareto-efficiëntie en welvaartsverlies · Opgave 6 · Boekpagina 100–101</a:t>
             </a:r>
           </a:p>
         </p:txBody>
@@ -26840,7 +26840,7 @@
           <p:cNvPr id="4" name="27">
             <a:extLst xmlns:a="http://schemas.openxmlformats.org/drawingml/2006/main">
               <a:ext uri="{FF2B5EF4-FFF2-40B4-BE49-F238E27FC236}">
-                <a16:creationId xmlns:a16="http://schemas.microsoft.com/office/drawing/2014/main" id="{930C6C81-8CD9-4898-9C0A-E63906FCB25F}"/>
+                <a16:creationId xmlns:a16="http://schemas.microsoft.com/office/drawing/2014/main" id="{57932D12-DCCE-480B-B1A8-1D0941AB26E7}"/>
               </a:ext>
             </a:extLst>
           </p:cNvPr>
@@ -26897,7 +26897,7 @@
           <p:cNvPr id="5" name="Welvaartsverlies">
             <a:extLst xmlns:a="http://schemas.openxmlformats.org/drawingml/2006/main">
               <a:ext uri="{FF2B5EF4-FFF2-40B4-BE49-F238E27FC236}">
-                <a16:creationId xmlns:a16="http://schemas.microsoft.com/office/drawing/2014/main" id="{70A8E242-5BF0-442E-B4F5-2B34C27AF865}"/>
+                <a16:creationId xmlns:a16="http://schemas.microsoft.com/office/drawing/2014/main" id="{263A0E43-1D8B-4146-A134-28C976FD1F7F}"/>
               </a:ext>
             </a:extLst>
           </p:cNvPr>
@@ -26947,7 +26947,7 @@
         </p:xfrm>
         <a:graphic xmlns:a="http://schemas.openxmlformats.org/drawingml/2006/main">
           <a:graphicData uri="http://schemas.openxmlformats.org/drawingml/2006/chart">
-            <c:chart xmlns:r="http://schemas.openxmlformats.org/officeDocument/2006/relationships" xmlns:c="http://schemas.openxmlformats.org/drawingml/2006/chart" r:id="Rdf8fb2068e09413b"/>
+            <c:chart xmlns:r="http://schemas.openxmlformats.org/officeDocument/2006/relationships" xmlns:c="http://schemas.openxmlformats.org/drawingml/2006/chart" r:id="Rc589963139ef488a"/>
           </a:graphicData>
         </a:graphic>
       </p:graphicFrame>
@@ -26956,7 +26956,7 @@
           <p:cNvPr id="7" name="Hoekpunten&#10;(40; 30), (60; 20), (40; 15)">
             <a:extLst xmlns:a="http://schemas.openxmlformats.org/drawingml/2006/main">
               <a:ext uri="{FF2B5EF4-FFF2-40B4-BE49-F238E27FC236}">
-                <a16:creationId xmlns:a16="http://schemas.microsoft.com/office/drawing/2014/main" id="{E351F433-6BFC-40C3-B409-DC21BA8BA14D}"/>
+                <a16:creationId xmlns:a16="http://schemas.microsoft.com/office/drawing/2014/main" id="{2E80D466-6906-4609-9122-23829F4744D8}"/>
               </a:ext>
             </a:extLst>
           </p:cNvPr>
@@ -27036,7 +27036,7 @@
           <p:cNvPr id="8" name="Basis: 60 − 40 = 20 kaartjes&#10;Hoogte: 30 − 15&#10;= € 15 per kaartje">
             <a:extLst xmlns:a="http://schemas.openxmlformats.org/drawingml/2006/main">
               <a:ext uri="{FF2B5EF4-FFF2-40B4-BE49-F238E27FC236}">
-                <a16:creationId xmlns:a16="http://schemas.microsoft.com/office/drawing/2014/main" id="{724B0155-7A18-4097-AB62-18EF9F5717B6}"/>
+                <a16:creationId xmlns:a16="http://schemas.microsoft.com/office/drawing/2014/main" id="{289E73FB-184F-4409-9FE8-B26BC07594DC}"/>
               </a:ext>
             </a:extLst>
           </p:cNvPr>
@@ -27139,7 +27139,7 @@
           <p:cNvPr id="9" name="½ × 20 × 15 = € 150">
             <a:extLst xmlns:a="http://schemas.openxmlformats.org/drawingml/2006/main">
               <a:ext uri="{FF2B5EF4-FFF2-40B4-BE49-F238E27FC236}">
-                <a16:creationId xmlns:a16="http://schemas.microsoft.com/office/drawing/2014/main" id="{4A8AFF07-FFDD-4147-9D7E-456BEB099B2B}"/>
+                <a16:creationId xmlns:a16="http://schemas.microsoft.com/office/drawing/2014/main" id="{C2491E27-6DC8-44EC-9D51-B772CDCBF63E}"/>
               </a:ext>
             </a:extLst>
           </p:cNvPr>
@@ -27196,7 +27196,7 @@
           <p:cNvPr id="10" name="De hoogte is het verschil&#10;tussen betalingsbereidheid en MK.">
             <a:extLst xmlns:a="http://schemas.openxmlformats.org/drawingml/2006/main">
               <a:ext uri="{FF2B5EF4-FFF2-40B4-BE49-F238E27FC236}">
-                <a16:creationId xmlns:a16="http://schemas.microsoft.com/office/drawing/2014/main" id="{349F6675-4520-46EB-8EAE-491D9C809AF9}"/>
+                <a16:creationId xmlns:a16="http://schemas.microsoft.com/office/drawing/2014/main" id="{322E4AD8-4358-4652-90AB-3676074756DD}"/>
               </a:ext>
             </a:extLst>
           </p:cNvPr>
@@ -27274,7 +27274,7 @@
     </p:spTree>
     <p:extLst>
       <p:ext uri="{BB962C8B-B14F-4D97-AF65-F5344CB8AC3E}">
-        <p14:creationId xmlns:p14="http://schemas.microsoft.com/office/powerpoint/2010/main" val="1175700372"/>
+        <p14:creationId xmlns:p14="http://schemas.microsoft.com/office/powerpoint/2010/main" val="963623919"/>
       </p:ext>
     </p:extLst>
   </p:cSld>
@@ -27305,7 +27305,7 @@
           <p:cNvPr id="9" name="Opgave 6e: de mogelijke 41e transactie">
             <a:extLst xmlns:a="http://schemas.openxmlformats.org/drawingml/2006/main">
               <a:ext uri="{FF2B5EF4-FFF2-40B4-BE49-F238E27FC236}">
-                <a16:creationId xmlns:a16="http://schemas.microsoft.com/office/drawing/2014/main" id="{09B815B9-E812-4A3E-8D64-79397EC24A8E}"/>
+                <a16:creationId xmlns:a16="http://schemas.microsoft.com/office/drawing/2014/main" id="{DAC95F19-E11F-426D-A90A-2FD42D8AB70E}"/>
               </a:ext>
             </a:extLst>
           </p:cNvPr>
@@ -27362,7 +27362,7 @@
           <p:cNvPr id="2" name="">
             <a:extLst xmlns:a="http://schemas.openxmlformats.org/drawingml/2006/main">
               <a:ext uri="{FF2B5EF4-FFF2-40B4-BE49-F238E27FC236}">
-                <a16:creationId xmlns:a16="http://schemas.microsoft.com/office/drawing/2014/main" id="{F4D6E38B-3F28-432C-BBBE-4D1B9C2391A4}"/>
+                <a16:creationId xmlns:a16="http://schemas.microsoft.com/office/drawing/2014/main" id="{57C158A8-BB64-4696-A013-F43607025CA9}"/>
               </a:ext>
             </a:extLst>
           </p:cNvPr>
@@ -27391,7 +27391,7 @@
           <p:cNvPr id="3" name="§2.3.3 Pareto-efficiëntie en welvaartsverlies · Opgave 6 · Boekpa">
             <a:extLst xmlns:a="http://schemas.openxmlformats.org/drawingml/2006/main">
               <a:ext uri="{FF2B5EF4-FFF2-40B4-BE49-F238E27FC236}">
-                <a16:creationId xmlns:a16="http://schemas.microsoft.com/office/drawing/2014/main" id="{3BDB47B2-065A-4151-AB3D-48303892A134}"/>
+                <a16:creationId xmlns:a16="http://schemas.microsoft.com/office/drawing/2014/main" id="{6D35463C-2D80-4A55-BE20-ED60CDECB7F3}"/>
               </a:ext>
             </a:extLst>
           </p:cNvPr>
@@ -27438,7 +27438,7 @@
                 <a:ea typeface="Arial"/>
                 <a:cs typeface="Arial"/>
               </a:rPr>
-              <a:t>§2.3.3 Pareto-efficiëntie en welvaartsverlies · Opgave 6 · Boekpagina 99–100</a:t>
+              <a:t>§2.3.3 Pareto-efficiëntie en welvaartsverlies · Opgave 6 · Boekpagina 100–101</a:t>
             </a:r>
           </a:p>
         </p:txBody>
@@ -27448,7 +27448,7 @@
           <p:cNvPr id="4" name="28">
             <a:extLst xmlns:a="http://schemas.openxmlformats.org/drawingml/2006/main">
               <a:ext uri="{FF2B5EF4-FFF2-40B4-BE49-F238E27FC236}">
-                <a16:creationId xmlns:a16="http://schemas.microsoft.com/office/drawing/2014/main" id="{ADC13EBB-DDCE-42BD-ABFC-E6476070C8E3}"/>
+                <a16:creationId xmlns:a16="http://schemas.microsoft.com/office/drawing/2014/main" id="{9176F422-D21C-4EC7-8B0F-21628F6DAB19}"/>
               </a:ext>
             </a:extLst>
           </p:cNvPr>
@@ -27677,7 +27677,7 @@
           <p:cNvPr id="6" name="Haalbaar: minstens 60 transacties mogelijk; verruiming kost niets">
             <a:extLst xmlns:a="http://schemas.openxmlformats.org/drawingml/2006/main">
               <a:ext uri="{FF2B5EF4-FFF2-40B4-BE49-F238E27FC236}">
-                <a16:creationId xmlns:a16="http://schemas.microsoft.com/office/drawing/2014/main" id="{A62B3E11-B50E-4804-99B4-3CFA977975E3}"/>
+                <a16:creationId xmlns:a16="http://schemas.microsoft.com/office/drawing/2014/main" id="{02512B17-399F-4892-B355-5F63DED6606E}"/>
               </a:ext>
             </a:extLst>
           </p:cNvPr>
@@ -27734,7 +27734,7 @@
           <p:cNvPr id="7" name="Niemand slechter af: prijs en bestaande transacties blijven gelij">
             <a:extLst xmlns:a="http://schemas.openxmlformats.org/drawingml/2006/main">
               <a:ext uri="{FF2B5EF4-FFF2-40B4-BE49-F238E27FC236}">
-                <a16:creationId xmlns:a16="http://schemas.microsoft.com/office/drawing/2014/main" id="{4C835B41-3D49-4B62-88B0-77A593A84861}"/>
+                <a16:creationId xmlns:a16="http://schemas.microsoft.com/office/drawing/2014/main" id="{CF0644E6-1037-48A0-988B-185575037E36}"/>
               </a:ext>
             </a:extLst>
           </p:cNvPr>
@@ -27791,7 +27791,7 @@
           <p:cNvPr id="8" name="Er is een Paretoverbetering. 40 transacties zijn niet Pareto-effi">
             <a:extLst xmlns:a="http://schemas.openxmlformats.org/drawingml/2006/main">
               <a:ext uri="{FF2B5EF4-FFF2-40B4-BE49-F238E27FC236}">
-                <a16:creationId xmlns:a16="http://schemas.microsoft.com/office/drawing/2014/main" id="{C0E4A10A-3A02-4AF4-B65E-EBC318193915}"/>
+                <a16:creationId xmlns:a16="http://schemas.microsoft.com/office/drawing/2014/main" id="{D93991D3-3374-4556-A01A-E52B04C92B90}"/>
               </a:ext>
             </a:extLst>
           </p:cNvPr>
@@ -27846,7 +27846,7 @@
     </p:spTree>
     <p:extLst>
       <p:ext uri="{BB962C8B-B14F-4D97-AF65-F5344CB8AC3E}">
-        <p14:creationId xmlns:p14="http://schemas.microsoft.com/office/powerpoint/2010/main" val="618294561"/>
+        <p14:creationId xmlns:p14="http://schemas.microsoft.com/office/powerpoint/2010/main" val="966487922"/>
       </p:ext>
     </p:extLst>
   </p:cSld>
@@ -27877,7 +27877,7 @@
           <p:cNvPr id="9" name="Opgave 6f: efficiëntie en eerlijkheid">
             <a:extLst xmlns:a="http://schemas.openxmlformats.org/drawingml/2006/main">
               <a:ext uri="{FF2B5EF4-FFF2-40B4-BE49-F238E27FC236}">
-                <a16:creationId xmlns:a16="http://schemas.microsoft.com/office/drawing/2014/main" id="{C13C29C8-FBCE-450B-BF57-88782AB1753B}"/>
+                <a16:creationId xmlns:a16="http://schemas.microsoft.com/office/drawing/2014/main" id="{3967609F-852B-4926-BFE4-2E06E8FA4647}"/>
               </a:ext>
             </a:extLst>
           </p:cNvPr>
@@ -27934,7 +27934,7 @@
           <p:cNvPr id="2" name="">
             <a:extLst xmlns:a="http://schemas.openxmlformats.org/drawingml/2006/main">
               <a:ext uri="{FF2B5EF4-FFF2-40B4-BE49-F238E27FC236}">
-                <a16:creationId xmlns:a16="http://schemas.microsoft.com/office/drawing/2014/main" id="{D72ADCCF-E082-45FC-9B60-AC997F642365}"/>
+                <a16:creationId xmlns:a16="http://schemas.microsoft.com/office/drawing/2014/main" id="{FEC26FC4-0ACD-4055-8869-3FD91B59FB01}"/>
               </a:ext>
             </a:extLst>
           </p:cNvPr>
@@ -27963,7 +27963,7 @@
           <p:cNvPr id="3" name="§2.3.3 Pareto-efficiëntie en welvaartsverlies · Opgave 6 · Boekpa">
             <a:extLst xmlns:a="http://schemas.openxmlformats.org/drawingml/2006/main">
               <a:ext uri="{FF2B5EF4-FFF2-40B4-BE49-F238E27FC236}">
-                <a16:creationId xmlns:a16="http://schemas.microsoft.com/office/drawing/2014/main" id="{DF83979D-2720-432D-A724-F79363E86AEB}"/>
+                <a16:creationId xmlns:a16="http://schemas.microsoft.com/office/drawing/2014/main" id="{C3E73B0A-58BC-42A1-A1B6-9297AE250CD4}"/>
               </a:ext>
             </a:extLst>
           </p:cNvPr>
@@ -28010,7 +28010,7 @@
                 <a:ea typeface="Arial"/>
                 <a:cs typeface="Arial"/>
               </a:rPr>
-              <a:t>§2.3.3 Pareto-efficiëntie en welvaartsverlies · Opgave 6 · Boekpagina 99–100</a:t>
+              <a:t>§2.3.3 Pareto-efficiëntie en welvaartsverlies · Opgave 6 · Boekpagina 100–101</a:t>
             </a:r>
           </a:p>
         </p:txBody>
@@ -28020,7 +28020,7 @@
           <p:cNvPr id="4" name="29">
             <a:extLst xmlns:a="http://schemas.openxmlformats.org/drawingml/2006/main">
               <a:ext uri="{FF2B5EF4-FFF2-40B4-BE49-F238E27FC236}">
-                <a16:creationId xmlns:a16="http://schemas.microsoft.com/office/drawing/2014/main" id="{D65D3FB3-679E-40EB-B065-E24BFD0E7CC7}"/>
+                <a16:creationId xmlns:a16="http://schemas.microsoft.com/office/drawing/2014/main" id="{32B10C6F-699E-4A8C-B93F-442D06822C38}"/>
               </a:ext>
             </a:extLst>
           </p:cNvPr>
@@ -28395,7 +28395,7 @@
           <p:cNvPr id="6" name="Een groter TS zegt hoeveel voordeel er samen is.&#10;Pareto-efficiënt">
             <a:extLst xmlns:a="http://schemas.openxmlformats.org/drawingml/2006/main">
               <a:ext uri="{FF2B5EF4-FFF2-40B4-BE49-F238E27FC236}">
-                <a16:creationId xmlns:a16="http://schemas.microsoft.com/office/drawing/2014/main" id="{E7F462C9-2CCE-4A6D-99BF-3B2AF6C59C25}"/>
+                <a16:creationId xmlns:a16="http://schemas.microsoft.com/office/drawing/2014/main" id="{BA912D18-2BD3-49DF-A2C5-E32965DC84D7}"/>
               </a:ext>
             </a:extLst>
           </p:cNvPr>
@@ -28475,7 +28475,7 @@
           <p:cNvPr id="7" name="Geen van beide bepaalt wie welk voordeel hoort te krijgen.">
             <a:extLst xmlns:a="http://schemas.openxmlformats.org/drawingml/2006/main">
               <a:ext uri="{FF2B5EF4-FFF2-40B4-BE49-F238E27FC236}">
-                <a16:creationId xmlns:a16="http://schemas.microsoft.com/office/drawing/2014/main" id="{7D1FDF65-B02D-4004-96AA-A095BBDB978C}"/>
+                <a16:creationId xmlns:a16="http://schemas.microsoft.com/office/drawing/2014/main" id="{AC283140-3EA3-404D-BD82-658B249A7C86}"/>
               </a:ext>
             </a:extLst>
           </p:cNvPr>
@@ -28532,7 +28532,7 @@
           <p:cNvPr id="8" name="Wat eerlijk is, vraagt een afzonderlijk waardeoordeel.">
             <a:extLst xmlns:a="http://schemas.openxmlformats.org/drawingml/2006/main">
               <a:ext uri="{FF2B5EF4-FFF2-40B4-BE49-F238E27FC236}">
-                <a16:creationId xmlns:a16="http://schemas.microsoft.com/office/drawing/2014/main" id="{010E7293-FF67-4ACD-A399-CDE19306A4AC}"/>
+                <a16:creationId xmlns:a16="http://schemas.microsoft.com/office/drawing/2014/main" id="{1BE47FBB-42AB-47DB-8CAC-561BDB937A5A}"/>
               </a:ext>
             </a:extLst>
           </p:cNvPr>
@@ -28587,7 +28587,7 @@
     </p:spTree>
     <p:extLst>
       <p:ext uri="{BB962C8B-B14F-4D97-AF65-F5344CB8AC3E}">
-        <p14:creationId xmlns:p14="http://schemas.microsoft.com/office/powerpoint/2010/main" val="1952960812"/>
+        <p14:creationId xmlns:p14="http://schemas.microsoft.com/office/powerpoint/2010/main" val="389626159"/>
       </p:ext>
     </p:extLst>
   </p:cSld>
@@ -28618,7 +28618,7 @@
           <p:cNvPr id="9" name="Rondvaartplaatsen: de markt en de boekingsregel">
             <a:extLst xmlns:a="http://schemas.openxmlformats.org/drawingml/2006/main">
               <a:ext uri="{FF2B5EF4-FFF2-40B4-BE49-F238E27FC236}">
-                <a16:creationId xmlns:a16="http://schemas.microsoft.com/office/drawing/2014/main" id="{D2E1F9EB-C7E2-4AF8-9DBE-C00B25ED7ED4}"/>
+                <a16:creationId xmlns:a16="http://schemas.microsoft.com/office/drawing/2014/main" id="{921B771F-9E23-4A61-B9CF-E38946C959D5}"/>
               </a:ext>
             </a:extLst>
           </p:cNvPr>
@@ -28675,7 +28675,7 @@
           <p:cNvPr id="2" name="">
             <a:extLst xmlns:a="http://schemas.openxmlformats.org/drawingml/2006/main">
               <a:ext uri="{FF2B5EF4-FFF2-40B4-BE49-F238E27FC236}">
-                <a16:creationId xmlns:a16="http://schemas.microsoft.com/office/drawing/2014/main" id="{CE5091BE-BFB0-49D2-A2DB-C4EF80BF5992}"/>
+                <a16:creationId xmlns:a16="http://schemas.microsoft.com/office/drawing/2014/main" id="{4159291E-A306-45D1-9524-DC74070AAB16}"/>
               </a:ext>
             </a:extLst>
           </p:cNvPr>
@@ -28704,7 +28704,7 @@
           <p:cNvPr id="3" name="§2.3.3 Pareto-efficiëntie en welvaartsverlies">
             <a:extLst xmlns:a="http://schemas.openxmlformats.org/drawingml/2006/main">
               <a:ext uri="{FF2B5EF4-FFF2-40B4-BE49-F238E27FC236}">
-                <a16:creationId xmlns:a16="http://schemas.microsoft.com/office/drawing/2014/main" id="{72BA0F7B-6E43-4993-9892-9AB31930298A}"/>
+                <a16:creationId xmlns:a16="http://schemas.microsoft.com/office/drawing/2014/main" id="{7B258840-5750-4BBB-BE12-31A74AFD0A64}"/>
               </a:ext>
             </a:extLst>
           </p:cNvPr>
@@ -28761,7 +28761,7 @@
           <p:cNvPr id="4" name="3">
             <a:extLst xmlns:a="http://schemas.openxmlformats.org/drawingml/2006/main">
               <a:ext uri="{FF2B5EF4-FFF2-40B4-BE49-F238E27FC236}">
-                <a16:creationId xmlns:a16="http://schemas.microsoft.com/office/drawing/2014/main" id="{C58A0681-76E4-4CAA-AA10-DA3C23EAC0AD}"/>
+                <a16:creationId xmlns:a16="http://schemas.microsoft.com/office/drawing/2014/main" id="{9681DA79-E3DB-4013-AEE7-19DA88311A58}"/>
               </a:ext>
             </a:extLst>
           </p:cNvPr>
@@ -28818,7 +28818,7 @@
           <p:cNvPr id="5" name="Uitlegvoorbeeld — niet uit het boek">
             <a:extLst xmlns:a="http://schemas.openxmlformats.org/drawingml/2006/main">
               <a:ext uri="{FF2B5EF4-FFF2-40B4-BE49-F238E27FC236}">
-                <a16:creationId xmlns:a16="http://schemas.microsoft.com/office/drawing/2014/main" id="{13532B3F-8151-4258-849E-BAAD04876C2D}"/>
+                <a16:creationId xmlns:a16="http://schemas.microsoft.com/office/drawing/2014/main" id="{214C656A-8BFD-4AF2-9BBF-00D1E4DA0524}"/>
               </a:ext>
             </a:extLst>
           </p:cNvPr>
@@ -29097,7 +29097,7 @@
           <p:cNvPr id="7" name="P in euro per plaats. Q in plaatsen. Technisch zijn er minstens 4">
             <a:extLst xmlns:a="http://schemas.openxmlformats.org/drawingml/2006/main">
               <a:ext uri="{FF2B5EF4-FFF2-40B4-BE49-F238E27FC236}">
-                <a16:creationId xmlns:a16="http://schemas.microsoft.com/office/drawing/2014/main" id="{B890AC1C-DF7E-48CB-8DD3-674416E88FE6}"/>
+                <a16:creationId xmlns:a16="http://schemas.microsoft.com/office/drawing/2014/main" id="{91694964-0FC4-48A0-A44B-6E1AA0194734}"/>
               </a:ext>
             </a:extLst>
           </p:cNvPr>
@@ -29154,7 +29154,7 @@
           <p:cNvPr id="8" name="Kopers met de hoogste betalingsbereidheid kopen bij aanbieders me">
             <a:extLst xmlns:a="http://schemas.openxmlformats.org/drawingml/2006/main">
               <a:ext uri="{FF2B5EF4-FFF2-40B4-BE49-F238E27FC236}">
-                <a16:creationId xmlns:a16="http://schemas.microsoft.com/office/drawing/2014/main" id="{D93A229E-9011-4CB1-AE14-BB643AD06C80}"/>
+                <a16:creationId xmlns:a16="http://schemas.microsoft.com/office/drawing/2014/main" id="{27C6E2B4-F822-490D-A1DD-42F3453BE0FC}"/>
               </a:ext>
             </a:extLst>
           </p:cNvPr>
@@ -29232,7 +29232,7 @@
     </p:spTree>
     <p:extLst>
       <p:ext uri="{BB962C8B-B14F-4D97-AF65-F5344CB8AC3E}">
-        <p14:creationId xmlns:p14="http://schemas.microsoft.com/office/powerpoint/2010/main" val="1498029943"/>
+        <p14:creationId xmlns:p14="http://schemas.microsoft.com/office/powerpoint/2010/main" val="1264658784"/>
       </p:ext>
     </p:extLst>
   </p:cSld>
@@ -29263,7 +29263,7 @@
           <p:cNvPr id="29" name="Deze les: §2.3.3 Pareto-efficiëntie en welvaartsverlies">
             <a:extLst xmlns:a="http://schemas.openxmlformats.org/drawingml/2006/main">
               <a:ext uri="{FF2B5EF4-FFF2-40B4-BE49-F238E27FC236}">
-                <a16:creationId xmlns:a16="http://schemas.microsoft.com/office/drawing/2014/main" id="{94E3C7D5-1182-4822-9573-99547BA3D946}"/>
+                <a16:creationId xmlns:a16="http://schemas.microsoft.com/office/drawing/2014/main" id="{7DE06514-6301-4EF0-B189-E0A6E0197FEA}"/>
               </a:ext>
             </a:extLst>
           </p:cNvPr>
@@ -29320,7 +29320,7 @@
           <p:cNvPr id="2" name="">
             <a:extLst xmlns:a="http://schemas.openxmlformats.org/drawingml/2006/main">
               <a:ext uri="{FF2B5EF4-FFF2-40B4-BE49-F238E27FC236}">
-                <a16:creationId xmlns:a16="http://schemas.microsoft.com/office/drawing/2014/main" id="{1E36E075-0A36-41AD-AE8C-DC983D5640F6}"/>
+                <a16:creationId xmlns:a16="http://schemas.microsoft.com/office/drawing/2014/main" id="{5E83432B-001F-4C67-B4AF-3B09CC9E27B4}"/>
               </a:ext>
             </a:extLst>
           </p:cNvPr>
@@ -29349,7 +29349,7 @@
           <p:cNvPr id="3" name="§2.3.3 Pareto-efficiëntie en welvaartsverlies">
             <a:extLst xmlns:a="http://schemas.openxmlformats.org/drawingml/2006/main">
               <a:ext uri="{FF2B5EF4-FFF2-40B4-BE49-F238E27FC236}">
-                <a16:creationId xmlns:a16="http://schemas.microsoft.com/office/drawing/2014/main" id="{782A38B8-55D6-44DD-9885-A94E64BB858E}"/>
+                <a16:creationId xmlns:a16="http://schemas.microsoft.com/office/drawing/2014/main" id="{BA181EC4-30A8-46F3-98D5-477B87681698}"/>
               </a:ext>
             </a:extLst>
           </p:cNvPr>
@@ -29406,7 +29406,7 @@
           <p:cNvPr id="4" name="30">
             <a:extLst xmlns:a="http://schemas.openxmlformats.org/drawingml/2006/main">
               <a:ext uri="{FF2B5EF4-FFF2-40B4-BE49-F238E27FC236}">
-                <a16:creationId xmlns:a16="http://schemas.microsoft.com/office/drawing/2014/main" id="{56E1EBD3-5382-4431-AC1C-C5448B766876}"/>
+                <a16:creationId xmlns:a16="http://schemas.microsoft.com/office/drawing/2014/main" id="{886D15AD-0B2B-4F2E-80B9-446B187FC085}"/>
               </a:ext>
             </a:extLst>
           </p:cNvPr>
@@ -29463,7 +29463,7 @@
           <p:cNvPr id="5" name="phase">
             <a:extLst xmlns:a="http://schemas.openxmlformats.org/drawingml/2006/main">
               <a:ext uri="{FF2B5EF4-FFF2-40B4-BE49-F238E27FC236}">
-                <a16:creationId xmlns:a16="http://schemas.microsoft.com/office/drawing/2014/main" id="{06C57957-96B7-44FA-816C-1352701E8FDF}"/>
+                <a16:creationId xmlns:a16="http://schemas.microsoft.com/office/drawing/2014/main" id="{6B714975-9D71-4E81-A5F0-4FBEF99E3604}"/>
               </a:ext>
             </a:extLst>
           </p:cNvPr>
@@ -29520,7 +29520,7 @@
           <p:cNvPr id="6" name="Lesroute">
             <a:extLst xmlns:a="http://schemas.openxmlformats.org/drawingml/2006/main">
               <a:ext uri="{FF2B5EF4-FFF2-40B4-BE49-F238E27FC236}">
-                <a16:creationId xmlns:a16="http://schemas.microsoft.com/office/drawing/2014/main" id="{8326AB82-8506-4D82-991D-D53979293BDF}"/>
+                <a16:creationId xmlns:a16="http://schemas.microsoft.com/office/drawing/2014/main" id="{7FA4BEC5-A92B-4338-98AE-7B65CCBD1B5F}"/>
               </a:ext>
             </a:extLst>
           </p:cNvPr>
@@ -29577,7 +29577,7 @@
           <p:cNvPr id="7" name="route-number-1">
             <a:extLst xmlns:a="http://schemas.openxmlformats.org/drawingml/2006/main">
               <a:ext uri="{FF2B5EF4-FFF2-40B4-BE49-F238E27FC236}">
-                <a16:creationId xmlns:a16="http://schemas.microsoft.com/office/drawing/2014/main" id="{5826D294-8470-40F7-A574-31CA1B664D0D}"/>
+                <a16:creationId xmlns:a16="http://schemas.microsoft.com/office/drawing/2014/main" id="{8C55B50C-FEE1-4D58-B12E-DA7BA00DF6F8}"/>
               </a:ext>
             </a:extLst>
           </p:cNvPr>
@@ -29634,7 +29634,7 @@
           <p:cNvPr id="8" name="route-1">
             <a:extLst xmlns:a="http://schemas.openxmlformats.org/drawingml/2006/main">
               <a:ext uri="{FF2B5EF4-FFF2-40B4-BE49-F238E27FC236}">
-                <a16:creationId xmlns:a16="http://schemas.microsoft.com/office/drawing/2014/main" id="{C6DE411B-4C5C-43CC-AC45-CC6B9F3CCA12}"/>
+                <a16:creationId xmlns:a16="http://schemas.microsoft.com/office/drawing/2014/main" id="{99ED3786-719A-44BE-836B-5E89D067BC2F}"/>
               </a:ext>
             </a:extLst>
           </p:cNvPr>
@@ -29691,7 +29691,7 @@
           <p:cNvPr id="9" name="route-number-2">
             <a:extLst xmlns:a="http://schemas.openxmlformats.org/drawingml/2006/main">
               <a:ext uri="{FF2B5EF4-FFF2-40B4-BE49-F238E27FC236}">
-                <a16:creationId xmlns:a16="http://schemas.microsoft.com/office/drawing/2014/main" id="{2BEE53A3-5764-4531-B525-56D871EC130C}"/>
+                <a16:creationId xmlns:a16="http://schemas.microsoft.com/office/drawing/2014/main" id="{22C85DBB-E1FC-4416-903F-EB2C952DCE8D}"/>
               </a:ext>
             </a:extLst>
           </p:cNvPr>
@@ -29748,7 +29748,7 @@
           <p:cNvPr id="10" name="route-2">
             <a:extLst xmlns:a="http://schemas.openxmlformats.org/drawingml/2006/main">
               <a:ext uri="{FF2B5EF4-FFF2-40B4-BE49-F238E27FC236}">
-                <a16:creationId xmlns:a16="http://schemas.microsoft.com/office/drawing/2014/main" id="{532C3601-8237-4E7F-AD2B-C7169A734AC8}"/>
+                <a16:creationId xmlns:a16="http://schemas.microsoft.com/office/drawing/2014/main" id="{DE6538F6-DDA4-4E87-B827-0D2283068776}"/>
               </a:ext>
             </a:extLst>
           </p:cNvPr>
@@ -29805,7 +29805,7 @@
           <p:cNvPr id="11" name="route-number-3">
             <a:extLst xmlns:a="http://schemas.openxmlformats.org/drawingml/2006/main">
               <a:ext uri="{FF2B5EF4-FFF2-40B4-BE49-F238E27FC236}">
-                <a16:creationId xmlns:a16="http://schemas.microsoft.com/office/drawing/2014/main" id="{91AD5879-74B4-4A6A-A2FF-5A613B6CE371}"/>
+                <a16:creationId xmlns:a16="http://schemas.microsoft.com/office/drawing/2014/main" id="{2E8C2B85-D5D7-4CBB-A596-C76E6D0FCC3A}"/>
               </a:ext>
             </a:extLst>
           </p:cNvPr>
@@ -29862,7 +29862,7 @@
           <p:cNvPr id="12" name="route-3">
             <a:extLst xmlns:a="http://schemas.openxmlformats.org/drawingml/2006/main">
               <a:ext uri="{FF2B5EF4-FFF2-40B4-BE49-F238E27FC236}">
-                <a16:creationId xmlns:a16="http://schemas.microsoft.com/office/drawing/2014/main" id="{24C36599-E328-44B0-8E49-AFEFA22D2D3D}"/>
+                <a16:creationId xmlns:a16="http://schemas.microsoft.com/office/drawing/2014/main" id="{7C33C617-DB4F-4401-B9CC-BF9C2F5D21B4}"/>
               </a:ext>
             </a:extLst>
           </p:cNvPr>
@@ -29919,7 +29919,7 @@
           <p:cNvPr id="13" name="route-number-4">
             <a:extLst xmlns:a="http://schemas.openxmlformats.org/drawingml/2006/main">
               <a:ext uri="{FF2B5EF4-FFF2-40B4-BE49-F238E27FC236}">
-                <a16:creationId xmlns:a16="http://schemas.microsoft.com/office/drawing/2014/main" id="{741215C8-D476-4399-82DE-B65238BC2A6D}"/>
+                <a16:creationId xmlns:a16="http://schemas.microsoft.com/office/drawing/2014/main" id="{BB764DC0-C077-4E54-A1DB-BCDF86AF7961}"/>
               </a:ext>
             </a:extLst>
           </p:cNvPr>
@@ -29976,7 +29976,7 @@
           <p:cNvPr id="14" name="route-4">
             <a:extLst xmlns:a="http://schemas.openxmlformats.org/drawingml/2006/main">
               <a:ext uri="{FF2B5EF4-FFF2-40B4-BE49-F238E27FC236}">
-                <a16:creationId xmlns:a16="http://schemas.microsoft.com/office/drawing/2014/main" id="{1C9B29A8-2361-4EF9-BAA0-5E6A845B3091}"/>
+                <a16:creationId xmlns:a16="http://schemas.microsoft.com/office/drawing/2014/main" id="{C9F9B838-D0F1-4618-AE13-1CC68D043CFF}"/>
               </a:ext>
             </a:extLst>
           </p:cNvPr>
@@ -30033,7 +30033,7 @@
           <p:cNvPr id="15" name="route-number-5">
             <a:extLst xmlns:a="http://schemas.openxmlformats.org/drawingml/2006/main">
               <a:ext uri="{FF2B5EF4-FFF2-40B4-BE49-F238E27FC236}">
-                <a16:creationId xmlns:a16="http://schemas.microsoft.com/office/drawing/2014/main" id="{65CEF95D-E73A-4D17-B30B-EE79DBCA2E8C}"/>
+                <a16:creationId xmlns:a16="http://schemas.microsoft.com/office/drawing/2014/main" id="{519281EF-B430-4253-BA45-07F4E2F8C788}"/>
               </a:ext>
             </a:extLst>
           </p:cNvPr>
@@ -30090,7 +30090,7 @@
           <p:cNvPr id="16" name="route-5">
             <a:extLst xmlns:a="http://schemas.openxmlformats.org/drawingml/2006/main">
               <a:ext uri="{FF2B5EF4-FFF2-40B4-BE49-F238E27FC236}">
-                <a16:creationId xmlns:a16="http://schemas.microsoft.com/office/drawing/2014/main" id="{98C3F097-03FE-44D6-B432-BB20BCC44A3C}"/>
+                <a16:creationId xmlns:a16="http://schemas.microsoft.com/office/drawing/2014/main" id="{658D8747-B1AD-4EEA-A22D-798CB0538989}"/>
               </a:ext>
             </a:extLst>
           </p:cNvPr>
@@ -30147,7 +30147,7 @@
           <p:cNvPr id="17" name="route-number-6">
             <a:extLst xmlns:a="http://schemas.openxmlformats.org/drawingml/2006/main">
               <a:ext uri="{FF2B5EF4-FFF2-40B4-BE49-F238E27FC236}">
-                <a16:creationId xmlns:a16="http://schemas.microsoft.com/office/drawing/2014/main" id="{96C6918F-1BF4-4422-A155-789CC30BBE84}"/>
+                <a16:creationId xmlns:a16="http://schemas.microsoft.com/office/drawing/2014/main" id="{5BD40E3F-A831-498F-A8B3-2064A7BD3CD7}"/>
               </a:ext>
             </a:extLst>
           </p:cNvPr>
@@ -30204,7 +30204,7 @@
           <p:cNvPr id="18" name="route-6">
             <a:extLst xmlns:a="http://schemas.openxmlformats.org/drawingml/2006/main">
               <a:ext uri="{FF2B5EF4-FFF2-40B4-BE49-F238E27FC236}">
-                <a16:creationId xmlns:a16="http://schemas.microsoft.com/office/drawing/2014/main" id="{FEF95EB2-C6EF-49DD-8ED3-DDF046292C87}"/>
+                <a16:creationId xmlns:a16="http://schemas.microsoft.com/office/drawing/2014/main" id="{F1FE276A-AAEE-4C69-AEC2-C489F8042ED1}"/>
               </a:ext>
             </a:extLst>
           </p:cNvPr>
@@ -30261,7 +30261,7 @@
           <p:cNvPr id="19" name="route-number-7">
             <a:extLst xmlns:a="http://schemas.openxmlformats.org/drawingml/2006/main">
               <a:ext uri="{FF2B5EF4-FFF2-40B4-BE49-F238E27FC236}">
-                <a16:creationId xmlns:a16="http://schemas.microsoft.com/office/drawing/2014/main" id="{C30334A8-4432-481F-A609-849C603B9A56}"/>
+                <a16:creationId xmlns:a16="http://schemas.microsoft.com/office/drawing/2014/main" id="{83F08940-3E3B-45C5-870E-F300948A94D3}"/>
               </a:ext>
             </a:extLst>
           </p:cNvPr>
@@ -30318,7 +30318,7 @@
           <p:cNvPr id="20" name="route-7">
             <a:extLst xmlns:a="http://schemas.openxmlformats.org/drawingml/2006/main">
               <a:ext uri="{FF2B5EF4-FFF2-40B4-BE49-F238E27FC236}">
-                <a16:creationId xmlns:a16="http://schemas.microsoft.com/office/drawing/2014/main" id="{4D7ACBCA-F960-4B1F-B68E-B85ECE9CF2FE}"/>
+                <a16:creationId xmlns:a16="http://schemas.microsoft.com/office/drawing/2014/main" id="{CD41D11A-9456-4052-BBA7-6118EC8E5FD6}"/>
               </a:ext>
             </a:extLst>
           </p:cNvPr>
@@ -30375,7 +30375,7 @@
           <p:cNvPr id="21" name="Lesdoelen">
             <a:extLst xmlns:a="http://schemas.openxmlformats.org/drawingml/2006/main">
               <a:ext uri="{FF2B5EF4-FFF2-40B4-BE49-F238E27FC236}">
-                <a16:creationId xmlns:a16="http://schemas.microsoft.com/office/drawing/2014/main" id="{670C8F8D-F543-4E82-9828-87B7F4537354}"/>
+                <a16:creationId xmlns:a16="http://schemas.microsoft.com/office/drawing/2014/main" id="{2855AFF8-68EA-40B5-B7A3-B150AD6E1169}"/>
               </a:ext>
             </a:extLst>
           </p:cNvPr>
@@ -30432,7 +30432,7 @@
           <p:cNvPr id="22" name="overview-goals">
             <a:extLst xmlns:a="http://schemas.openxmlformats.org/drawingml/2006/main">
               <a:ext uri="{FF2B5EF4-FFF2-40B4-BE49-F238E27FC236}">
-                <a16:creationId xmlns:a16="http://schemas.microsoft.com/office/drawing/2014/main" id="{C62D27CD-5372-4326-8A41-6AED9563C41F}"/>
+                <a16:creationId xmlns:a16="http://schemas.microsoft.com/office/drawing/2014/main" id="{0D9BA552-EE24-4B87-8C85-48025A4AD036}"/>
               </a:ext>
             </a:extLst>
           </p:cNvPr>
@@ -30535,7 +30535,7 @@
           <p:cNvPr id="23" name="">
             <a:extLst xmlns:a="http://schemas.openxmlformats.org/drawingml/2006/main">
               <a:ext uri="{FF2B5EF4-FFF2-40B4-BE49-F238E27FC236}">
-                <a16:creationId xmlns:a16="http://schemas.microsoft.com/office/drawing/2014/main" id="{A0BB8CE9-BEC3-4DE7-B9D9-07CFFFFEB9B4}"/>
+                <a16:creationId xmlns:a16="http://schemas.microsoft.com/office/drawing/2014/main" id="{C26A876B-26C7-41ED-AA4F-979D587B6565}"/>
               </a:ext>
             </a:extLst>
           </p:cNvPr>
@@ -30564,7 +30564,7 @@
           <p:cNvPr id="24" name="Startopdracht">
             <a:extLst xmlns:a="http://schemas.openxmlformats.org/drawingml/2006/main">
               <a:ext uri="{FF2B5EF4-FFF2-40B4-BE49-F238E27FC236}">
-                <a16:creationId xmlns:a16="http://schemas.microsoft.com/office/drawing/2014/main" id="{AA3DC4F2-18DA-48F1-9E45-38BD908B408A}"/>
+                <a16:creationId xmlns:a16="http://schemas.microsoft.com/office/drawing/2014/main" id="{303698AA-E027-4C0B-B25E-EA6E55003D77}"/>
               </a:ext>
             </a:extLst>
           </p:cNvPr>
@@ -30621,7 +30621,7 @@
           <p:cNvPr id="25" name="overview-start">
             <a:extLst xmlns:a="http://schemas.openxmlformats.org/drawingml/2006/main">
               <a:ext uri="{FF2B5EF4-FFF2-40B4-BE49-F238E27FC236}">
-                <a16:creationId xmlns:a16="http://schemas.microsoft.com/office/drawing/2014/main" id="{84BA72FB-FC57-4B27-B4BD-12085C66FFD4}"/>
+                <a16:creationId xmlns:a16="http://schemas.microsoft.com/office/drawing/2014/main" id="{0B803C88-6C11-4F55-A6E9-DC725C205AED}"/>
               </a:ext>
             </a:extLst>
           </p:cNvPr>
@@ -30668,7 +30668,7 @@
                 <a:ea typeface="Arial"/>
                 <a:cs typeface="Arial"/>
               </a:rPr>
-              <a:t>Pagina 96 · Opgaven 1 en 2</a:t>
+              <a:t>Pagina 97 · Opgaven 1 en 2</a:t>
             </a:r>
           </a:p>
           <a:p xmlns:a="http://schemas.openxmlformats.org/drawingml/2006/main">
@@ -30691,7 +30691,7 @@
                 <a:ea typeface="Arial"/>
                 <a:cs typeface="Arial"/>
               </a:rPr>
-              <a:t>2: verkennen met theorie p. 93</a:t>
+              <a:t>2: verkennen met theorie p. 94</a:t>
             </a:r>
           </a:p>
         </p:txBody>
@@ -30701,7 +30701,7 @@
           <p:cNvPr id="26" name="">
             <a:extLst xmlns:a="http://schemas.openxmlformats.org/drawingml/2006/main">
               <a:ext uri="{FF2B5EF4-FFF2-40B4-BE49-F238E27FC236}">
-                <a16:creationId xmlns:a16="http://schemas.microsoft.com/office/drawing/2014/main" id="{752A6F9F-8DC6-4243-9D67-01F990CEEBF1}"/>
+                <a16:creationId xmlns:a16="http://schemas.microsoft.com/office/drawing/2014/main" id="{CFB665ED-7F5E-47BC-9681-C7B5D9CCE381}"/>
               </a:ext>
             </a:extLst>
           </p:cNvPr>
@@ -30730,7 +30730,7 @@
           <p:cNvPr id="27" name="Huiswerk">
             <a:extLst xmlns:a="http://schemas.openxmlformats.org/drawingml/2006/main">
               <a:ext uri="{FF2B5EF4-FFF2-40B4-BE49-F238E27FC236}">
-                <a16:creationId xmlns:a16="http://schemas.microsoft.com/office/drawing/2014/main" id="{0112EB02-212F-4D04-955A-82824F1CC5D6}"/>
+                <a16:creationId xmlns:a16="http://schemas.microsoft.com/office/drawing/2014/main" id="{78324738-4CDD-425D-A602-83AEC75BF88C}"/>
               </a:ext>
             </a:extLst>
           </p:cNvPr>
@@ -30787,7 +30787,7 @@
           <p:cNvPr id="28" name="overview-homework">
             <a:extLst xmlns:a="http://schemas.openxmlformats.org/drawingml/2006/main">
               <a:ext uri="{FF2B5EF4-FFF2-40B4-BE49-F238E27FC236}">
-                <a16:creationId xmlns:a16="http://schemas.microsoft.com/office/drawing/2014/main" id="{A9703BFA-1C0E-48A4-A70C-7019347D3BDF}"/>
+                <a16:creationId xmlns:a16="http://schemas.microsoft.com/office/drawing/2014/main" id="{73F8297D-6539-4F55-8049-8D18862A4711}"/>
               </a:ext>
             </a:extLst>
           </p:cNvPr>
@@ -30911,7 +30911,7 @@
     </p:spTree>
     <p:extLst>
       <p:ext uri="{BB962C8B-B14F-4D97-AF65-F5344CB8AC3E}">
-        <p14:creationId xmlns:p14="http://schemas.microsoft.com/office/powerpoint/2010/main" val="322797702"/>
+        <p14:creationId xmlns:p14="http://schemas.microsoft.com/office/powerpoint/2010/main" val="903034166"/>
       </p:ext>
     </p:extLst>
   </p:cSld>
@@ -30942,7 +30942,7 @@
           <p:cNvPr id="13" name="Vrij evenwicht: twee surplusdriehoeken">
             <a:extLst xmlns:a="http://schemas.openxmlformats.org/drawingml/2006/main">
               <a:ext uri="{FF2B5EF4-FFF2-40B4-BE49-F238E27FC236}">
-                <a16:creationId xmlns:a16="http://schemas.microsoft.com/office/drawing/2014/main" id="{59EAECA8-2DCA-49C3-9B98-22F0BC8FA3F5}"/>
+                <a16:creationId xmlns:a16="http://schemas.microsoft.com/office/drawing/2014/main" id="{53473F8B-C6E3-445B-898B-3E10DB78041A}"/>
               </a:ext>
             </a:extLst>
           </p:cNvPr>
@@ -30999,7 +30999,7 @@
           <p:cNvPr id="2" name="">
             <a:extLst xmlns:a="http://schemas.openxmlformats.org/drawingml/2006/main">
               <a:ext uri="{FF2B5EF4-FFF2-40B4-BE49-F238E27FC236}">
-                <a16:creationId xmlns:a16="http://schemas.microsoft.com/office/drawing/2014/main" id="{3C77F32B-BB3D-4DB3-B0F5-5A8325B425B7}"/>
+                <a16:creationId xmlns:a16="http://schemas.microsoft.com/office/drawing/2014/main" id="{83DE253C-D067-4D02-9F17-FCF1786907A8}"/>
               </a:ext>
             </a:extLst>
           </p:cNvPr>
@@ -31028,7 +31028,7 @@
           <p:cNvPr id="3" name="§2.3.3 Pareto-efficiëntie en welvaartsverlies">
             <a:extLst xmlns:a="http://schemas.openxmlformats.org/drawingml/2006/main">
               <a:ext uri="{FF2B5EF4-FFF2-40B4-BE49-F238E27FC236}">
-                <a16:creationId xmlns:a16="http://schemas.microsoft.com/office/drawing/2014/main" id="{47FA138A-2FA0-415E-AD5C-FE18F1B4487A}"/>
+                <a16:creationId xmlns:a16="http://schemas.microsoft.com/office/drawing/2014/main" id="{C67B0188-CFB7-49C2-9DC8-461B71F5DE13}"/>
               </a:ext>
             </a:extLst>
           </p:cNvPr>
@@ -31085,7 +31085,7 @@
           <p:cNvPr id="4" name="4">
             <a:extLst xmlns:a="http://schemas.openxmlformats.org/drawingml/2006/main">
               <a:ext uri="{FF2B5EF4-FFF2-40B4-BE49-F238E27FC236}">
-                <a16:creationId xmlns:a16="http://schemas.microsoft.com/office/drawing/2014/main" id="{19296D53-AD8F-444E-AD1C-99FA2BEC92A8}"/>
+                <a16:creationId xmlns:a16="http://schemas.microsoft.com/office/drawing/2014/main" id="{8D0B75C5-2200-40DA-BF40-3E61C35BEA6A}"/>
               </a:ext>
             </a:extLst>
           </p:cNvPr>
@@ -31142,7 +31142,7 @@
           <p:cNvPr id="5" name="Uitlegvoorbeeld — niet uit het boek">
             <a:extLst xmlns:a="http://schemas.openxmlformats.org/drawingml/2006/main">
               <a:ext uri="{FF2B5EF4-FFF2-40B4-BE49-F238E27FC236}">
-                <a16:creationId xmlns:a16="http://schemas.microsoft.com/office/drawing/2014/main" id="{F1C479AE-0D9A-4186-B26D-49603B1E0065}"/>
+                <a16:creationId xmlns:a16="http://schemas.microsoft.com/office/drawing/2014/main" id="{8C32D58C-6C16-47EB-B710-FE9A877E548F}"/>
               </a:ext>
             </a:extLst>
           </p:cNvPr>
@@ -31199,7 +31199,7 @@
           <p:cNvPr id="6" name="CS vrije markt">
             <a:extLst xmlns:a="http://schemas.openxmlformats.org/drawingml/2006/main">
               <a:ext uri="{FF2B5EF4-FFF2-40B4-BE49-F238E27FC236}">
-                <a16:creationId xmlns:a16="http://schemas.microsoft.com/office/drawing/2014/main" id="{FB8BBF1F-CB61-4469-A807-E1E1BDEE77CB}"/>
+                <a16:creationId xmlns:a16="http://schemas.microsoft.com/office/drawing/2014/main" id="{EC67F77F-139A-46E8-B51E-EC7A78B04CCF}"/>
               </a:ext>
             </a:extLst>
           </p:cNvPr>
@@ -31242,7 +31242,7 @@
           <p:cNvPr id="7" name="PS vrije markt">
             <a:extLst xmlns:a="http://schemas.openxmlformats.org/drawingml/2006/main">
               <a:ext uri="{FF2B5EF4-FFF2-40B4-BE49-F238E27FC236}">
-                <a16:creationId xmlns:a16="http://schemas.microsoft.com/office/drawing/2014/main" id="{661D60A9-CF6E-4E22-B2BF-0472677EB5BA}"/>
+                <a16:creationId xmlns:a16="http://schemas.microsoft.com/office/drawing/2014/main" id="{BB1ACE76-EFC1-445B-98E4-245FB19AD864}"/>
               </a:ext>
             </a:extLst>
           </p:cNvPr>
@@ -31292,7 +31292,7 @@
         </p:xfrm>
         <a:graphic xmlns:a="http://schemas.openxmlformats.org/drawingml/2006/main">
           <a:graphicData uri="http://schemas.openxmlformats.org/drawingml/2006/chart">
-            <c:chart xmlns:r="http://schemas.openxmlformats.org/officeDocument/2006/relationships" xmlns:c="http://schemas.openxmlformats.org/drawingml/2006/chart" r:id="R604c824d10394765"/>
+            <c:chart xmlns:r="http://schemas.openxmlformats.org/officeDocument/2006/relationships" xmlns:c="http://schemas.openxmlformats.org/drawingml/2006/chart" r:id="Ra64544d3ba424cf8"/>
           </a:graphicData>
         </a:graphic>
       </p:graphicFrame>
@@ -31301,7 +31301,7 @@
           <p:cNvPr id="9" name="36 − 0,5Q = 6 + 0,25Q&#10;30 = 0,75Q&#10;Qe = 40; Pe = € 16">
             <a:extLst xmlns:a="http://schemas.openxmlformats.org/drawingml/2006/main">
               <a:ext uri="{FF2B5EF4-FFF2-40B4-BE49-F238E27FC236}">
-                <a16:creationId xmlns:a16="http://schemas.microsoft.com/office/drawing/2014/main" id="{4C0093EF-FAD8-43BF-8678-DCE7FFF4076F}"/>
+                <a16:creationId xmlns:a16="http://schemas.microsoft.com/office/drawing/2014/main" id="{DE6B4DB6-4A86-41C6-962A-86C05DDB5F09}"/>
               </a:ext>
             </a:extLst>
           </p:cNvPr>
@@ -31404,7 +31404,7 @@
           <p:cNvPr id="10" name="CS = ½ × 40 × (36 − 16)&#10;= € 400">
             <a:extLst xmlns:a="http://schemas.openxmlformats.org/drawingml/2006/main">
               <a:ext uri="{FF2B5EF4-FFF2-40B4-BE49-F238E27FC236}">
-                <a16:creationId xmlns:a16="http://schemas.microsoft.com/office/drawing/2014/main" id="{019321AB-BC9B-48AE-894E-D93C3A56537F}"/>
+                <a16:creationId xmlns:a16="http://schemas.microsoft.com/office/drawing/2014/main" id="{0B714AC2-B095-4F0E-A501-DA8A40D4EBDE}"/>
               </a:ext>
             </a:extLst>
           </p:cNvPr>
@@ -31484,7 +31484,7 @@
           <p:cNvPr id="11" name="PS = ½ × 40 × (16 − 6)&#10;= € 200">
             <a:extLst xmlns:a="http://schemas.openxmlformats.org/drawingml/2006/main">
               <a:ext uri="{FF2B5EF4-FFF2-40B4-BE49-F238E27FC236}">
-                <a16:creationId xmlns:a16="http://schemas.microsoft.com/office/drawing/2014/main" id="{4A9D41DB-CA4A-40DC-925B-24551964AEE6}"/>
+                <a16:creationId xmlns:a16="http://schemas.microsoft.com/office/drawing/2014/main" id="{B366BDAE-A736-4319-92DB-B4F44DAB0EE7}"/>
               </a:ext>
             </a:extLst>
           </p:cNvPr>
@@ -31564,7 +31564,7 @@
           <p:cNvPr id="12" name="TS = 400 + 200 = € 600">
             <a:extLst xmlns:a="http://schemas.openxmlformats.org/drawingml/2006/main">
               <a:ext uri="{FF2B5EF4-FFF2-40B4-BE49-F238E27FC236}">
-                <a16:creationId xmlns:a16="http://schemas.microsoft.com/office/drawing/2014/main" id="{7DD650F1-922B-44A8-B464-E8B216E1167B}"/>
+                <a16:creationId xmlns:a16="http://schemas.microsoft.com/office/drawing/2014/main" id="{E87A7278-4486-4BAF-A772-BFE5E4A20B46}"/>
               </a:ext>
             </a:extLst>
           </p:cNvPr>
@@ -31619,7 +31619,7 @@
     </p:spTree>
     <p:extLst>
       <p:ext uri="{BB962C8B-B14F-4D97-AF65-F5344CB8AC3E}">
-        <p14:creationId xmlns:p14="http://schemas.microsoft.com/office/powerpoint/2010/main" val="344421064"/>
+        <p14:creationId xmlns:p14="http://schemas.microsoft.com/office/powerpoint/2010/main" val="774306179"/>
       </p:ext>
     </p:extLst>
   </p:cSld>
@@ -31650,7 +31650,7 @@
           <p:cNvPr id="8" name="Gevraagd, aangeboden en werkelijk geboekt">
             <a:extLst xmlns:a="http://schemas.openxmlformats.org/drawingml/2006/main">
               <a:ext uri="{FF2B5EF4-FFF2-40B4-BE49-F238E27FC236}">
-                <a16:creationId xmlns:a16="http://schemas.microsoft.com/office/drawing/2014/main" id="{107B657D-8F4D-43DD-8797-78882704986E}"/>
+                <a16:creationId xmlns:a16="http://schemas.microsoft.com/office/drawing/2014/main" id="{1C8C5612-C131-4A5F-B987-01F81F49DEB4}"/>
               </a:ext>
             </a:extLst>
           </p:cNvPr>
@@ -31707,7 +31707,7 @@
           <p:cNvPr id="2" name="">
             <a:extLst xmlns:a="http://schemas.openxmlformats.org/drawingml/2006/main">
               <a:ext uri="{FF2B5EF4-FFF2-40B4-BE49-F238E27FC236}">
-                <a16:creationId xmlns:a16="http://schemas.microsoft.com/office/drawing/2014/main" id="{8A405A6F-45C1-4EB4-8C7C-BE4834AD6736}"/>
+                <a16:creationId xmlns:a16="http://schemas.microsoft.com/office/drawing/2014/main" id="{1FE430A7-8242-4BD2-9A9C-7BFCF8C59B66}"/>
               </a:ext>
             </a:extLst>
           </p:cNvPr>
@@ -31736,7 +31736,7 @@
           <p:cNvPr id="3" name="§2.3.3 Pareto-efficiëntie en welvaartsverlies">
             <a:extLst xmlns:a="http://schemas.openxmlformats.org/drawingml/2006/main">
               <a:ext uri="{FF2B5EF4-FFF2-40B4-BE49-F238E27FC236}">
-                <a16:creationId xmlns:a16="http://schemas.microsoft.com/office/drawing/2014/main" id="{B7C7884F-D58F-4211-A45E-FA8BD3A9007C}"/>
+                <a16:creationId xmlns:a16="http://schemas.microsoft.com/office/drawing/2014/main" id="{1970F822-71FA-41F2-B747-639C44D9D901}"/>
               </a:ext>
             </a:extLst>
           </p:cNvPr>
@@ -31793,7 +31793,7 @@
           <p:cNvPr id="4" name="5">
             <a:extLst xmlns:a="http://schemas.openxmlformats.org/drawingml/2006/main">
               <a:ext uri="{FF2B5EF4-FFF2-40B4-BE49-F238E27FC236}">
-                <a16:creationId xmlns:a16="http://schemas.microsoft.com/office/drawing/2014/main" id="{199FE7BA-2089-40B2-AB3A-7453BBC7A50E}"/>
+                <a16:creationId xmlns:a16="http://schemas.microsoft.com/office/drawing/2014/main" id="{B45049E4-83DB-43BF-B527-76232A72DC8B}"/>
               </a:ext>
             </a:extLst>
           </p:cNvPr>
@@ -31850,7 +31850,7 @@
           <p:cNvPr id="5" name="Uitlegvoorbeeld — niet uit het boek">
             <a:extLst xmlns:a="http://schemas.openxmlformats.org/drawingml/2006/main">
               <a:ext uri="{FF2B5EF4-FFF2-40B4-BE49-F238E27FC236}">
-                <a16:creationId xmlns:a16="http://schemas.microsoft.com/office/drawing/2014/main" id="{64803657-64E4-4EB5-B49F-C16B2D7865C0}"/>
+                <a16:creationId xmlns:a16="http://schemas.microsoft.com/office/drawing/2014/main" id="{3AD21A6C-CA6F-45BE-9736-A281B70AFEE6}"/>
               </a:ext>
             </a:extLst>
           </p:cNvPr>
@@ -32034,7 +32034,7 @@
                           <a:ea typeface="Arial"/>
                           <a:cs typeface="Arial"/>
                         </a:rPr>
-                        <a:t>18 = 36 − 0,5Qd; 0,5Qd = 18</a:t>
+                        <a:t>18 = 36 − 0,5Qv; 0,5Qv = 18</a:t>
                       </a:r>
                     </a:p>
                   </a:txBody>
@@ -32058,7 +32058,7 @@
                           <a:ea typeface="Arial"/>
                           <a:cs typeface="Arial"/>
                         </a:rPr>
-                        <a:t>Qd = 36 plaatsen</a:t>
+                        <a:t>Qv = 36 plaatsen</a:t>
                       </a:r>
                     </a:p>
                   </a:txBody>
@@ -32108,7 +32108,7 @@
                           <a:ea typeface="Arial"/>
                           <a:cs typeface="Arial"/>
                         </a:rPr>
-                        <a:t>18 = 6 + 0,25Qs; 0,25Qs = 12</a:t>
+                        <a:t>18 = 6 + 0,25Qa; 0,25Qa = 12</a:t>
                       </a:r>
                     </a:p>
                   </a:txBody>
@@ -32132,7 +32132,7 @@
                           <a:ea typeface="Arial"/>
                           <a:cs typeface="Arial"/>
                         </a:rPr>
-                        <a:t>Qs = 48 plaatsen</a:t>
+                        <a:t>Qa = 48 plaatsen</a:t>
                       </a:r>
                     </a:p>
                   </a:txBody>
@@ -32300,7 +32300,7 @@
           <p:cNvPr id="7" name="De 24 kopers met de hoogste betalingsbereidheid kopen&#10;bij de aanb">
             <a:extLst xmlns:a="http://schemas.openxmlformats.org/drawingml/2006/main">
               <a:ext uri="{FF2B5EF4-FFF2-40B4-BE49-F238E27FC236}">
-                <a16:creationId xmlns:a16="http://schemas.microsoft.com/office/drawing/2014/main" id="{6CF89A4D-91D6-4FC7-B47B-F8972D1D806D}"/>
+                <a16:creationId xmlns:a16="http://schemas.microsoft.com/office/drawing/2014/main" id="{9657CBFA-112E-43D0-96CF-8E397A170404}"/>
               </a:ext>
             </a:extLst>
           </p:cNvPr>
@@ -32378,7 +32378,7 @@
     </p:spTree>
     <p:extLst>
       <p:ext uri="{BB962C8B-B14F-4D97-AF65-F5344CB8AC3E}">
-        <p14:creationId xmlns:p14="http://schemas.microsoft.com/office/powerpoint/2010/main" val="1305645567"/>
+        <p14:creationId xmlns:p14="http://schemas.microsoft.com/office/powerpoint/2010/main" val="1538771325"/>
       </p:ext>
     </p:extLst>
   </p:cSld>
@@ -32409,7 +32409,7 @@
           <p:cNvPr id="11" name="De rechterrand van het surplus">
             <a:extLst xmlns:a="http://schemas.openxmlformats.org/drawingml/2006/main">
               <a:ext uri="{FF2B5EF4-FFF2-40B4-BE49-F238E27FC236}">
-                <a16:creationId xmlns:a16="http://schemas.microsoft.com/office/drawing/2014/main" id="{AB0C5A20-4E40-4920-A585-C5219D3A1B81}"/>
+                <a16:creationId xmlns:a16="http://schemas.microsoft.com/office/drawing/2014/main" id="{88519118-E569-4896-8AD5-E5CDD9ABD21F}"/>
               </a:ext>
             </a:extLst>
           </p:cNvPr>
@@ -32466,7 +32466,7 @@
           <p:cNvPr id="2" name="">
             <a:extLst xmlns:a="http://schemas.openxmlformats.org/drawingml/2006/main">
               <a:ext uri="{FF2B5EF4-FFF2-40B4-BE49-F238E27FC236}">
-                <a16:creationId xmlns:a16="http://schemas.microsoft.com/office/drawing/2014/main" id="{F3EA8CBD-DB8C-46E6-A074-7EDC8DDCE4DC}"/>
+                <a16:creationId xmlns:a16="http://schemas.microsoft.com/office/drawing/2014/main" id="{AD34BCFB-A142-4AC0-89CE-42F9C1E82254}"/>
               </a:ext>
             </a:extLst>
           </p:cNvPr>
@@ -32495,7 +32495,7 @@
           <p:cNvPr id="3" name="§2.3.3 Pareto-efficiëntie en welvaartsverlies">
             <a:extLst xmlns:a="http://schemas.openxmlformats.org/drawingml/2006/main">
               <a:ext uri="{FF2B5EF4-FFF2-40B4-BE49-F238E27FC236}">
-                <a16:creationId xmlns:a16="http://schemas.microsoft.com/office/drawing/2014/main" id="{8B2D48E2-2AA0-4F6E-B998-A9C8927B3D54}"/>
+                <a16:creationId xmlns:a16="http://schemas.microsoft.com/office/drawing/2014/main" id="{9BA29D94-81AF-4066-B051-730D8B6BD3DD}"/>
               </a:ext>
             </a:extLst>
           </p:cNvPr>
@@ -32552,7 +32552,7 @@
           <p:cNvPr id="4" name="6">
             <a:extLst xmlns:a="http://schemas.openxmlformats.org/drawingml/2006/main">
               <a:ext uri="{FF2B5EF4-FFF2-40B4-BE49-F238E27FC236}">
-                <a16:creationId xmlns:a16="http://schemas.microsoft.com/office/drawing/2014/main" id="{59A2F381-DAC3-4209-8914-592610F14664}"/>
+                <a16:creationId xmlns:a16="http://schemas.microsoft.com/office/drawing/2014/main" id="{5B3AC103-452A-456C-83D9-4C83BC0E850F}"/>
               </a:ext>
             </a:extLst>
           </p:cNvPr>
@@ -32609,7 +32609,7 @@
           <p:cNvPr id="5" name="Uitlegvoorbeeld — niet uit het boek">
             <a:extLst xmlns:a="http://schemas.openxmlformats.org/drawingml/2006/main">
               <a:ext uri="{FF2B5EF4-FFF2-40B4-BE49-F238E27FC236}">
-                <a16:creationId xmlns:a16="http://schemas.microsoft.com/office/drawing/2014/main" id="{018890D2-47C1-418B-B57D-3FF0863D2B36}"/>
+                <a16:creationId xmlns:a16="http://schemas.microsoft.com/office/drawing/2014/main" id="{5588427D-C128-425B-834C-B177C923AEC5}"/>
               </a:ext>
             </a:extLst>
           </p:cNvPr>
@@ -32673,7 +32673,7 @@
         </p:xfrm>
         <a:graphic xmlns:a="http://schemas.openxmlformats.org/drawingml/2006/main">
           <a:graphicData uri="http://schemas.openxmlformats.org/drawingml/2006/chart">
-            <c:chart xmlns:r="http://schemas.openxmlformats.org/officeDocument/2006/relationships" xmlns:c="http://schemas.openxmlformats.org/drawingml/2006/chart" r:id="Rf24e4850b8784de2"/>
+            <c:chart xmlns:r="http://schemas.openxmlformats.org/officeDocument/2006/relationships" xmlns:c="http://schemas.openxmlformats.org/drawingml/2006/chart" r:id="Re31cc4196dd342e2"/>
           </a:graphicData>
         </a:graphic>
       </p:graphicFrame>
@@ -32682,7 +32682,7 @@
           <p:cNvPr id="7" name="Werkelijke Q = 24&#10;Betaalde prijs = € 18">
             <a:extLst xmlns:a="http://schemas.openxmlformats.org/drawingml/2006/main">
               <a:ext uri="{FF2B5EF4-FFF2-40B4-BE49-F238E27FC236}">
-                <a16:creationId xmlns:a16="http://schemas.microsoft.com/office/drawing/2014/main" id="{698B74AA-D49C-46CB-B222-1D9A818D3E31}"/>
+                <a16:creationId xmlns:a16="http://schemas.microsoft.com/office/drawing/2014/main" id="{C4EA8276-28B7-434C-882F-926AF8009C4F}"/>
               </a:ext>
             </a:extLst>
           </p:cNvPr>
@@ -32762,7 +32762,7 @@
           <p:cNvPr id="8" name="Betalingsbereidheid&#10;36 − 0,5 × 24 = € 24">
             <a:extLst xmlns:a="http://schemas.openxmlformats.org/drawingml/2006/main">
               <a:ext uri="{FF2B5EF4-FFF2-40B4-BE49-F238E27FC236}">
-                <a16:creationId xmlns:a16="http://schemas.microsoft.com/office/drawing/2014/main" id="{D2D6ACB8-54E5-4025-B687-E0DC0109B6FA}"/>
+                <a16:creationId xmlns:a16="http://schemas.microsoft.com/office/drawing/2014/main" id="{EBAE08C1-6F72-446B-A002-9A3117B43AD3}"/>
               </a:ext>
             </a:extLst>
           </p:cNvPr>
@@ -32842,7 +32842,7 @@
           <p:cNvPr id="9" name="Marginale kosten&#10;6 + 0,25 × 24 = € 12">
             <a:extLst xmlns:a="http://schemas.openxmlformats.org/drawingml/2006/main">
               <a:ext uri="{FF2B5EF4-FFF2-40B4-BE49-F238E27FC236}">
-                <a16:creationId xmlns:a16="http://schemas.microsoft.com/office/drawing/2014/main" id="{5EEC076A-1BC0-4C5B-991B-DA01A5560608}"/>
+                <a16:creationId xmlns:a16="http://schemas.microsoft.com/office/drawing/2014/main" id="{776B9740-8387-42C1-8475-A9B8290CA778}"/>
               </a:ext>
             </a:extLst>
           </p:cNvPr>
@@ -32922,7 +32922,7 @@
           <p:cNvPr id="10" name="Ook bij Q = 24 blijft voordeel over.">
             <a:extLst xmlns:a="http://schemas.openxmlformats.org/drawingml/2006/main">
               <a:ext uri="{FF2B5EF4-FFF2-40B4-BE49-F238E27FC236}">
-                <a16:creationId xmlns:a16="http://schemas.microsoft.com/office/drawing/2014/main" id="{94E58360-CDE1-40E6-9C1F-158BC1BDEB0D}"/>
+                <a16:creationId xmlns:a16="http://schemas.microsoft.com/office/drawing/2014/main" id="{E96A3839-0E91-4520-98A8-B9341C00ABF1}"/>
               </a:ext>
             </a:extLst>
           </p:cNvPr>
@@ -32977,7 +32977,7 @@
     </p:spTree>
     <p:extLst>
       <p:ext uri="{BB962C8B-B14F-4D97-AF65-F5344CB8AC3E}">
-        <p14:creationId xmlns:p14="http://schemas.microsoft.com/office/powerpoint/2010/main" val="1837341288"/>
+        <p14:creationId xmlns:p14="http://schemas.microsoft.com/office/powerpoint/2010/main" val="1637567271"/>
       </p:ext>
     </p:extLst>
   </p:cSld>
@@ -33008,7 +33008,7 @@
           <p:cNvPr id="12" name="CS: rechthoek plus driehoek">
             <a:extLst xmlns:a="http://schemas.openxmlformats.org/drawingml/2006/main">
               <a:ext uri="{FF2B5EF4-FFF2-40B4-BE49-F238E27FC236}">
-                <a16:creationId xmlns:a16="http://schemas.microsoft.com/office/drawing/2014/main" id="{A9CAA0ED-A2BD-4022-A357-0D5E4C3144A2}"/>
+                <a16:creationId xmlns:a16="http://schemas.microsoft.com/office/drawing/2014/main" id="{30F20204-ECB0-4171-8148-0D63A0CDA29A}"/>
               </a:ext>
             </a:extLst>
           </p:cNvPr>
@@ -33065,7 +33065,7 @@
           <p:cNvPr id="2" name="">
             <a:extLst xmlns:a="http://schemas.openxmlformats.org/drawingml/2006/main">
               <a:ext uri="{FF2B5EF4-FFF2-40B4-BE49-F238E27FC236}">
-                <a16:creationId xmlns:a16="http://schemas.microsoft.com/office/drawing/2014/main" id="{9C55A3C9-7963-438E-BF68-A5BB27FA15A7}"/>
+                <a16:creationId xmlns:a16="http://schemas.microsoft.com/office/drawing/2014/main" id="{C920D643-310A-442D-9AA5-B6A29EC4D24A}"/>
               </a:ext>
             </a:extLst>
           </p:cNvPr>
@@ -33094,7 +33094,7 @@
           <p:cNvPr id="3" name="§2.3.3 Pareto-efficiëntie en welvaartsverlies">
             <a:extLst xmlns:a="http://schemas.openxmlformats.org/drawingml/2006/main">
               <a:ext uri="{FF2B5EF4-FFF2-40B4-BE49-F238E27FC236}">
-                <a16:creationId xmlns:a16="http://schemas.microsoft.com/office/drawing/2014/main" id="{9A062796-4506-4880-81A4-C674604FAC72}"/>
+                <a16:creationId xmlns:a16="http://schemas.microsoft.com/office/drawing/2014/main" id="{3E255563-CFF6-4B52-AA22-25C943C67C85}"/>
               </a:ext>
             </a:extLst>
           </p:cNvPr>
@@ -33151,7 +33151,7 @@
           <p:cNvPr id="4" name="7">
             <a:extLst xmlns:a="http://schemas.openxmlformats.org/drawingml/2006/main">
               <a:ext uri="{FF2B5EF4-FFF2-40B4-BE49-F238E27FC236}">
-                <a16:creationId xmlns:a16="http://schemas.microsoft.com/office/drawing/2014/main" id="{B938B385-63F4-481A-8F2D-3FD066E1308C}"/>
+                <a16:creationId xmlns:a16="http://schemas.microsoft.com/office/drawing/2014/main" id="{321D66D1-A7FA-4E70-A6AD-0FDD990C1333}"/>
               </a:ext>
             </a:extLst>
           </p:cNvPr>
@@ -33208,7 +33208,7 @@
           <p:cNvPr id="5" name="Uitlegvoorbeeld — niet uit het boek">
             <a:extLst xmlns:a="http://schemas.openxmlformats.org/drawingml/2006/main">
               <a:ext uri="{FF2B5EF4-FFF2-40B4-BE49-F238E27FC236}">
-                <a16:creationId xmlns:a16="http://schemas.microsoft.com/office/drawing/2014/main" id="{800DE886-B3C2-45F7-97F3-65F5AB6D7FD1}"/>
+                <a16:creationId xmlns:a16="http://schemas.microsoft.com/office/drawing/2014/main" id="{77BB792D-AD7E-4D9C-BCDE-D1A1266F6E50}"/>
               </a:ext>
             </a:extLst>
           </p:cNvPr>
@@ -33265,7 +33265,7 @@
           <p:cNvPr id="6" name="CS rechthoek">
             <a:extLst xmlns:a="http://schemas.openxmlformats.org/drawingml/2006/main">
               <a:ext uri="{FF2B5EF4-FFF2-40B4-BE49-F238E27FC236}">
-                <a16:creationId xmlns:a16="http://schemas.microsoft.com/office/drawing/2014/main" id="{A6260712-238D-4CE4-9FE6-6BDE820D617F}"/>
+                <a16:creationId xmlns:a16="http://schemas.microsoft.com/office/drawing/2014/main" id="{F938C7FD-F28B-49B7-AD19-DF9148F82CF8}"/>
               </a:ext>
             </a:extLst>
           </p:cNvPr>
@@ -33311,7 +33311,7 @@
           <p:cNvPr id="7" name="CS driehoek">
             <a:extLst xmlns:a="http://schemas.openxmlformats.org/drawingml/2006/main">
               <a:ext uri="{FF2B5EF4-FFF2-40B4-BE49-F238E27FC236}">
-                <a16:creationId xmlns:a16="http://schemas.microsoft.com/office/drawing/2014/main" id="{65D50193-B1D5-48E3-A23D-9ABF0B192F17}"/>
+                <a16:creationId xmlns:a16="http://schemas.microsoft.com/office/drawing/2014/main" id="{80FF63A5-0A5B-4044-9ABD-EF1CE2442A5C}"/>
               </a:ext>
             </a:extLst>
           </p:cNvPr>
@@ -33361,7 +33361,7 @@
         </p:xfrm>
         <a:graphic xmlns:a="http://schemas.openxmlformats.org/drawingml/2006/main">
           <a:graphicData uri="http://schemas.openxmlformats.org/drawingml/2006/chart">
-            <c:chart xmlns:r="http://schemas.openxmlformats.org/officeDocument/2006/relationships" xmlns:c="http://schemas.openxmlformats.org/drawingml/2006/chart" r:id="R1413ced3fbca436b"/>
+            <c:chart xmlns:r="http://schemas.openxmlformats.org/officeDocument/2006/relationships" xmlns:c="http://schemas.openxmlformats.org/drawingml/2006/chart" r:id="R480781f7994c428d"/>
           </a:graphicData>
         </a:graphic>
       </p:graphicFrame>
@@ -33370,7 +33370,7 @@
           <p:cNvPr id="9" name="Rechthoek&#10;24 × (24 − 18) = € 144">
             <a:extLst xmlns:a="http://schemas.openxmlformats.org/drawingml/2006/main">
               <a:ext uri="{FF2B5EF4-FFF2-40B4-BE49-F238E27FC236}">
-                <a16:creationId xmlns:a16="http://schemas.microsoft.com/office/drawing/2014/main" id="{0749D7C5-93A9-4C66-B033-914146E5900B}"/>
+                <a16:creationId xmlns:a16="http://schemas.microsoft.com/office/drawing/2014/main" id="{36DAD884-B0A1-42BB-930D-942F41F49172}"/>
               </a:ext>
             </a:extLst>
           </p:cNvPr>
@@ -33450,7 +33450,7 @@
           <p:cNvPr id="10" name="Driehoek&#10;½ × 24 × (36 − 24)&#10;= € 144">
             <a:extLst xmlns:a="http://schemas.openxmlformats.org/drawingml/2006/main">
               <a:ext uri="{FF2B5EF4-FFF2-40B4-BE49-F238E27FC236}">
-                <a16:creationId xmlns:a16="http://schemas.microsoft.com/office/drawing/2014/main" id="{F8A1AA9D-884F-4470-B339-B8665871F450}"/>
+                <a16:creationId xmlns:a16="http://schemas.microsoft.com/office/drawing/2014/main" id="{E90687BC-78E3-4E58-BDDB-0CFDDCEF4380}"/>
               </a:ext>
             </a:extLst>
           </p:cNvPr>
@@ -33553,7 +33553,7 @@
           <p:cNvPr id="11" name="CS = 144 + 144&#10;= € 288">
             <a:extLst xmlns:a="http://schemas.openxmlformats.org/drawingml/2006/main">
               <a:ext uri="{FF2B5EF4-FFF2-40B4-BE49-F238E27FC236}">
-                <a16:creationId xmlns:a16="http://schemas.microsoft.com/office/drawing/2014/main" id="{47F4ABAE-D8E1-4DC3-9702-7CD2E3B8368B}"/>
+                <a16:creationId xmlns:a16="http://schemas.microsoft.com/office/drawing/2014/main" id="{BB41E075-B256-4138-89FA-C55A85B3B869}"/>
               </a:ext>
             </a:extLst>
           </p:cNvPr>
@@ -33631,7 +33631,7 @@
     </p:spTree>
     <p:extLst>
       <p:ext uri="{BB962C8B-B14F-4D97-AF65-F5344CB8AC3E}">
-        <p14:creationId xmlns:p14="http://schemas.microsoft.com/office/powerpoint/2010/main" val="1105408706"/>
+        <p14:creationId xmlns:p14="http://schemas.microsoft.com/office/powerpoint/2010/main" val="1099385590"/>
       </p:ext>
     </p:extLst>
   </p:cSld>
@@ -33662,7 +33662,7 @@
           <p:cNvPr id="12" name="PS: rechthoek plus driehoek">
             <a:extLst xmlns:a="http://schemas.openxmlformats.org/drawingml/2006/main">
               <a:ext uri="{FF2B5EF4-FFF2-40B4-BE49-F238E27FC236}">
-                <a16:creationId xmlns:a16="http://schemas.microsoft.com/office/drawing/2014/main" id="{4F8B16A5-ABC0-4DAE-BCF0-DC35BEC9E355}"/>
+                <a16:creationId xmlns:a16="http://schemas.microsoft.com/office/drawing/2014/main" id="{300181E3-3BB1-478B-B2BF-1F1EA510EEB8}"/>
               </a:ext>
             </a:extLst>
           </p:cNvPr>
@@ -33719,7 +33719,7 @@
           <p:cNvPr id="2" name="">
             <a:extLst xmlns:a="http://schemas.openxmlformats.org/drawingml/2006/main">
               <a:ext uri="{FF2B5EF4-FFF2-40B4-BE49-F238E27FC236}">
-                <a16:creationId xmlns:a16="http://schemas.microsoft.com/office/drawing/2014/main" id="{3AD28AD8-F74F-421A-83D5-C10AE8321E07}"/>
+                <a16:creationId xmlns:a16="http://schemas.microsoft.com/office/drawing/2014/main" id="{8D0592D5-4E44-4C3A-9A7F-6CEC68177AC2}"/>
               </a:ext>
             </a:extLst>
           </p:cNvPr>
@@ -33748,7 +33748,7 @@
           <p:cNvPr id="3" name="§2.3.3 Pareto-efficiëntie en welvaartsverlies">
             <a:extLst xmlns:a="http://schemas.openxmlformats.org/drawingml/2006/main">
               <a:ext uri="{FF2B5EF4-FFF2-40B4-BE49-F238E27FC236}">
-                <a16:creationId xmlns:a16="http://schemas.microsoft.com/office/drawing/2014/main" id="{8C0DC6EC-5306-42AF-97E4-6A69D0483C25}"/>
+                <a16:creationId xmlns:a16="http://schemas.microsoft.com/office/drawing/2014/main" id="{12356510-619B-426C-873F-1C36272924EF}"/>
               </a:ext>
             </a:extLst>
           </p:cNvPr>
@@ -33805,7 +33805,7 @@
           <p:cNvPr id="4" name="8">
             <a:extLst xmlns:a="http://schemas.openxmlformats.org/drawingml/2006/main">
               <a:ext uri="{FF2B5EF4-FFF2-40B4-BE49-F238E27FC236}">
-                <a16:creationId xmlns:a16="http://schemas.microsoft.com/office/drawing/2014/main" id="{78D06EAC-68D1-4807-8AA7-33245AFE9C53}"/>
+                <a16:creationId xmlns:a16="http://schemas.microsoft.com/office/drawing/2014/main" id="{2D53E0FA-9FB1-4595-94A7-E76BB63ADDFE}"/>
               </a:ext>
             </a:extLst>
           </p:cNvPr>
@@ -33862,7 +33862,7 @@
           <p:cNvPr id="5" name="Uitlegvoorbeeld — niet uit het boek">
             <a:extLst xmlns:a="http://schemas.openxmlformats.org/drawingml/2006/main">
               <a:ext uri="{FF2B5EF4-FFF2-40B4-BE49-F238E27FC236}">
-                <a16:creationId xmlns:a16="http://schemas.microsoft.com/office/drawing/2014/main" id="{79E2CD0E-8384-4F83-A668-75A6B8B1BDA1}"/>
+                <a16:creationId xmlns:a16="http://schemas.microsoft.com/office/drawing/2014/main" id="{18EE9B4B-CDFD-48A7-84F3-F318C7278FF1}"/>
               </a:ext>
             </a:extLst>
           </p:cNvPr>
@@ -33919,7 +33919,7 @@
           <p:cNvPr id="6" name="PS rechthoek">
             <a:extLst xmlns:a="http://schemas.openxmlformats.org/drawingml/2006/main">
               <a:ext uri="{FF2B5EF4-FFF2-40B4-BE49-F238E27FC236}">
-                <a16:creationId xmlns:a16="http://schemas.microsoft.com/office/drawing/2014/main" id="{D475E05B-E96A-46D1-92CC-4358CAEE51FB}"/>
+                <a16:creationId xmlns:a16="http://schemas.microsoft.com/office/drawing/2014/main" id="{DEDF7A70-743B-4327-9695-19EA0B722D2F}"/>
               </a:ext>
             </a:extLst>
           </p:cNvPr>
@@ -33965,7 +33965,7 @@
           <p:cNvPr id="7" name="PS driehoek">
             <a:extLst xmlns:a="http://schemas.openxmlformats.org/drawingml/2006/main">
               <a:ext uri="{FF2B5EF4-FFF2-40B4-BE49-F238E27FC236}">
-                <a16:creationId xmlns:a16="http://schemas.microsoft.com/office/drawing/2014/main" id="{EC45778E-64D9-45C7-976D-3028EC915A46}"/>
+                <a16:creationId xmlns:a16="http://schemas.microsoft.com/office/drawing/2014/main" id="{4241A04D-7D54-46FA-831B-30AD8540DD00}"/>
               </a:ext>
             </a:extLst>
           </p:cNvPr>
@@ -34015,7 +34015,7 @@
         </p:xfrm>
         <a:graphic xmlns:a="http://schemas.openxmlformats.org/drawingml/2006/main">
           <a:graphicData uri="http://schemas.openxmlformats.org/drawingml/2006/chart">
-            <c:chart xmlns:r="http://schemas.openxmlformats.org/officeDocument/2006/relationships" xmlns:c="http://schemas.openxmlformats.org/drawingml/2006/chart" r:id="Rb42b2d33f8d94898"/>
+            <c:chart xmlns:r="http://schemas.openxmlformats.org/officeDocument/2006/relationships" xmlns:c="http://schemas.openxmlformats.org/drawingml/2006/chart" r:id="R8d128de8b36e48bd"/>
           </a:graphicData>
         </a:graphic>
       </p:graphicFrame>
@@ -34024,7 +34024,7 @@
           <p:cNvPr id="9" name="Rechthoek&#10;24 × (18 − 12) = € 144">
             <a:extLst xmlns:a="http://schemas.openxmlformats.org/drawingml/2006/main">
               <a:ext uri="{FF2B5EF4-FFF2-40B4-BE49-F238E27FC236}">
-                <a16:creationId xmlns:a16="http://schemas.microsoft.com/office/drawing/2014/main" id="{7B80A9C7-CAF6-4C62-AB11-974011DF21C3}"/>
+                <a16:creationId xmlns:a16="http://schemas.microsoft.com/office/drawing/2014/main" id="{50D8CC72-9F01-48EF-8438-29F347BD8624}"/>
               </a:ext>
             </a:extLst>
           </p:cNvPr>
@@ -34104,7 +34104,7 @@
           <p:cNvPr id="10" name="Driehoek&#10;½ × 24 × (12 − 6)&#10;= € 72">
             <a:extLst xmlns:a="http://schemas.openxmlformats.org/drawingml/2006/main">
               <a:ext uri="{FF2B5EF4-FFF2-40B4-BE49-F238E27FC236}">
-                <a16:creationId xmlns:a16="http://schemas.microsoft.com/office/drawing/2014/main" id="{C40E48DB-2B4D-4805-889E-D4E348B62667}"/>
+                <a16:creationId xmlns:a16="http://schemas.microsoft.com/office/drawing/2014/main" id="{962D188B-C1FF-44D1-AB61-A5EE9317D33C}"/>
               </a:ext>
             </a:extLst>
           </p:cNvPr>
@@ -34207,7 +34207,7 @@
           <p:cNvPr id="11" name="PS = 144 + 72&#10;= € 216">
             <a:extLst xmlns:a="http://schemas.openxmlformats.org/drawingml/2006/main">
               <a:ext uri="{FF2B5EF4-FFF2-40B4-BE49-F238E27FC236}">
-                <a16:creationId xmlns:a16="http://schemas.microsoft.com/office/drawing/2014/main" id="{CEC1266E-EF78-4C54-A093-6444E0FD761C}"/>
+                <a16:creationId xmlns:a16="http://schemas.microsoft.com/office/drawing/2014/main" id="{F0024FB9-D5A6-4F8E-AA93-D92749F1FF4A}"/>
               </a:ext>
             </a:extLst>
           </p:cNvPr>
@@ -34285,7 +34285,7 @@
     </p:spTree>
     <p:extLst>
       <p:ext uri="{BB962C8B-B14F-4D97-AF65-F5344CB8AC3E}">
-        <p14:creationId xmlns:p14="http://schemas.microsoft.com/office/powerpoint/2010/main" val="1489651432"/>
+        <p14:creationId xmlns:p14="http://schemas.microsoft.com/office/powerpoint/2010/main" val="415808625"/>
       </p:ext>
     </p:extLst>
   </p:cSld>
@@ -34316,7 +34316,7 @@
           <p:cNvPr id="12" name="Welvaartsverlies: gemist gezamenlijk voordeel">
             <a:extLst xmlns:a="http://schemas.openxmlformats.org/drawingml/2006/main">
               <a:ext uri="{FF2B5EF4-FFF2-40B4-BE49-F238E27FC236}">
-                <a16:creationId xmlns:a16="http://schemas.microsoft.com/office/drawing/2014/main" id="{C1D773C2-1C7E-4DCA-BB0A-A8F131F40D21}"/>
+                <a16:creationId xmlns:a16="http://schemas.microsoft.com/office/drawing/2014/main" id="{A26821B3-833C-4F4E-AB25-815A1D1154E6}"/>
               </a:ext>
             </a:extLst>
           </p:cNvPr>
@@ -34373,7 +34373,7 @@
           <p:cNvPr id="2" name="">
             <a:extLst xmlns:a="http://schemas.openxmlformats.org/drawingml/2006/main">
               <a:ext uri="{FF2B5EF4-FFF2-40B4-BE49-F238E27FC236}">
-                <a16:creationId xmlns:a16="http://schemas.microsoft.com/office/drawing/2014/main" id="{D99DD2C7-27BB-4A3A-B454-B62DA81962CD}"/>
+                <a16:creationId xmlns:a16="http://schemas.microsoft.com/office/drawing/2014/main" id="{633DBD94-4342-4801-883B-209D76BC2AAB}"/>
               </a:ext>
             </a:extLst>
           </p:cNvPr>
@@ -34402,7 +34402,7 @@
           <p:cNvPr id="3" name="§2.3.3 Pareto-efficiëntie en welvaartsverlies">
             <a:extLst xmlns:a="http://schemas.openxmlformats.org/drawingml/2006/main">
               <a:ext uri="{FF2B5EF4-FFF2-40B4-BE49-F238E27FC236}">
-                <a16:creationId xmlns:a16="http://schemas.microsoft.com/office/drawing/2014/main" id="{DD8BC9B0-C2F8-4203-BDE4-C31C35768825}"/>
+                <a16:creationId xmlns:a16="http://schemas.microsoft.com/office/drawing/2014/main" id="{759D1AFC-554B-4DBA-B4DE-EFEBE3CE8072}"/>
               </a:ext>
             </a:extLst>
           </p:cNvPr>
@@ -34459,7 +34459,7 @@
           <p:cNvPr id="4" name="9">
             <a:extLst xmlns:a="http://schemas.openxmlformats.org/drawingml/2006/main">
               <a:ext uri="{FF2B5EF4-FFF2-40B4-BE49-F238E27FC236}">
-                <a16:creationId xmlns:a16="http://schemas.microsoft.com/office/drawing/2014/main" id="{821857B1-8200-4798-BFAE-AB2948CF63D6}"/>
+                <a16:creationId xmlns:a16="http://schemas.microsoft.com/office/drawing/2014/main" id="{D6B574D3-ECCD-4C93-A965-B0012B42C939}"/>
               </a:ext>
             </a:extLst>
           </p:cNvPr>
@@ -34516,7 +34516,7 @@
           <p:cNvPr id="5" name="Uitlegvoorbeeld — niet uit het boek">
             <a:extLst xmlns:a="http://schemas.openxmlformats.org/drawingml/2006/main">
               <a:ext uri="{FF2B5EF4-FFF2-40B4-BE49-F238E27FC236}">
-                <a16:creationId xmlns:a16="http://schemas.microsoft.com/office/drawing/2014/main" id="{6BE81F73-B93E-4A50-821D-49A008604224}"/>
+                <a16:creationId xmlns:a16="http://schemas.microsoft.com/office/drawing/2014/main" id="{047A3D77-F0DB-4CD4-A6E1-352E95B4554A}"/>
               </a:ext>
             </a:extLst>
           </p:cNvPr>
@@ -34573,7 +34573,7 @@
           <p:cNvPr id="6" name="Welvaartsverlies">
             <a:extLst xmlns:a="http://schemas.openxmlformats.org/drawingml/2006/main">
               <a:ext uri="{FF2B5EF4-FFF2-40B4-BE49-F238E27FC236}">
-                <a16:creationId xmlns:a16="http://schemas.microsoft.com/office/drawing/2014/main" id="{3577E23C-A884-4216-BB65-39B49E0A3088}"/>
+                <a16:creationId xmlns:a16="http://schemas.microsoft.com/office/drawing/2014/main" id="{796E2576-9215-4CC9-9598-AA5CD25DE966}"/>
               </a:ext>
             </a:extLst>
           </p:cNvPr>
@@ -34623,7 +34623,7 @@
         </p:xfrm>
         <a:graphic xmlns:a="http://schemas.openxmlformats.org/drawingml/2006/main">
           <a:graphicData uri="http://schemas.openxmlformats.org/drawingml/2006/chart">
-            <c:chart xmlns:r="http://schemas.openxmlformats.org/officeDocument/2006/relationships" xmlns:c="http://schemas.openxmlformats.org/drawingml/2006/chart" r:id="R7e78361360a046c7"/>
+            <c:chart xmlns:r="http://schemas.openxmlformats.org/officeDocument/2006/relationships" xmlns:c="http://schemas.openxmlformats.org/drawingml/2006/chart" r:id="R936fb0f5893a4985"/>
           </a:graphicData>
         </a:graphic>
       </p:graphicFrame>
@@ -34632,7 +34632,7 @@
           <p:cNvPr id="8" name="Werkelijk TS&#10;288 + 216 = € 504">
             <a:extLst xmlns:a="http://schemas.openxmlformats.org/drawingml/2006/main">
               <a:ext uri="{FF2B5EF4-FFF2-40B4-BE49-F238E27FC236}">
-                <a16:creationId xmlns:a16="http://schemas.microsoft.com/office/drawing/2014/main" id="{863DD1A7-43C3-476D-A547-E03780ADE5E6}"/>
+                <a16:creationId xmlns:a16="http://schemas.microsoft.com/office/drawing/2014/main" id="{3782E72E-1547-4F7E-A7D5-C225B6C3EE0D}"/>
               </a:ext>
             </a:extLst>
           </p:cNvPr>
@@ -34712,7 +34712,7 @@
           <p:cNvPr id="9" name="Verlies&#10;600 − 504 = € 96">
             <a:extLst xmlns:a="http://schemas.openxmlformats.org/drawingml/2006/main">
               <a:ext uri="{FF2B5EF4-FFF2-40B4-BE49-F238E27FC236}">
-                <a16:creationId xmlns:a16="http://schemas.microsoft.com/office/drawing/2014/main" id="{4214B725-CAD0-45F2-9233-B3D55DE2552F}"/>
+                <a16:creationId xmlns:a16="http://schemas.microsoft.com/office/drawing/2014/main" id="{17329588-8BA8-498B-A316-4D24CC8BEF50}"/>
               </a:ext>
             </a:extLst>
           </p:cNvPr>
@@ -34792,7 +34792,7 @@
           <p:cNvPr id="10" name="Controle met de driehoek&#10;½ × (40 − 24) × (24 − 12)&#10;= ½ × 16 × 12 ">
             <a:extLst xmlns:a="http://schemas.openxmlformats.org/drawingml/2006/main">
               <a:ext uri="{FF2B5EF4-FFF2-40B4-BE49-F238E27FC236}">
-                <a16:creationId xmlns:a16="http://schemas.microsoft.com/office/drawing/2014/main" id="{F3C9329E-3651-4140-B86C-7D52C7115B27}"/>
+                <a16:creationId xmlns:a16="http://schemas.microsoft.com/office/drawing/2014/main" id="{08B2269F-C734-4329-8FB2-E0D311BD5837}"/>
               </a:ext>
             </a:extLst>
           </p:cNvPr>
@@ -34895,7 +34895,7 @@
           <p:cNvPr id="11" name="16 gemiste plaatsen; hoogte € 12 per plaats.">
             <a:extLst xmlns:a="http://schemas.openxmlformats.org/drawingml/2006/main">
               <a:ext uri="{FF2B5EF4-FFF2-40B4-BE49-F238E27FC236}">
-                <a16:creationId xmlns:a16="http://schemas.microsoft.com/office/drawing/2014/main" id="{DBC3D5CB-1098-4879-9041-E550E06AF703}"/>
+                <a16:creationId xmlns:a16="http://schemas.microsoft.com/office/drawing/2014/main" id="{58858C12-E911-4342-B41B-79AD955A5DAB}"/>
               </a:ext>
             </a:extLst>
           </p:cNvPr>
@@ -34950,7 +34950,7 @@
     </p:spTree>
     <p:extLst>
       <p:ext uri="{BB962C8B-B14F-4D97-AF65-F5344CB8AC3E}">
-        <p14:creationId xmlns:p14="http://schemas.microsoft.com/office/powerpoint/2010/main" val="1230964896"/>
+        <p14:creationId xmlns:p14="http://schemas.microsoft.com/office/powerpoint/2010/main" val="1744346236"/>
       </p:ext>
     </p:extLst>
   </p:cSld>
